--- a/slides/pptx/week06.pptx
+++ b/slides/pptx/week06.pptx
@@ -24,9 +24,10 @@
     <p:sldId id="272" r:id="rId18"/>
     <p:sldId id="273" r:id="rId19"/>
     <p:sldId id="274" r:id="rId20"/>
+    <p:sldId id="275" r:id="rId21"/>
   </p:sldIdLst>
   <p:notesMasterIdLst>
-    <p:notesMasterId r:id="rId21"/>
+    <p:notesMasterId r:id="rId22"/>
   </p:notesMasterIdLst>
   <p:sldSz cx="9144000" cy="5143500"/>
   <p:notesSz cx="5143500" cy="9144000"/>
@@ -520,7 +521,7 @@
           <a:p>
             <a:r>
               <a:rPr lang="en-US" dirty="0"/>
-              <a:t>Hook: change /orders/1001 to /1002 and read a stranger's data — promise that demo. The #1 web risk in 2025 is Broken Access Control, and it's mostly missing one check. ~2 min.</a:t>
+              <a:t>Hook: change /orders/1 to /2 and read a stranger's data — promise that demo. The #1 web risk in 2025 is Broken Access Control, and it's mostly missing one check. ~2 min.</a:t>
             </a:r>
             <a:endParaRPr lang="en-US" dirty="0"/>
           </a:p>
@@ -696,7 +697,7 @@
           <a:p>
             <a:r>
               <a:rPr lang="en-US" dirty="0"/>
-              <a:t>Ties W4 (SQLi auth bypass + upload→RCE) into incident response. Walk the three lines as a story: get in → plant webshell → run commands. Teach URL-decoding (%20=space). Defenders read logs; attackers leave them. ~5 min.</a:t>
+              <a:t>Run this interactively — give 2 minutes, then poll answers. (1) QA only. (2) add JIRA-write, narrowly (least privilege, not a full role bump). (3) Developer (write Git); discuss whether QA's staging deploy counts. ~6 min.</a:t>
             </a:r>
             <a:endParaRPr lang="en-US" dirty="0"/>
           </a:p>
@@ -784,7 +785,7 @@
           <a:p>
             <a:r>
               <a:rPr lang="en-US" dirty="0"/>
-              <a:t>Reference for the worksheet. ~1 min.</a:t>
+              <a:t>Ties W4 (SQLi auth bypass + upload→RCE) into incident response. Walk the three lines as a story: get in → plant webshell → run commands. Teach URL-decoding (%20=space). Defenders read logs; attackers leave them. ~5 min.</a:t>
             </a:r>
             <a:endParaRPr lang="en-US" dirty="0"/>
           </a:p>
@@ -872,7 +873,7 @@
           <a:p>
             <a:r>
               <a:rPr lang="en-US" dirty="0"/>
-              <a:t>The payoff. #1: authorize EVERY request, deny by default. "Check ownership, not just authentication" is the IDOR fix in one line. Centralize so you can't forget a check on one endpoint. ~6 min.</a:t>
+              <a:t>Reference for the worksheet — these three are what's actually graded (worksheet header + Q1). CWE-321 is easy to drop since it's not the "obvious" JWT CWE, but it's the weak-secret task's specific id. ~1 min.</a:t>
             </a:r>
             <a:endParaRPr lang="en-US" dirty="0"/>
           </a:p>
@@ -960,7 +961,7 @@
           <a:p>
             <a:r>
               <a:rPr lang="en-US" dirty="0"/>
-              <a:t>Practical — they'll use Repeater to tweak object ids and Intruder to enumerate. Demo: intercept, change orders/1001→1002, forward, see another user's data. Set scope first so you don't attack out-of-bounds. ~5 min.</a:t>
+              <a:t>The payoff. #1: authorize EVERY request, deny by default. "Check ownership, not just authentication" is the IDOR fix in one line. Centralize so you can't forget a check on one endpoint. ~6 min.</a:t>
             </a:r>
             <a:endParaRPr lang="en-US" dirty="0"/>
           </a:p>
@@ -1048,7 +1049,7 @@
           <a:p>
             <a:r>
               <a:rPr lang="en-US" dirty="0"/>
-              <a:t>Explain before lab. Treasure hunt = enumerate ids for per-student flags. JWT forgery = alg:none or crack a weak secret. Round 2 (fix it) is graded. ~3 min.</a:t>
+              <a:t>Practical — they'll use Repeater to tweak object ids and Intruder to enumerate. Demo: intercept, change orders/1→2, forward, see another user's data. Set scope first so you don't attack out-of-bounds. ~5 min.</a:t>
             </a:r>
             <a:endParaRPr lang="en-US" dirty="0"/>
           </a:p>
@@ -1136,7 +1137,7 @@
           <a:p>
             <a:r>
               <a:rPr lang="en-US" dirty="0"/>
-              <a:t>Logistics. Step 3-4 (defend + prove denial) graded. Q6 of the quiz asks for the object id they used + the fix + their personal flag. Also the NoteVault project access-control task.</a:t>
+              <a:t>Explain before lab. Treasure hunt = enumerate ids for per-student flags — it's horizontal privilege escalation (become another regular user), not vertical (become admin); /api/admin exists in the code but no graded task ever targets it, don't imply it does. Defend is read-and-cite against a pre-written fix, not student-authored RBAC — nothing here is role-based. ~3 min.</a:t>
             </a:r>
             <a:endParaRPr lang="en-US" dirty="0"/>
           </a:p>
@@ -1224,7 +1225,7 @@
           <a:p>
             <a:r>
               <a:rPr lang="en-US" dirty="0"/>
-              <a:t>Before/after + proof. AI-resilient tasks count.</a:t>
+              <a:t>Logistics. Steps 3-4 (verify the defense + cite the fix) graded — no student-authored fix code in this lab, the fix is handed to them already written. Q6 of the quiz asks for the object id they used + the fix + their personal flag. Also the NoteVault project access-control task.</a:t>
             </a:r>
             <a:endParaRPr lang="en-US" dirty="0"/>
           </a:p>
@@ -1312,7 +1313,7 @@
           <a:p>
             <a:r>
               <a:rPr lang="en-US" dirty="0"/>
-              <a:t>Recap. Cold-call: "we authenticated the user — why can they still read another user's order?" (no ownership/authz check). ~2 min.</a:t>
+              <a:t>Before/after + proof — "citation," not "you wrote a fix": the correct app is provided pre-written. AI-resilient tasks count.</a:t>
             </a:r>
             <a:endParaRPr lang="en-US" dirty="0"/>
           </a:p>
@@ -1400,7 +1401,7 @@
           <a:p>
             <a:r>
               <a:rPr lang="en-US" dirty="0"/>
-              <a:t>Wrap the teaching block: "Next week we consolidate W1-6 — Jeopardy + a mock CTF in the exact midterm format. Bring your cheat-sheet of CWEs." Remind cumulative review quiz in W7.</a:t>
+              <a:t>Recap. Cold-call: "we authenticated the user — why can they still read another user's order?" (no ownership/authz check). ~2 min.</a:t>
             </a:r>
             <a:endParaRPr lang="en-US" dirty="0"/>
           </a:p>
@@ -1530,6 +1531,94 @@
 </p:notes>
 </file>
 
+<file path=ppt/notesSlides/notesSlide20.xml><?xml version="1.0" encoding="utf-8"?>
+<p:notes xmlns:a="http://schemas.openxmlformats.org/drawingml/2006/main" xmlns:r="http://schemas.openxmlformats.org/officeDocument/2006/relationships" xmlns:p="http://schemas.openxmlformats.org/presentationml/2006/main">
+  <p:cSld>
+    <p:spTree>
+      <p:nvGrpSpPr>
+        <p:cNvPr id="1" name=""/>
+        <p:cNvGrpSpPr/>
+        <p:nvPr/>
+      </p:nvGrpSpPr>
+      <p:grpSpPr>
+        <a:xfrm>
+          <a:off x="0" y="0"/>
+          <a:ext cx="0" cy="0"/>
+          <a:chOff x="0" y="0"/>
+          <a:chExt cx="0" cy="0"/>
+        </a:xfrm>
+      </p:grpSpPr>
+      <p:sp>
+        <p:nvSpPr>
+          <p:cNvPr id="2" name="Slide Image Placeholder 1"/>
+          <p:cNvSpPr>
+            <a:spLocks noGrp="1" noRot="1" noChangeAspect="1"/>
+          </p:cNvSpPr>
+          <p:nvPr>
+            <p:ph type="sldImg"/>
+          </p:nvPr>
+        </p:nvSpPr>
+        <p:spPr/>
+      </p:sp>
+      <p:sp>
+        <p:nvSpPr>
+          <p:cNvPr id="3" name="Notes Placeholder 2"/>
+          <p:cNvSpPr>
+            <a:spLocks noGrp="1"/>
+          </p:cNvSpPr>
+          <p:nvPr>
+            <p:ph type="body" idx="1"/>
+          </p:nvPr>
+        </p:nvSpPr>
+        <p:spPr/>
+        <p:txBody>
+          <a:bodyPr/>
+          <a:lstStyle/>
+          <a:p>
+            <a:r>
+              <a:rPr lang="en-US" dirty="0"/>
+              <a:t>Wrap the teaching block: "Next week we consolidate W1-6 — Jeopardy + a mock CTF in the exact midterm format. Bring your cheat-sheet of CWEs." Remind cumulative review quiz in W7.</a:t>
+            </a:r>
+            <a:endParaRPr lang="en-US" dirty="0"/>
+          </a:p>
+        </p:txBody>
+      </p:sp>
+      <p:sp>
+        <p:nvSpPr>
+          <p:cNvPr id="4" name="Slide Number Placeholder 3"/>
+          <p:cNvSpPr>
+            <a:spLocks noGrp="1"/>
+          </p:cNvSpPr>
+          <p:nvPr>
+            <p:ph type="sldNum" sz="quarter" idx="10"/>
+          </p:nvPr>
+        </p:nvSpPr>
+        <p:spPr/>
+        <p:txBody>
+          <a:bodyPr/>
+          <a:lstStyle/>
+          <a:p>
+            <a:fld id="{F7021451-1387-4CA6-816F-3879F97B5CBC}" type="slidenum">
+              <a:rPr lang="en-US"/>
+              <a:t>20</a:t>
+            </a:fld>
+            <a:endParaRPr lang="en-US"/>
+          </a:p>
+        </p:txBody>
+      </p:sp>
+    </p:spTree>
+    <p:extLst>
+      <p:ext uri="{BB962C8B-B14F-4D97-AF65-F5344CB8AC3E}">
+        <p14:creationId xmlns:p14="http://schemas.microsoft.com/office/powerpoint/2010/main" val="1024086991"/>
+      </p:ext>
+    </p:extLst>
+  </p:cSld>
+  <p:clrMapOvr>
+    <a:masterClrMapping/>
+  </p:clrMapOvr>
+</p:notes>
+</file>
+
 <file path=ppt/notesSlides/notesSlide3.xml><?xml version="1.0" encoding="utf-8"?>
 <p:notes xmlns:a="http://schemas.openxmlformats.org/drawingml/2006/main" xmlns:r="http://schemas.openxmlformats.org/officeDocument/2006/relationships" xmlns:p="http://schemas.openxmlformats.org/presentationml/2006/main">
   <p:cSld>
@@ -1752,7 +1841,7 @@
           <a:p>
             <a:r>
               <a:rPr lang="en-US" dirty="0"/>
-              <a:t>Connect cookie flags to W5: HttpOnly stops XSS theft, SameSite stops CSRF, Secure forces HTTPS. Explain session fixation briefly (attacker sets the id before login). ~5 min.</a:t>
+              <a:t>Connect cookie flags to W5: HttpOnly stops XSS theft, SameSite stops CSRF, Secure forces HTTPS. Be upfront that this lab doesn't touch cookies — don't let students expect a cookie-based task today. Explain session fixation briefly (attacker sets the id before login) as general knowledge. ~5 min.</a:t>
             </a:r>
             <a:endParaRPr lang="en-US" dirty="0"/>
           </a:p>
@@ -2104,7 +2193,7 @@
           <a:p>
             <a:r>
               <a:rPr lang="en-US" dirty="0"/>
-              <a:t>Quick taxonomy; RBAC is what they'll implement in the lab. Stress the three best-practice principles — especially implicit deny (default to no access). ~4 min.</a:t>
+              <a:t>Quick taxonomy — general knowledge. Today's lab does NOT implement RBAC/ABAC: the actual fix is a flat ownership check (`order["owner"] != user`), no roles or permissions structure at all. Don't tell students they'll build RBAC today; they won't. Stress the three best-practice principles — especially implicit deny (default to no access). ~4 min.</a:t>
             </a:r>
             <a:endParaRPr lang="en-US" dirty="0"/>
           </a:p>
@@ -3461,7 +3550,7 @@
         <p:spPr>
           <a:xfrm>
             <a:off x="1051560" y="3611880"/>
-            <a:ext cx="7589520" cy="384048"/>
+            <a:ext cx="7589520" cy="402336"/>
           </a:xfrm>
           <a:prstGeom prst="rect">
             <a:avLst/>
@@ -3470,7 +3559,9 @@
           <a:ln/>
         </p:spPr>
         <p:txBody>
-          <a:bodyPr wrap="square" lIns="0" tIns="0" rIns="0" bIns="0" rtlCol="0" anchor="ctr"/>
+          <a:bodyPr wrap="square" lIns="0" tIns="0" rIns="0" bIns="0" rtlCol="0" anchor="ctr">
+            <a:normAutofit/>
+          </a:bodyPr>
           <a:lstStyle/>
           <a:p>
             <a:pPr indent="0" marL="0">
@@ -3493,73 +3584,14 @@
       </p:sp>
       <p:sp>
         <p:nvSpPr>
-          <p:cNvPr id="9" name="Shape 5"/>
-          <p:cNvSpPr/>
-          <p:nvPr/>
-        </p:nvSpPr>
-        <p:spPr>
-          <a:xfrm>
-            <a:off x="502920" y="4069080"/>
-            <a:ext cx="384048" cy="384048"/>
-          </a:xfrm>
-          <a:prstGeom prst="ellipse">
-            <a:avLst/>
-          </a:prstGeom>
-          <a:solidFill>
-            <a:srgbClr val="E35205"/>
-          </a:solidFill>
-          <a:ln/>
-        </p:spPr>
-      </p:sp>
-      <p:sp>
-        <p:nvSpPr>
-          <p:cNvPr id="10" name="Text 6"/>
-          <p:cNvSpPr/>
-          <p:nvPr/>
-        </p:nvSpPr>
-        <p:spPr>
-          <a:xfrm>
-            <a:off x="502920" y="4069080"/>
-            <a:ext cx="384048" cy="384048"/>
-          </a:xfrm>
-          <a:prstGeom prst="rect">
-            <a:avLst/>
-          </a:prstGeom>
-          <a:noFill/>
-          <a:ln/>
-        </p:spPr>
-        <p:txBody>
-          <a:bodyPr wrap="square" lIns="0" tIns="0" rIns="0" bIns="0" rtlCol="0" anchor="ctr"/>
-          <a:lstStyle/>
-          <a:p>
-            <a:pPr algn="ctr" indent="0" marL="0">
-              <a:buNone/>
-            </a:pPr>
-            <a:r>
-              <a:rPr lang="en-US" sz="1500" b="1" dirty="0">
-                <a:solidFill>
-                  <a:srgbClr val="0E1726"/>
-                </a:solidFill>
-                <a:latin typeface="Arial" pitchFamily="34" charset="0"/>
-                <a:ea typeface="Arial" pitchFamily="34" charset="-122"/>
-                <a:cs typeface="Arial" pitchFamily="34" charset="-120"/>
-              </a:rPr>
-              <a:t>2</a:t>
-            </a:r>
-            <a:endParaRPr lang="en-US" sz="1500" dirty="0"/>
-          </a:p>
-        </p:txBody>
-      </p:sp>
-      <p:sp>
-        <p:nvSpPr>
-          <p:cNvPr id="11" name="Text 7"/>
-          <p:cNvSpPr/>
-          <p:nvPr/>
-        </p:nvSpPr>
-        <p:spPr>
-          <a:xfrm>
-            <a:off x="1051560" y="4069080"/>
-            <a:ext cx="7589520" cy="384048"/>
+          <p:cNvPr id="9" name="Text 5"/>
+          <p:cNvSpPr/>
+          <p:nvPr/>
+        </p:nvSpPr>
+        <p:spPr>
+          <a:xfrm>
+            <a:off x="457200" y="4800600"/>
+            <a:ext cx="6949440" cy="274320"/>
           </a:xfrm>
           <a:prstGeom prst="rect">
             <a:avLst/>
@@ -3575,53 +3607,14 @@
               <a:buNone/>
             </a:pPr>
             <a:r>
-              <a:rPr lang="en-US" sz="1350" dirty="0">
-                <a:solidFill>
-                  <a:srgbClr val="1F2937"/>
+              <a:rPr lang="en-US" sz="900" dirty="0">
+                <a:solidFill>
+                  <a:srgbClr val="64748B"/>
                 </a:solidFill>
                 <a:latin typeface="Calibri" pitchFamily="34" charset="0"/>
                 <a:ea typeface="Calibri" pitchFamily="34" charset="-122"/>
                 <a:cs typeface="Calibri" pitchFamily="34" charset="-120"/>
               </a:rPr>
-              <a:t>An intern must create bug entries — which role's perms to add?</a:t>
-            </a:r>
-            <a:endParaRPr lang="en-US" sz="1350" dirty="0"/>
-          </a:p>
-        </p:txBody>
-      </p:sp>
-      <p:sp>
-        <p:nvSpPr>
-          <p:cNvPr id="12" name="Text 8"/>
-          <p:cNvSpPr/>
-          <p:nvPr/>
-        </p:nvSpPr>
-        <p:spPr>
-          <a:xfrm>
-            <a:off x="457200" y="4800600"/>
-            <a:ext cx="6949440" cy="274320"/>
-          </a:xfrm>
-          <a:prstGeom prst="rect">
-            <a:avLst/>
-          </a:prstGeom>
-          <a:noFill/>
-          <a:ln/>
-        </p:spPr>
-        <p:txBody>
-          <a:bodyPr wrap="square" lIns="0" tIns="0" rIns="0" bIns="0" rtlCol="0" anchor="ctr"/>
-          <a:lstStyle/>
-          <a:p>
-            <a:pPr indent="0" marL="0">
-              <a:buNone/>
-            </a:pPr>
-            <a:r>
-              <a:rPr lang="en-US" sz="900" dirty="0">
-                <a:solidFill>
-                  <a:srgbClr val="64748B"/>
-                </a:solidFill>
-                <a:latin typeface="Calibri" pitchFamily="34" charset="0"/>
-                <a:ea typeface="Calibri" pitchFamily="34" charset="-122"/>
-                <a:cs typeface="Calibri" pitchFamily="34" charset="-120"/>
-              </a:rPr>
               <a:t>Software Security · Week 6</a:t>
             </a:r>
             <a:endParaRPr lang="en-US" sz="900" dirty="0"/>
@@ -3630,7 +3623,7 @@
       </p:sp>
       <p:pic>
         <p:nvPicPr>
-          <p:cNvPr id="13" name="Image 1" descr="/Users/pop7/Library/CloudStorage/OneDrive-MonsterConnectCo.,Ltd/Lecture/KOSEN69 - software-security/slides/pptx/assets/logo-small.png">    </p:cNvPr>
+          <p:cNvPr id="10" name="Image 1" descr="/Users/pop7/Library/CloudStorage/OneDrive-MonsterConnectCo.,Ltd/Lecture/KOSEN69 - software-security/slides/pptx/assets/logo-small.png">    </p:cNvPr>
           <p:cNvPicPr>
             <a:picLocks noChangeAspect="1"/>
           </p:cNvPicPr>
@@ -3768,7 +3761,7 @@
                 <a:ea typeface="Arial" pitchFamily="34" charset="-122"/>
                 <a:cs typeface="Arial" pitchFamily="34" charset="-120"/>
               </a:rPr>
-              <a:t>Reading the attack in the logs</a:t>
+              <a:t>Exercise — RBAC (cont.)</a:t>
             </a:r>
             <a:endParaRPr lang="en-US" sz="2600" dirty="0"/>
           </a:p>
@@ -3776,14 +3769,34 @@
       </p:sp>
       <p:sp>
         <p:nvSpPr>
-          <p:cNvPr id="5" name="Text 2"/>
-          <p:cNvSpPr/>
-          <p:nvPr/>
-        </p:nvSpPr>
-        <p:spPr>
-          <a:xfrm>
-            <a:off x="548640" y="1325880"/>
-            <a:ext cx="8046720" cy="548640"/>
+          <p:cNvPr id="5" name="Shape 2"/>
+          <p:cNvSpPr/>
+          <p:nvPr/>
+        </p:nvSpPr>
+        <p:spPr>
+          <a:xfrm>
+            <a:off x="502920" y="1325880"/>
+            <a:ext cx="384048" cy="384048"/>
+          </a:xfrm>
+          <a:prstGeom prst="ellipse">
+            <a:avLst/>
+          </a:prstGeom>
+          <a:solidFill>
+            <a:srgbClr val="E35205"/>
+          </a:solidFill>
+          <a:ln/>
+        </p:spPr>
+      </p:sp>
+      <p:sp>
+        <p:nvSpPr>
+          <p:cNvPr id="6" name="Text 3"/>
+          <p:cNvSpPr/>
+          <p:nvPr/>
+        </p:nvSpPr>
+        <p:spPr>
+          <a:xfrm>
+            <a:off x="502920" y="1325880"/>
+            <a:ext cx="384048" cy="384048"/>
           </a:xfrm>
           <a:prstGeom prst="rect">
             <a:avLst/>
@@ -3792,14 +3805,55 @@
           <a:ln/>
         </p:spPr>
         <p:txBody>
-          <a:bodyPr wrap="square" lIns="0" tIns="0" rIns="0" bIns="0" rtlCol="0" anchor="t"/>
+          <a:bodyPr wrap="square" lIns="0" tIns="0" rIns="0" bIns="0" rtlCol="0" anchor="ctr"/>
+          <a:lstStyle/>
+          <a:p>
+            <a:pPr algn="ctr" indent="0" marL="0">
+              <a:buNone/>
+            </a:pPr>
+            <a:r>
+              <a:rPr lang="en-US" sz="1500" b="1" dirty="0">
+                <a:solidFill>
+                  <a:srgbClr val="0E1726"/>
+                </a:solidFill>
+                <a:latin typeface="Arial" pitchFamily="34" charset="0"/>
+                <a:ea typeface="Arial" pitchFamily="34" charset="-122"/>
+                <a:cs typeface="Arial" pitchFamily="34" charset="-120"/>
+              </a:rPr>
+              <a:t>2</a:t>
+            </a:r>
+            <a:endParaRPr lang="en-US" sz="1500" dirty="0"/>
+          </a:p>
+        </p:txBody>
+      </p:sp>
+      <p:sp>
+        <p:nvSpPr>
+          <p:cNvPr id="7" name="Text 4"/>
+          <p:cNvSpPr/>
+          <p:nvPr/>
+        </p:nvSpPr>
+        <p:spPr>
+          <a:xfrm>
+            <a:off x="1051560" y="1325880"/>
+            <a:ext cx="7589520" cy="402336"/>
+          </a:xfrm>
+          <a:prstGeom prst="rect">
+            <a:avLst/>
+          </a:prstGeom>
+          <a:noFill/>
+          <a:ln/>
+        </p:spPr>
+        <p:txBody>
+          <a:bodyPr wrap="square" lIns="0" tIns="0" rIns="0" bIns="0" rtlCol="0" anchor="ctr">
+            <a:normAutofit/>
+          </a:bodyPr>
           <a:lstStyle/>
           <a:p>
             <a:pPr indent="0" marL="0">
               <a:buNone/>
             </a:pPr>
             <a:r>
-              <a:rPr lang="en-US" sz="1400" dirty="0">
+              <a:rPr lang="en-US" sz="1350" dirty="0">
                 <a:solidFill>
                   <a:srgbClr val="1F2937"/>
                 </a:solidFill>
@@ -3807,49 +3861,42 @@
                 <a:ea typeface="Calibri" pitchFamily="34" charset="-122"/>
                 <a:cs typeface="Calibri" pitchFamily="34" charset="-120"/>
               </a:rPr>
-              <a:t>Reconstruct the kill chain from Apache logs:</a:t>
-            </a:r>
-            <a:endParaRPr lang="en-US" sz="1400" dirty="0"/>
-          </a:p>
-        </p:txBody>
-      </p:sp>
-      <p:sp>
-        <p:nvSpPr>
-          <p:cNvPr id="6" name="Shape 3"/>
-          <p:cNvSpPr/>
-          <p:nvPr/>
-        </p:nvSpPr>
-        <p:spPr>
-          <a:xfrm>
-            <a:off x="457200" y="1965960"/>
-            <a:ext cx="8229600" cy="1042416"/>
-          </a:xfrm>
-          <a:prstGeom prst="roundRect">
-            <a:avLst>
-              <a:gd name="adj" fmla="val 5263"/>
-            </a:avLst>
+              <a:t>An intern must create bug entries — which role's perms to add?</a:t>
+            </a:r>
+            <a:endParaRPr lang="en-US" sz="1350" dirty="0"/>
+          </a:p>
+        </p:txBody>
+      </p:sp>
+      <p:sp>
+        <p:nvSpPr>
+          <p:cNvPr id="8" name="Shape 5"/>
+          <p:cNvSpPr/>
+          <p:nvPr/>
+        </p:nvSpPr>
+        <p:spPr>
+          <a:xfrm>
+            <a:off x="502920" y="1801368"/>
+            <a:ext cx="384048" cy="384048"/>
+          </a:xfrm>
+          <a:prstGeom prst="ellipse">
+            <a:avLst/>
           </a:prstGeom>
           <a:solidFill>
-            <a:srgbClr val="0A1020"/>
+            <a:srgbClr val="E35205"/>
           </a:solidFill>
-          <a:ln w="12700">
-            <a:solidFill>
-              <a:srgbClr val="E8EDF3"/>
-            </a:solidFill>
-            <a:prstDash val="solid"/>
-          </a:ln>
-        </p:spPr>
-      </p:sp>
-      <p:sp>
-        <p:nvSpPr>
-          <p:cNvPr id="7" name="Text 4"/>
-          <p:cNvSpPr/>
-          <p:nvPr/>
-        </p:nvSpPr>
-        <p:spPr>
-          <a:xfrm>
-            <a:off x="640080" y="2039112"/>
-            <a:ext cx="7863840" cy="896112"/>
+          <a:ln/>
+        </p:spPr>
+      </p:sp>
+      <p:sp>
+        <p:nvSpPr>
+          <p:cNvPr id="9" name="Text 6"/>
+          <p:cNvSpPr/>
+          <p:nvPr/>
+        </p:nvSpPr>
+        <p:spPr>
+          <a:xfrm>
+            <a:off x="502920" y="1801368"/>
+            <a:ext cx="384048" cy="384048"/>
           </a:xfrm>
           <a:prstGeom prst="rect">
             <a:avLst/>
@@ -3858,120 +3905,55 @@
           <a:ln/>
         </p:spPr>
         <p:txBody>
-          <a:bodyPr wrap="square" lIns="0" tIns="0" rIns="0" bIns="0" rtlCol="0" anchor="t"/>
+          <a:bodyPr wrap="square" lIns="0" tIns="0" rIns="0" bIns="0" rtlCol="0" anchor="ctr"/>
+          <a:lstStyle/>
+          <a:p>
+            <a:pPr algn="ctr" indent="0" marL="0">
+              <a:buNone/>
+            </a:pPr>
+            <a:r>
+              <a:rPr lang="en-US" sz="1500" b="1" dirty="0">
+                <a:solidFill>
+                  <a:srgbClr val="0E1726"/>
+                </a:solidFill>
+                <a:latin typeface="Arial" pitchFamily="34" charset="0"/>
+                <a:ea typeface="Arial" pitchFamily="34" charset="-122"/>
+                <a:cs typeface="Arial" pitchFamily="34" charset="-120"/>
+              </a:rPr>
+              <a:t>3</a:t>
+            </a:r>
+            <a:endParaRPr lang="en-US" sz="1500" dirty="0"/>
+          </a:p>
+        </p:txBody>
+      </p:sp>
+      <p:sp>
+        <p:nvSpPr>
+          <p:cNvPr id="10" name="Text 7"/>
+          <p:cNvSpPr/>
+          <p:nvPr/>
+        </p:nvSpPr>
+        <p:spPr>
+          <a:xfrm>
+            <a:off x="1051560" y="1801368"/>
+            <a:ext cx="7589520" cy="402336"/>
+          </a:xfrm>
+          <a:prstGeom prst="rect">
+            <a:avLst/>
+          </a:prstGeom>
+          <a:noFill/>
+          <a:ln/>
+        </p:spPr>
+        <p:txBody>
+          <a:bodyPr wrap="square" lIns="0" tIns="0" rIns="0" bIns="0" rtlCol="0" anchor="ctr">
+            <a:normAutofit/>
+          </a:bodyPr>
           <a:lstStyle/>
           <a:p>
             <a:pPr indent="0" marL="0">
               <a:buNone/>
             </a:pPr>
             <a:r>
-              <a:rPr lang="en-US" sz="1150" dirty="0">
-                <a:solidFill>
-                  <a:srgbClr val="9FE7D6"/>
-                </a:solidFill>
-                <a:latin typeface="Courier New" pitchFamily="34" charset="0"/>
-                <a:ea typeface="Courier New" pitchFamily="34" charset="-122"/>
-                <a:cs typeface="Courier New" pitchFamily="34" charset="-120"/>
-              </a:rPr>
-              <a:t>GET /login.php?username=' or 1=1 limit 1; -- a&amp;...   302   ← SQLi admin</a:t>
-            </a:r>
-            <a:endParaRPr lang="en-US" sz="1150" dirty="0"/>
-          </a:p>
-          <a:p>
-            <a:pPr indent="0" marL="0">
-              <a:buNone/>
-            </a:pPr>
-            <a:r>
-              <a:rPr lang="en-US" sz="1150" dirty="0">
-                <a:solidFill>
-                  <a:srgbClr val="9FE7D6"/>
-                </a:solidFill>
-                <a:latin typeface="Courier New" pitchFamily="34" charset="0"/>
-                <a:ea typeface="Courier New" pitchFamily="34" charset="-122"/>
-                <a:cs typeface="Courier New" pitchFamily="34" charset="-120"/>
-              </a:rPr>
-              <a:t>POST /upload.php                                     200   ← backdoor</a:t>
-            </a:r>
-            <a:endParaRPr lang="en-US" sz="1150" dirty="0"/>
-          </a:p>
-          <a:p>
-            <a:pPr indent="0" marL="0">
-              <a:buNone/>
-            </a:pPr>
-            <a:r>
-              <a:rPr lang="en-US" sz="1150" dirty="0">
-                <a:solidFill>
-                  <a:srgbClr val="9FE7D6"/>
-                </a:solidFill>
-                <a:latin typeface="Courier New" pitchFamily="34" charset="0"/>
-                <a:ea typeface="Courier New" pitchFamily="34" charset="-122"/>
-                <a:cs typeface="Courier New" pitchFamily="34" charset="-120"/>
-              </a:rPr>
-              <a:t>GET /uploads/backdoor.php?cmd=ls%20-l                200   ← RCE</a:t>
-            </a:r>
-            <a:endParaRPr lang="en-US" sz="1150" dirty="0"/>
-          </a:p>
-        </p:txBody>
-      </p:sp>
-      <p:sp>
-        <p:nvSpPr>
-          <p:cNvPr id="8" name="Shape 5"/>
-          <p:cNvSpPr/>
-          <p:nvPr/>
-        </p:nvSpPr>
-        <p:spPr>
-          <a:xfrm>
-            <a:off x="457200" y="3172968"/>
-            <a:ext cx="8229600" cy="585216"/>
-          </a:xfrm>
-          <a:prstGeom prst="roundRect">
-            <a:avLst>
-              <a:gd name="adj" fmla="val 12500"/>
-            </a:avLst>
-          </a:prstGeom>
-          <a:solidFill>
-            <a:srgbClr val="F1F5F9"/>
-          </a:solidFill>
-          <a:ln/>
-          <a:effectLst>
-            <a:outerShdw sx="100000" sy="100000" kx="0" ky="0" algn="bl" rotWithShape="0" blurRad="76200" dist="25400" dir="5400000">
-              <a:srgbClr val="000000">
-                <a:alpha val="12000"/>
-              </a:srgbClr>
-            </a:outerShdw>
-          </a:effectLst>
-        </p:spPr>
-      </p:sp>
-      <p:sp>
-        <p:nvSpPr>
-          <p:cNvPr id="9" name="Text 6"/>
-          <p:cNvSpPr/>
-          <p:nvPr/>
-        </p:nvSpPr>
-        <p:spPr>
-          <a:xfrm>
-            <a:off x="731520" y="3282696"/>
-            <a:ext cx="7680960" cy="365760"/>
-          </a:xfrm>
-          <a:prstGeom prst="rect">
-            <a:avLst/>
-          </a:prstGeom>
-          <a:noFill/>
-          <a:ln/>
-        </p:spPr>
-        <p:txBody>
-          <a:bodyPr wrap="square" lIns="0" tIns="0" rIns="0" bIns="0" rtlCol="0" anchor="t"/>
-          <a:lstStyle/>
-          <a:p>
-            <a:pPr marL="342900" indent="-342900">
-              <a:spcAft>
-                <a:spcPts val="600"/>
-              </a:spcAft>
-              <a:buSzPct val="100000"/>
-              <a:buChar char="•"/>
-            </a:pPr>
-            <a:r>
-              <a:rPr lang="en-US" sz="1400" dirty="0">
+              <a:rPr lang="en-US" sz="1350" dirty="0">
                 <a:solidFill>
                   <a:srgbClr val="1F2937"/>
                 </a:solidFill>
@@ -3979,15 +3961,15 @@
                 <a:ea typeface="Calibri" pitchFamily="34" charset="-122"/>
                 <a:cs typeface="Calibri" pitchFamily="34" charset="-120"/>
               </a:rPr>
-              <a:t>%20 = space (URL-decode!) · logs let you trace what happened</a:t>
-            </a:r>
-            <a:endParaRPr lang="en-US" sz="1400" dirty="0"/>
-          </a:p>
-        </p:txBody>
-      </p:sp>
-      <p:sp>
-        <p:nvSpPr>
-          <p:cNvPr id="10" name="Text 7"/>
+              <a:t>List all roles that can modify the codebase.</a:t>
+            </a:r>
+            <a:endParaRPr lang="en-US" sz="1350" dirty="0"/>
+          </a:p>
+        </p:txBody>
+      </p:sp>
+      <p:sp>
+        <p:nvSpPr>
+          <p:cNvPr id="11" name="Text 8"/>
           <p:cNvSpPr/>
           <p:nvPr/>
         </p:nvSpPr>
@@ -4026,7 +4008,7 @@
       </p:sp>
       <p:pic>
         <p:nvPicPr>
-          <p:cNvPr id="11" name="Image 1" descr="/Users/pop7/Library/CloudStorage/OneDrive-MonsterConnectCo.,Ltd/Lecture/KOSEN69 - software-security/slides/pptx/assets/logo-small.png">    </p:cNvPr>
+          <p:cNvPr id="12" name="Image 1" descr="/Users/pop7/Library/CloudStorage/OneDrive-MonsterConnectCo.,Ltd/Lecture/KOSEN69 - software-security/slides/pptx/assets/logo-small.png">    </p:cNvPr>
           <p:cNvPicPr>
             <a:picLocks noChangeAspect="1"/>
           </p:cNvPicPr>
@@ -4164,7 +4146,7 @@
                 <a:ea typeface="Arial" pitchFamily="34" charset="-122"/>
                 <a:cs typeface="Arial" pitchFamily="34" charset="-120"/>
               </a:rPr>
-              <a:t>CWE mapping</a:t>
+              <a:t>Reading the attack in the logs</a:t>
             </a:r>
             <a:endParaRPr lang="en-US" sz="2600" dirty="0"/>
           </a:p>
@@ -4172,18 +4154,161 @@
       </p:sp>
       <p:sp>
         <p:nvSpPr>
-          <p:cNvPr id="5" name="Shape 2"/>
-          <p:cNvSpPr/>
-          <p:nvPr/>
-        </p:nvSpPr>
-        <p:spPr>
-          <a:xfrm>
-            <a:off x="457200" y="1325880"/>
-            <a:ext cx="8229600" cy="1207008"/>
+          <p:cNvPr id="5" name="Text 2"/>
+          <p:cNvSpPr/>
+          <p:nvPr/>
+        </p:nvSpPr>
+        <p:spPr>
+          <a:xfrm>
+            <a:off x="548640" y="1325880"/>
+            <a:ext cx="8046720" cy="548640"/>
+          </a:xfrm>
+          <a:prstGeom prst="rect">
+            <a:avLst/>
+          </a:prstGeom>
+          <a:noFill/>
+          <a:ln/>
+        </p:spPr>
+        <p:txBody>
+          <a:bodyPr wrap="square" lIns="0" tIns="0" rIns="0" bIns="0" rtlCol="0" anchor="t">
+            <a:normAutofit/>
+          </a:bodyPr>
+          <a:lstStyle/>
+          <a:p>
+            <a:pPr indent="0" marL="0">
+              <a:buNone/>
+            </a:pPr>
+            <a:r>
+              <a:rPr lang="en-US" sz="1400" dirty="0">
+                <a:solidFill>
+                  <a:srgbClr val="1F2937"/>
+                </a:solidFill>
+                <a:latin typeface="Calibri" pitchFamily="34" charset="0"/>
+                <a:ea typeface="Calibri" pitchFamily="34" charset="-122"/>
+                <a:cs typeface="Calibri" pitchFamily="34" charset="-120"/>
+              </a:rPr>
+              <a:t>Reconstruct the kill chain from Apache logs:</a:t>
+            </a:r>
+            <a:endParaRPr lang="en-US" sz="1400" dirty="0"/>
+          </a:p>
+        </p:txBody>
+      </p:sp>
+      <p:sp>
+        <p:nvSpPr>
+          <p:cNvPr id="6" name="Shape 3"/>
+          <p:cNvSpPr/>
+          <p:nvPr/>
+        </p:nvSpPr>
+        <p:spPr>
+          <a:xfrm>
+            <a:off x="457200" y="1965960"/>
+            <a:ext cx="8229600" cy="932688"/>
           </a:xfrm>
           <a:prstGeom prst="roundRect">
             <a:avLst>
-              <a:gd name="adj" fmla="val 6061"/>
+              <a:gd name="adj" fmla="val 5882"/>
+            </a:avLst>
+          </a:prstGeom>
+          <a:solidFill>
+            <a:srgbClr val="0A1020"/>
+          </a:solidFill>
+          <a:ln w="12700">
+            <a:solidFill>
+              <a:srgbClr val="E8EDF3"/>
+            </a:solidFill>
+            <a:prstDash val="solid"/>
+          </a:ln>
+        </p:spPr>
+      </p:sp>
+      <p:sp>
+        <p:nvSpPr>
+          <p:cNvPr id="7" name="Text 4"/>
+          <p:cNvSpPr/>
+          <p:nvPr/>
+        </p:nvSpPr>
+        <p:spPr>
+          <a:xfrm>
+            <a:off x="640080" y="2039112"/>
+            <a:ext cx="7863840" cy="786384"/>
+          </a:xfrm>
+          <a:prstGeom prst="rect">
+            <a:avLst/>
+          </a:prstGeom>
+          <a:noFill/>
+          <a:ln/>
+        </p:spPr>
+        <p:txBody>
+          <a:bodyPr wrap="square" lIns="0" tIns="0" rIns="0" bIns="0" rtlCol="0" anchor="t">
+            <a:normAutofit/>
+          </a:bodyPr>
+          <a:lstStyle/>
+          <a:p>
+            <a:pPr indent="0" marL="0">
+              <a:buNone/>
+            </a:pPr>
+            <a:r>
+              <a:rPr lang="en-US" sz="1150" dirty="0">
+                <a:solidFill>
+                  <a:srgbClr val="9FE7D6"/>
+                </a:solidFill>
+                <a:latin typeface="Courier New" pitchFamily="34" charset="0"/>
+                <a:ea typeface="Courier New" pitchFamily="34" charset="-122"/>
+                <a:cs typeface="Courier New" pitchFamily="34" charset="-120"/>
+              </a:rPr>
+              <a:t>GET /login.php?username=' or 1=1 limit 1; -- a&amp;...   302   ← SQLi admin</a:t>
+            </a:r>
+            <a:endParaRPr lang="en-US" sz="1150" dirty="0"/>
+          </a:p>
+          <a:p>
+            <a:pPr indent="0" marL="0">
+              <a:buNone/>
+            </a:pPr>
+            <a:r>
+              <a:rPr lang="en-US" sz="1150" dirty="0">
+                <a:solidFill>
+                  <a:srgbClr val="9FE7D6"/>
+                </a:solidFill>
+                <a:latin typeface="Courier New" pitchFamily="34" charset="0"/>
+                <a:ea typeface="Courier New" pitchFamily="34" charset="-122"/>
+                <a:cs typeface="Courier New" pitchFamily="34" charset="-120"/>
+              </a:rPr>
+              <a:t>POST /upload.php                                     200   ← backdoor</a:t>
+            </a:r>
+            <a:endParaRPr lang="en-US" sz="1150" dirty="0"/>
+          </a:p>
+          <a:p>
+            <a:pPr indent="0" marL="0">
+              <a:buNone/>
+            </a:pPr>
+            <a:r>
+              <a:rPr lang="en-US" sz="1150" dirty="0">
+                <a:solidFill>
+                  <a:srgbClr val="9FE7D6"/>
+                </a:solidFill>
+                <a:latin typeface="Courier New" pitchFamily="34" charset="0"/>
+                <a:ea typeface="Courier New" pitchFamily="34" charset="-122"/>
+                <a:cs typeface="Courier New" pitchFamily="34" charset="-120"/>
+              </a:rPr>
+              <a:t>GET /uploads/backdoor.php?cmd=ls%20-l                200   ← RCE</a:t>
+            </a:r>
+            <a:endParaRPr lang="en-US" sz="1150" dirty="0"/>
+          </a:p>
+        </p:txBody>
+      </p:sp>
+      <p:sp>
+        <p:nvSpPr>
+          <p:cNvPr id="8" name="Shape 5"/>
+          <p:cNvSpPr/>
+          <p:nvPr/>
+        </p:nvSpPr>
+        <p:spPr>
+          <a:xfrm>
+            <a:off x="457200" y="3063240"/>
+            <a:ext cx="8229600" cy="585216"/>
+          </a:xfrm>
+          <a:prstGeom prst="roundRect">
+            <a:avLst>
+              <a:gd name="adj" fmla="val 12500"/>
             </a:avLst>
           </a:prstGeom>
           <a:solidFill>
@@ -4201,14 +4326,14 @@
       </p:sp>
       <p:sp>
         <p:nvSpPr>
-          <p:cNvPr id="6" name="Text 3"/>
-          <p:cNvSpPr/>
-          <p:nvPr/>
-        </p:nvSpPr>
-        <p:spPr>
-          <a:xfrm>
-            <a:off x="731520" y="1435608"/>
-            <a:ext cx="7680960" cy="987552"/>
+          <p:cNvPr id="9" name="Text 6"/>
+          <p:cNvSpPr/>
+          <p:nvPr/>
+        </p:nvSpPr>
+        <p:spPr>
+          <a:xfrm>
+            <a:off x="731520" y="3172968"/>
+            <a:ext cx="7680960" cy="365760"/>
           </a:xfrm>
           <a:prstGeom prst="rect">
             <a:avLst/>
@@ -4217,7 +4342,9 @@
           <a:ln/>
         </p:spPr>
         <p:txBody>
-          <a:bodyPr wrap="square" lIns="0" tIns="0" rIns="0" bIns="0" rtlCol="0" anchor="t"/>
+          <a:bodyPr wrap="square" lIns="0" tIns="0" rIns="0" bIns="0" rtlCol="0" anchor="t">
+            <a:normAutofit/>
+          </a:bodyPr>
           <a:lstStyle/>
           <a:p>
             <a:pPr marL="342900" indent="-342900">
@@ -4236,87 +4363,45 @@
                 <a:ea typeface="Calibri" pitchFamily="34" charset="-122"/>
                 <a:cs typeface="Calibri" pitchFamily="34" charset="-120"/>
               </a:rPr>
-              <a:t>CWE-639 / CWE-284 — IDOR / improper access control</a:t>
+              <a:t>%20 = space (URL-decode!) · logs let you trace what happened</a:t>
             </a:r>
             <a:endParaRPr lang="en-US" sz="1400" dirty="0"/>
           </a:p>
-          <a:p>
-            <a:pPr marL="342900" indent="-342900">
-              <a:spcAft>
-                <a:spcPts val="600"/>
-              </a:spcAft>
-              <a:buSzPct val="100000"/>
-              <a:buChar char="•"/>
-            </a:pPr>
-            <a:r>
-              <a:rPr lang="en-US" sz="1400" dirty="0">
-                <a:solidFill>
-                  <a:srgbClr val="1F2937"/>
+        </p:txBody>
+      </p:sp>
+      <p:sp>
+        <p:nvSpPr>
+          <p:cNvPr id="10" name="Text 7"/>
+          <p:cNvSpPr/>
+          <p:nvPr/>
+        </p:nvSpPr>
+        <p:spPr>
+          <a:xfrm>
+            <a:off x="457200" y="4800600"/>
+            <a:ext cx="6949440" cy="274320"/>
+          </a:xfrm>
+          <a:prstGeom prst="rect">
+            <a:avLst/>
+          </a:prstGeom>
+          <a:noFill/>
+          <a:ln/>
+        </p:spPr>
+        <p:txBody>
+          <a:bodyPr wrap="square" lIns="0" tIns="0" rIns="0" bIns="0" rtlCol="0" anchor="ctr"/>
+          <a:lstStyle/>
+          <a:p>
+            <a:pPr indent="0" marL="0">
+              <a:buNone/>
+            </a:pPr>
+            <a:r>
+              <a:rPr lang="en-US" sz="900" dirty="0">
+                <a:solidFill>
+                  <a:srgbClr val="64748B"/>
                 </a:solidFill>
                 <a:latin typeface="Calibri" pitchFamily="34" charset="0"/>
                 <a:ea typeface="Calibri" pitchFamily="34" charset="-122"/>
                 <a:cs typeface="Calibri" pitchFamily="34" charset="-120"/>
               </a:rPr>
-              <a:t>CWE-287 — improper authentication</a:t>
-            </a:r>
-            <a:endParaRPr lang="en-US" sz="1400" dirty="0"/>
-          </a:p>
-          <a:p>
-            <a:pPr marL="342900" indent="-342900">
-              <a:spcAft>
-                <a:spcPts val="600"/>
-              </a:spcAft>
-              <a:buSzPct val="100000"/>
-              <a:buChar char="•"/>
-            </a:pPr>
-            <a:r>
-              <a:rPr lang="en-US" sz="1400" dirty="0">
-                <a:solidFill>
-                  <a:srgbClr val="1F2937"/>
-                </a:solidFill>
-                <a:latin typeface="Calibri" pitchFamily="34" charset="0"/>
-                <a:ea typeface="Calibri" pitchFamily="34" charset="-122"/>
-                <a:cs typeface="Calibri" pitchFamily="34" charset="-120"/>
-              </a:rPr>
-              <a:t>CWE-345 / CWE-347 — insufficient verification / bad signature</a:t>
-            </a:r>
-            <a:endParaRPr lang="en-US" sz="1400" dirty="0"/>
-          </a:p>
-        </p:txBody>
-      </p:sp>
-      <p:sp>
-        <p:nvSpPr>
-          <p:cNvPr id="7" name="Text 4"/>
-          <p:cNvSpPr/>
-          <p:nvPr/>
-        </p:nvSpPr>
-        <p:spPr>
-          <a:xfrm>
-            <a:off x="457200" y="4800600"/>
-            <a:ext cx="6949440" cy="274320"/>
-          </a:xfrm>
-          <a:prstGeom prst="rect">
-            <a:avLst/>
-          </a:prstGeom>
-          <a:noFill/>
-          <a:ln/>
-        </p:spPr>
-        <p:txBody>
-          <a:bodyPr wrap="square" lIns="0" tIns="0" rIns="0" bIns="0" rtlCol="0" anchor="ctr"/>
-          <a:lstStyle/>
-          <a:p>
-            <a:pPr indent="0" marL="0">
-              <a:buNone/>
-            </a:pPr>
-            <a:r>
-              <a:rPr lang="en-US" sz="900" dirty="0">
-                <a:solidFill>
-                  <a:srgbClr val="64748B"/>
-                </a:solidFill>
-                <a:latin typeface="Calibri" pitchFamily="34" charset="0"/>
-                <a:ea typeface="Calibri" pitchFamily="34" charset="-122"/>
-                <a:cs typeface="Calibri" pitchFamily="34" charset="-120"/>
-              </a:rPr>
               <a:t>Software Security · Week 6</a:t>
             </a:r>
             <a:endParaRPr lang="en-US" sz="900" dirty="0"/>
@@ -4325,7 +4410,7 @@
       </p:sp>
       <p:pic>
         <p:nvPicPr>
-          <p:cNvPr id="8" name="Image 1" descr="/Users/pop7/Library/CloudStorage/OneDrive-MonsterConnectCo.,Ltd/Lecture/KOSEN69 - software-security/slides/pptx/assets/logo-small.png">    </p:cNvPr>
+          <p:cNvPr id="11" name="Image 1" descr="/Users/pop7/Library/CloudStorage/OneDrive-MonsterConnectCo.,Ltd/Lecture/KOSEN69 - software-security/slides/pptx/assets/logo-small.png">    </p:cNvPr>
           <p:cNvPicPr>
             <a:picLocks noChangeAspect="1"/>
           </p:cNvPicPr>
@@ -4463,7 +4548,7 @@
                 <a:ea typeface="Arial" pitchFamily="34" charset="-122"/>
                 <a:cs typeface="Arial" pitchFamily="34" charset="-120"/>
               </a:rPr>
-              <a:t>Defenses</a:t>
+              <a:t>CWE mapping</a:t>
             </a:r>
             <a:endParaRPr lang="en-US" sz="2600" dirty="0"/>
           </a:p>
@@ -4478,11 +4563,11 @@
         <p:spPr>
           <a:xfrm>
             <a:off x="457200" y="1325880"/>
-            <a:ext cx="8229600" cy="2139696"/>
+            <a:ext cx="8229600" cy="1207008"/>
           </a:xfrm>
           <a:prstGeom prst="roundRect">
             <a:avLst>
-              <a:gd name="adj" fmla="val 3419"/>
+              <a:gd name="adj" fmla="val 6061"/>
             </a:avLst>
           </a:prstGeom>
           <a:solidFill>
@@ -4507,7 +4592,7 @@
         <p:spPr>
           <a:xfrm>
             <a:off x="731520" y="1435608"/>
-            <a:ext cx="7680960" cy="1920240"/>
+            <a:ext cx="7680960" cy="987552"/>
           </a:xfrm>
           <a:prstGeom prst="rect">
             <a:avLst/>
@@ -4516,7 +4601,9 @@
           <a:ln/>
         </p:spPr>
         <p:txBody>
-          <a:bodyPr wrap="square" lIns="0" tIns="0" rIns="0" bIns="0" rtlCol="0" anchor="t"/>
+          <a:bodyPr wrap="square" lIns="0" tIns="0" rIns="0" bIns="0" rtlCol="0" anchor="t">
+            <a:normAutofit/>
+          </a:bodyPr>
           <a:lstStyle/>
           <a:p>
             <a:pPr marL="342900" indent="-342900">
@@ -4535,7 +4622,7 @@
                 <a:ea typeface="Calibri" pitchFamily="34" charset="-122"/>
                 <a:cs typeface="Calibri" pitchFamily="34" charset="-120"/>
               </a:rPr>
-              <a:t>Server-side authorization on every request (deny by default)</a:t>
+              <a:t>CWE-639 — IDOR / missing ownership check</a:t>
             </a:r>
             <a:endParaRPr lang="en-US" sz="1400" dirty="0"/>
           </a:p>
@@ -4556,7 +4643,7 @@
                 <a:ea typeface="Calibri" pitchFamily="34" charset="-122"/>
                 <a:cs typeface="Calibri" pitchFamily="34" charset="-120"/>
               </a:rPr>
-              <a:t>Check ownership, not just authentication</a:t>
+              <a:t>CWE-347 — improper signature verification (alg:none forgery)</a:t>
             </a:r>
             <a:endParaRPr lang="en-US" sz="1400" dirty="0"/>
           </a:p>
@@ -4577,70 +4664,7 @@
                 <a:ea typeface="Calibri" pitchFamily="34" charset="-122"/>
                 <a:cs typeface="Calibri" pitchFamily="34" charset="-120"/>
               </a:rPr>
-              <a:t>Strong session tokens + proper expiry/rotation</a:t>
-            </a:r>
-            <a:endParaRPr lang="en-US" sz="1400" dirty="0"/>
-          </a:p>
-          <a:p>
-            <a:pPr marL="342900" indent="-342900">
-              <a:spcAft>
-                <a:spcPts val="600"/>
-              </a:spcAft>
-              <a:buSzPct val="100000"/>
-              <a:buChar char="•"/>
-            </a:pPr>
-            <a:r>
-              <a:rPr lang="en-US" sz="1400" dirty="0">
-                <a:solidFill>
-                  <a:srgbClr val="1F2937"/>
-                </a:solidFill>
-                <a:latin typeface="Calibri" pitchFamily="34" charset="0"/>
-                <a:ea typeface="Calibri" pitchFamily="34" charset="-122"/>
-                <a:cs typeface="Calibri" pitchFamily="34" charset="-120"/>
-              </a:rPr>
-              <a:t>Verify JWT signature, alg, exp, aud; keep secrets strong</a:t>
-            </a:r>
-            <a:endParaRPr lang="en-US" sz="1400" dirty="0"/>
-          </a:p>
-          <a:p>
-            <a:pPr marL="342900" indent="-342900">
-              <a:spcAft>
-                <a:spcPts val="600"/>
-              </a:spcAft>
-              <a:buSzPct val="100000"/>
-              <a:buChar char="•"/>
-            </a:pPr>
-            <a:r>
-              <a:rPr lang="en-US" sz="1400" dirty="0">
-                <a:solidFill>
-                  <a:srgbClr val="1F2937"/>
-                </a:solidFill>
-                <a:latin typeface="Calibri" pitchFamily="34" charset="0"/>
-                <a:ea typeface="Calibri" pitchFamily="34" charset="-122"/>
-                <a:cs typeface="Calibri" pitchFamily="34" charset="-120"/>
-              </a:rPr>
-              <a:t>RBAC / ABAC enforced centrally</a:t>
-            </a:r>
-            <a:endParaRPr lang="en-US" sz="1400" dirty="0"/>
-          </a:p>
-          <a:p>
-            <a:pPr marL="342900" indent="-342900">
-              <a:spcAft>
-                <a:spcPts val="600"/>
-              </a:spcAft>
-              <a:buSzPct val="100000"/>
-              <a:buChar char="•"/>
-            </a:pPr>
-            <a:r>
-              <a:rPr lang="en-US" sz="1400" dirty="0">
-                <a:solidFill>
-                  <a:srgbClr val="1F2937"/>
-                </a:solidFill>
-                <a:latin typeface="Calibri" pitchFamily="34" charset="0"/>
-                <a:ea typeface="Calibri" pitchFamily="34" charset="-122"/>
-                <a:cs typeface="Calibri" pitchFamily="34" charset="-120"/>
-              </a:rPr>
-              <a:t>Centralize the check — don't scatter if role==... everywhere</a:t>
+              <a:t>CWE-321 — use of a hardcoded/weak cryptographic key (the guessable HMAC secret)</a:t>
             </a:r>
             <a:endParaRPr lang="en-US" sz="1400" dirty="0"/>
           </a:p>
@@ -4825,6 +4849,370 @@
                 <a:ea typeface="Arial" pitchFamily="34" charset="-122"/>
                 <a:cs typeface="Arial" pitchFamily="34" charset="-120"/>
               </a:rPr>
+              <a:t>Defenses</a:t>
+            </a:r>
+            <a:endParaRPr lang="en-US" sz="2600" dirty="0"/>
+          </a:p>
+        </p:txBody>
+      </p:sp>
+      <p:sp>
+        <p:nvSpPr>
+          <p:cNvPr id="5" name="Shape 2"/>
+          <p:cNvSpPr/>
+          <p:nvPr/>
+        </p:nvSpPr>
+        <p:spPr>
+          <a:xfrm>
+            <a:off x="457200" y="1325880"/>
+            <a:ext cx="8229600" cy="2139696"/>
+          </a:xfrm>
+          <a:prstGeom prst="roundRect">
+            <a:avLst>
+              <a:gd name="adj" fmla="val 3419"/>
+            </a:avLst>
+          </a:prstGeom>
+          <a:solidFill>
+            <a:srgbClr val="F1F5F9"/>
+          </a:solidFill>
+          <a:ln/>
+          <a:effectLst>
+            <a:outerShdw sx="100000" sy="100000" kx="0" ky="0" algn="bl" rotWithShape="0" blurRad="76200" dist="25400" dir="5400000">
+              <a:srgbClr val="000000">
+                <a:alpha val="12000"/>
+              </a:srgbClr>
+            </a:outerShdw>
+          </a:effectLst>
+        </p:spPr>
+      </p:sp>
+      <p:sp>
+        <p:nvSpPr>
+          <p:cNvPr id="6" name="Text 3"/>
+          <p:cNvSpPr/>
+          <p:nvPr/>
+        </p:nvSpPr>
+        <p:spPr>
+          <a:xfrm>
+            <a:off x="731520" y="1435608"/>
+            <a:ext cx="7680960" cy="1920240"/>
+          </a:xfrm>
+          <a:prstGeom prst="rect">
+            <a:avLst/>
+          </a:prstGeom>
+          <a:noFill/>
+          <a:ln/>
+        </p:spPr>
+        <p:txBody>
+          <a:bodyPr wrap="square" lIns="0" tIns="0" rIns="0" bIns="0" rtlCol="0" anchor="t">
+            <a:normAutofit/>
+          </a:bodyPr>
+          <a:lstStyle/>
+          <a:p>
+            <a:pPr marL="342900" indent="-342900">
+              <a:spcAft>
+                <a:spcPts val="600"/>
+              </a:spcAft>
+              <a:buSzPct val="100000"/>
+              <a:buChar char="•"/>
+            </a:pPr>
+            <a:r>
+              <a:rPr lang="en-US" sz="1400" dirty="0">
+                <a:solidFill>
+                  <a:srgbClr val="1F2937"/>
+                </a:solidFill>
+                <a:latin typeface="Calibri" pitchFamily="34" charset="0"/>
+                <a:ea typeface="Calibri" pitchFamily="34" charset="-122"/>
+                <a:cs typeface="Calibri" pitchFamily="34" charset="-120"/>
+              </a:rPr>
+              <a:t>Server-side authorization on every request (deny by default)</a:t>
+            </a:r>
+            <a:endParaRPr lang="en-US" sz="1400" dirty="0"/>
+          </a:p>
+          <a:p>
+            <a:pPr marL="342900" indent="-342900">
+              <a:spcAft>
+                <a:spcPts val="600"/>
+              </a:spcAft>
+              <a:buSzPct val="100000"/>
+              <a:buChar char="•"/>
+            </a:pPr>
+            <a:r>
+              <a:rPr lang="en-US" sz="1400" dirty="0">
+                <a:solidFill>
+                  <a:srgbClr val="1F2937"/>
+                </a:solidFill>
+                <a:latin typeface="Calibri" pitchFamily="34" charset="0"/>
+                <a:ea typeface="Calibri" pitchFamily="34" charset="-122"/>
+                <a:cs typeface="Calibri" pitchFamily="34" charset="-120"/>
+              </a:rPr>
+              <a:t>Check ownership, not just authentication</a:t>
+            </a:r>
+            <a:endParaRPr lang="en-US" sz="1400" dirty="0"/>
+          </a:p>
+          <a:p>
+            <a:pPr marL="342900" indent="-342900">
+              <a:spcAft>
+                <a:spcPts val="600"/>
+              </a:spcAft>
+              <a:buSzPct val="100000"/>
+              <a:buChar char="•"/>
+            </a:pPr>
+            <a:r>
+              <a:rPr lang="en-US" sz="1400" dirty="0">
+                <a:solidFill>
+                  <a:srgbClr val="1F2937"/>
+                </a:solidFill>
+                <a:latin typeface="Calibri" pitchFamily="34" charset="0"/>
+                <a:ea typeface="Calibri" pitchFamily="34" charset="-122"/>
+                <a:cs typeface="Calibri" pitchFamily="34" charset="-120"/>
+              </a:rPr>
+              <a:t>Strong session tokens + proper expiry/rotation</a:t>
+            </a:r>
+            <a:endParaRPr lang="en-US" sz="1400" dirty="0"/>
+          </a:p>
+          <a:p>
+            <a:pPr marL="342900" indent="-342900">
+              <a:spcAft>
+                <a:spcPts val="600"/>
+              </a:spcAft>
+              <a:buSzPct val="100000"/>
+              <a:buChar char="•"/>
+            </a:pPr>
+            <a:r>
+              <a:rPr lang="en-US" sz="1400" dirty="0">
+                <a:solidFill>
+                  <a:srgbClr val="1F2937"/>
+                </a:solidFill>
+                <a:latin typeface="Calibri" pitchFamily="34" charset="0"/>
+                <a:ea typeface="Calibri" pitchFamily="34" charset="-122"/>
+                <a:cs typeface="Calibri" pitchFamily="34" charset="-120"/>
+              </a:rPr>
+              <a:t>Verify JWT signature, alg, exp, aud; keep secrets strong</a:t>
+            </a:r>
+            <a:endParaRPr lang="en-US" sz="1400" dirty="0"/>
+          </a:p>
+          <a:p>
+            <a:pPr marL="342900" indent="-342900">
+              <a:spcAft>
+                <a:spcPts val="600"/>
+              </a:spcAft>
+              <a:buSzPct val="100000"/>
+              <a:buChar char="•"/>
+            </a:pPr>
+            <a:r>
+              <a:rPr lang="en-US" sz="1400" dirty="0">
+                <a:solidFill>
+                  <a:srgbClr val="1F2937"/>
+                </a:solidFill>
+                <a:latin typeface="Calibri" pitchFamily="34" charset="0"/>
+                <a:ea typeface="Calibri" pitchFamily="34" charset="-122"/>
+                <a:cs typeface="Calibri" pitchFamily="34" charset="-120"/>
+              </a:rPr>
+              <a:t>RBAC / ABAC enforced centrally</a:t>
+            </a:r>
+            <a:endParaRPr lang="en-US" sz="1400" dirty="0"/>
+          </a:p>
+          <a:p>
+            <a:pPr marL="342900" indent="-342900">
+              <a:spcAft>
+                <a:spcPts val="600"/>
+              </a:spcAft>
+              <a:buSzPct val="100000"/>
+              <a:buChar char="•"/>
+            </a:pPr>
+            <a:r>
+              <a:rPr lang="en-US" sz="1400" dirty="0">
+                <a:solidFill>
+                  <a:srgbClr val="1F2937"/>
+                </a:solidFill>
+                <a:latin typeface="Calibri" pitchFamily="34" charset="0"/>
+                <a:ea typeface="Calibri" pitchFamily="34" charset="-122"/>
+                <a:cs typeface="Calibri" pitchFamily="34" charset="-120"/>
+              </a:rPr>
+              <a:t>Centralize the check — don't scatter if role==... everywhere</a:t>
+            </a:r>
+            <a:endParaRPr lang="en-US" sz="1400" dirty="0"/>
+          </a:p>
+        </p:txBody>
+      </p:sp>
+      <p:sp>
+        <p:nvSpPr>
+          <p:cNvPr id="7" name="Text 4"/>
+          <p:cNvSpPr/>
+          <p:nvPr/>
+        </p:nvSpPr>
+        <p:spPr>
+          <a:xfrm>
+            <a:off x="457200" y="4800600"/>
+            <a:ext cx="6949440" cy="274320"/>
+          </a:xfrm>
+          <a:prstGeom prst="rect">
+            <a:avLst/>
+          </a:prstGeom>
+          <a:noFill/>
+          <a:ln/>
+        </p:spPr>
+        <p:txBody>
+          <a:bodyPr wrap="square" lIns="0" tIns="0" rIns="0" bIns="0" rtlCol="0" anchor="ctr"/>
+          <a:lstStyle/>
+          <a:p>
+            <a:pPr indent="0" marL="0">
+              <a:buNone/>
+            </a:pPr>
+            <a:r>
+              <a:rPr lang="en-US" sz="900" dirty="0">
+                <a:solidFill>
+                  <a:srgbClr val="64748B"/>
+                </a:solidFill>
+                <a:latin typeface="Calibri" pitchFamily="34" charset="0"/>
+                <a:ea typeface="Calibri" pitchFamily="34" charset="-122"/>
+                <a:cs typeface="Calibri" pitchFamily="34" charset="-120"/>
+              </a:rPr>
+              <a:t>Software Security · Week 6</a:t>
+            </a:r>
+            <a:endParaRPr lang="en-US" sz="900" dirty="0"/>
+          </a:p>
+        </p:txBody>
+      </p:sp>
+      <p:pic>
+        <p:nvPicPr>
+          <p:cNvPr id="8" name="Image 1" descr="/Users/pop7/Library/CloudStorage/OneDrive-MonsterConnectCo.,Ltd/Lecture/KOSEN69 - software-security/slides/pptx/assets/logo-small.png">    </p:cNvPr>
+          <p:cNvPicPr>
+            <a:picLocks noChangeAspect="1"/>
+          </p:cNvPicPr>
+          <p:nvPr/>
+        </p:nvPicPr>
+        <p:blipFill>
+          <a:blip r:embed="rId2"/>
+          <a:stretch>
+            <a:fillRect/>
+          </a:stretch>
+        </p:blipFill>
+        <p:spPr>
+          <a:xfrm>
+            <a:off x="7882128" y="4700016"/>
+            <a:ext cx="768096" cy="356616"/>
+          </a:xfrm>
+          <a:prstGeom prst="rect">
+            <a:avLst/>
+          </a:prstGeom>
+        </p:spPr>
+      </p:pic>
+    </p:spTree>
+  </p:cSld>
+  <p:clrMapOvr>
+    <a:masterClrMapping/>
+  </p:clrMapOvr>
+</p:sld>
+</file>
+
+<file path=ppt/slides/slide15.xml><?xml version="1.0" encoding="utf-8"?>
+<p:sld xmlns:a="http://schemas.openxmlformats.org/drawingml/2006/main" xmlns:r="http://schemas.openxmlformats.org/officeDocument/2006/relationships" xmlns:p="http://schemas.openxmlformats.org/presentationml/2006/main">
+  <p:cSld name="Slide 15">
+    <p:bg>
+      <p:bgPr>
+        <a:solidFill>
+          <a:srgbClr val="FFFFFF"/>
+        </a:solidFill>
+      </p:bgPr>
+    </p:bg>
+    <p:spTree>
+      <p:nvGrpSpPr>
+        <p:cNvPr id="1" name=""/>
+        <p:cNvGrpSpPr/>
+        <p:nvPr/>
+      </p:nvGrpSpPr>
+      <p:grpSpPr>
+        <a:xfrm>
+          <a:off x="0" y="0"/>
+          <a:ext cx="0" cy="0"/>
+          <a:chOff x="0" y="0"/>
+          <a:chExt cx="0" cy="0"/>
+        </a:xfrm>
+      </p:grpSpPr>
+      <p:sp>
+        <p:nvSpPr>
+          <p:cNvPr id="2" name="Shape 0"/>
+          <p:cNvSpPr/>
+          <p:nvPr/>
+        </p:nvSpPr>
+        <p:spPr>
+          <a:xfrm>
+            <a:off x="457200" y="384048"/>
+            <a:ext cx="530352" cy="530352"/>
+          </a:xfrm>
+          <a:prstGeom prst="ellipse">
+            <a:avLst/>
+          </a:prstGeom>
+          <a:solidFill>
+            <a:srgbClr val="E35205"/>
+          </a:solidFill>
+          <a:ln/>
+          <a:effectLst>
+            <a:outerShdw sx="100000" sy="100000" kx="0" ky="0" algn="bl" rotWithShape="0" blurRad="76200" dist="25400" dir="5400000">
+              <a:srgbClr val="000000">
+                <a:alpha val="12000"/>
+              </a:srgbClr>
+            </a:outerShdw>
+          </a:effectLst>
+        </p:spPr>
+      </p:sp>
+      <p:pic>
+        <p:nvPicPr>
+          <p:cNvPr id="3" name="Image 0" descr="preencoded.png">    </p:cNvPr>
+          <p:cNvPicPr>
+            <a:picLocks noChangeAspect="1"/>
+          </p:cNvPicPr>
+          <p:nvPr/>
+        </p:nvPicPr>
+        <p:blipFill>
+          <a:blip r:embed="rId1"/>
+          <a:stretch>
+            <a:fillRect/>
+          </a:stretch>
+        </p:blipFill>
+        <p:spPr>
+          <a:xfrm>
+            <a:off x="594360" y="521208"/>
+            <a:ext cx="256032" cy="256032"/>
+          </a:xfrm>
+          <a:prstGeom prst="rect">
+            <a:avLst/>
+          </a:prstGeom>
+        </p:spPr>
+      </p:pic>
+      <p:sp>
+        <p:nvSpPr>
+          <p:cNvPr id="4" name="Text 1"/>
+          <p:cNvSpPr/>
+          <p:nvPr/>
+        </p:nvSpPr>
+        <p:spPr>
+          <a:xfrm>
+            <a:off x="1143000" y="329184"/>
+            <a:ext cx="7498080" cy="603504"/>
+          </a:xfrm>
+          <a:prstGeom prst="rect">
+            <a:avLst/>
+          </a:prstGeom>
+          <a:noFill/>
+          <a:ln/>
+        </p:spPr>
+        <p:txBody>
+          <a:bodyPr wrap="square" lIns="0" tIns="0" rIns="0" bIns="0" rtlCol="0" anchor="ctr"/>
+          <a:lstStyle/>
+          <a:p>
+            <a:pPr indent="0" marL="0">
+              <a:buNone/>
+            </a:pPr>
+            <a:r>
+              <a:rPr lang="en-US" sz="2600" b="1" dirty="0">
+                <a:solidFill>
+                  <a:srgbClr val="1F2937"/>
+                </a:solidFill>
+                <a:latin typeface="Arial" pitchFamily="34" charset="0"/>
+                <a:ea typeface="Arial" pitchFamily="34" charset="-122"/>
+                <a:cs typeface="Arial" pitchFamily="34" charset="-120"/>
+              </a:rPr>
               <a:t>Tool — Burp Suite workflow</a:t>
             </a:r>
             <a:endParaRPr lang="en-US" sz="2600" dirty="0"/>
@@ -4833,7 +5221,7 @@
       </p:sp>
       <p:graphicFrame>
         <p:nvGraphicFramePr>
-          <p:cNvPr id="15" name="Table 0"/>
+          <p:cNvPr id="16" name="Table 0"/>
           <p:cNvGraphicFramePr>
             <a:graphicFrameLocks noGrp="1"/>
           </p:cNvGraphicFramePr>
@@ -5528,7 +5916,9 @@
           <a:ln/>
         </p:spPr>
         <p:txBody>
-          <a:bodyPr wrap="square" lIns="0" tIns="0" rIns="0" bIns="0" rtlCol="0" anchor="t"/>
+          <a:bodyPr wrap="square" lIns="0" tIns="0" rIns="0" bIns="0" rtlCol="0" anchor="t">
+            <a:normAutofit/>
+          </a:bodyPr>
           <a:lstStyle/>
           <a:p>
             <a:pPr marL="342900" indent="-342900">
@@ -5616,485 +6006,6 @@
       <p:pic>
         <p:nvPicPr>
           <p:cNvPr id="9" name="Image 1" descr="/Users/pop7/Library/CloudStorage/OneDrive-MonsterConnectCo.,Ltd/Lecture/KOSEN69 - software-security/slides/pptx/assets/logo-small.png">    </p:cNvPr>
-          <p:cNvPicPr>
-            <a:picLocks noChangeAspect="1"/>
-          </p:cNvPicPr>
-          <p:nvPr/>
-        </p:nvPicPr>
-        <p:blipFill>
-          <a:blip r:embed="rId2"/>
-          <a:stretch>
-            <a:fillRect/>
-          </a:stretch>
-        </p:blipFill>
-        <p:spPr>
-          <a:xfrm>
-            <a:off x="7882128" y="4700016"/>
-            <a:ext cx="768096" cy="356616"/>
-          </a:xfrm>
-          <a:prstGeom prst="rect">
-            <a:avLst/>
-          </a:prstGeom>
-        </p:spPr>
-      </p:pic>
-    </p:spTree>
-  </p:cSld>
-  <p:clrMapOvr>
-    <a:masterClrMapping/>
-  </p:clrMapOvr>
-</p:sld>
-</file>
-
-<file path=ppt/slides/slide15.xml><?xml version="1.0" encoding="utf-8"?>
-<p:sld xmlns:a="http://schemas.openxmlformats.org/drawingml/2006/main" xmlns:r="http://schemas.openxmlformats.org/officeDocument/2006/relationships" xmlns:p="http://schemas.openxmlformats.org/presentationml/2006/main">
-  <p:cSld name="Slide 15">
-    <p:bg>
-      <p:bgPr>
-        <a:solidFill>
-          <a:srgbClr val="FFFFFF"/>
-        </a:solidFill>
-      </p:bgPr>
-    </p:bg>
-    <p:spTree>
-      <p:nvGrpSpPr>
-        <p:cNvPr id="1" name=""/>
-        <p:cNvGrpSpPr/>
-        <p:nvPr/>
-      </p:nvGrpSpPr>
-      <p:grpSpPr>
-        <a:xfrm>
-          <a:off x="0" y="0"/>
-          <a:ext cx="0" cy="0"/>
-          <a:chOff x="0" y="0"/>
-          <a:chExt cx="0" cy="0"/>
-        </a:xfrm>
-      </p:grpSpPr>
-      <p:sp>
-        <p:nvSpPr>
-          <p:cNvPr id="2" name="Shape 0"/>
-          <p:cNvSpPr/>
-          <p:nvPr/>
-        </p:nvSpPr>
-        <p:spPr>
-          <a:xfrm>
-            <a:off x="457200" y="384048"/>
-            <a:ext cx="530352" cy="530352"/>
-          </a:xfrm>
-          <a:prstGeom prst="ellipse">
-            <a:avLst/>
-          </a:prstGeom>
-          <a:solidFill>
-            <a:srgbClr val="E35205"/>
-          </a:solidFill>
-          <a:ln/>
-          <a:effectLst>
-            <a:outerShdw sx="100000" sy="100000" kx="0" ky="0" algn="bl" rotWithShape="0" blurRad="76200" dist="25400" dir="5400000">
-              <a:srgbClr val="000000">
-                <a:alpha val="12000"/>
-              </a:srgbClr>
-            </a:outerShdw>
-          </a:effectLst>
-        </p:spPr>
-      </p:sp>
-      <p:pic>
-        <p:nvPicPr>
-          <p:cNvPr id="3" name="Image 0" descr="preencoded.png">    </p:cNvPr>
-          <p:cNvPicPr>
-            <a:picLocks noChangeAspect="1"/>
-          </p:cNvPicPr>
-          <p:nvPr/>
-        </p:nvPicPr>
-        <p:blipFill>
-          <a:blip r:embed="rId1"/>
-          <a:stretch>
-            <a:fillRect/>
-          </a:stretch>
-        </p:blipFill>
-        <p:spPr>
-          <a:xfrm>
-            <a:off x="594360" y="521208"/>
-            <a:ext cx="256032" cy="256032"/>
-          </a:xfrm>
-          <a:prstGeom prst="rect">
-            <a:avLst/>
-          </a:prstGeom>
-        </p:spPr>
-      </p:pic>
-      <p:sp>
-        <p:nvSpPr>
-          <p:cNvPr id="4" name="Text 1"/>
-          <p:cNvSpPr/>
-          <p:nvPr/>
-        </p:nvSpPr>
-        <p:spPr>
-          <a:xfrm>
-            <a:off x="1143000" y="329184"/>
-            <a:ext cx="7498080" cy="603504"/>
-          </a:xfrm>
-          <a:prstGeom prst="rect">
-            <a:avLst/>
-          </a:prstGeom>
-          <a:noFill/>
-          <a:ln/>
-        </p:spPr>
-        <p:txBody>
-          <a:bodyPr wrap="square" lIns="0" tIns="0" rIns="0" bIns="0" rtlCol="0" anchor="ctr"/>
-          <a:lstStyle/>
-          <a:p>
-            <a:pPr indent="0" marL="0">
-              <a:buNone/>
-            </a:pPr>
-            <a:r>
-              <a:rPr lang="en-US" sz="2600" b="1" dirty="0">
-                <a:solidFill>
-                  <a:srgbClr val="1F2937"/>
-                </a:solidFill>
-                <a:latin typeface="Arial" pitchFamily="34" charset="0"/>
-                <a:ea typeface="Arial" pitchFamily="34" charset="-122"/>
-                <a:cs typeface="Arial" pitchFamily="34" charset="-120"/>
-              </a:rPr>
-              <a:t>🗺️ Game — IDOR Treasure Hunt + JWT Forgery</a:t>
-            </a:r>
-            <a:endParaRPr lang="en-US" sz="2600" dirty="0"/>
-          </a:p>
-        </p:txBody>
-      </p:sp>
-      <p:sp>
-        <p:nvSpPr>
-          <p:cNvPr id="5" name="Shape 2"/>
-          <p:cNvSpPr/>
-          <p:nvPr/>
-        </p:nvSpPr>
-        <p:spPr>
-          <a:xfrm>
-            <a:off x="502920" y="1325880"/>
-            <a:ext cx="384048" cy="384048"/>
-          </a:xfrm>
-          <a:prstGeom prst="ellipse">
-            <a:avLst/>
-          </a:prstGeom>
-          <a:solidFill>
-            <a:srgbClr val="E35205"/>
-          </a:solidFill>
-          <a:ln/>
-        </p:spPr>
-      </p:sp>
-      <p:sp>
-        <p:nvSpPr>
-          <p:cNvPr id="6" name="Text 3"/>
-          <p:cNvSpPr/>
-          <p:nvPr/>
-        </p:nvSpPr>
-        <p:spPr>
-          <a:xfrm>
-            <a:off x="502920" y="1325880"/>
-            <a:ext cx="384048" cy="384048"/>
-          </a:xfrm>
-          <a:prstGeom prst="rect">
-            <a:avLst/>
-          </a:prstGeom>
-          <a:noFill/>
-          <a:ln/>
-        </p:spPr>
-        <p:txBody>
-          <a:bodyPr wrap="square" lIns="0" tIns="0" rIns="0" bIns="0" rtlCol="0" anchor="ctr"/>
-          <a:lstStyle/>
-          <a:p>
-            <a:pPr algn="ctr" indent="0" marL="0">
-              <a:buNone/>
-            </a:pPr>
-            <a:r>
-              <a:rPr lang="en-US" sz="1500" b="1" dirty="0">
-                <a:solidFill>
-                  <a:srgbClr val="0E1726"/>
-                </a:solidFill>
-                <a:latin typeface="Arial" pitchFamily="34" charset="0"/>
-                <a:ea typeface="Arial" pitchFamily="34" charset="-122"/>
-                <a:cs typeface="Arial" pitchFamily="34" charset="-120"/>
-              </a:rPr>
-              <a:t>1</a:t>
-            </a:r>
-            <a:endParaRPr lang="en-US" sz="1500" dirty="0"/>
-          </a:p>
-        </p:txBody>
-      </p:sp>
-      <p:sp>
-        <p:nvSpPr>
-          <p:cNvPr id="7" name="Text 4"/>
-          <p:cNvSpPr/>
-          <p:nvPr/>
-        </p:nvSpPr>
-        <p:spPr>
-          <a:xfrm>
-            <a:off x="1051560" y="1325880"/>
-            <a:ext cx="7589520" cy="384048"/>
-          </a:xfrm>
-          <a:prstGeom prst="rect">
-            <a:avLst/>
-          </a:prstGeom>
-          <a:noFill/>
-          <a:ln/>
-        </p:spPr>
-        <p:txBody>
-          <a:bodyPr wrap="square" lIns="0" tIns="0" rIns="0" bIns="0" rtlCol="0" anchor="ctr"/>
-          <a:lstStyle/>
-          <a:p>
-            <a:pPr indent="0" marL="0">
-              <a:buNone/>
-            </a:pPr>
-            <a:r>
-              <a:rPr lang="en-US" sz="1350" dirty="0">
-                <a:solidFill>
-                  <a:srgbClr val="1F2937"/>
-                </a:solidFill>
-                <a:latin typeface="Calibri" pitchFamily="34" charset="0"/>
-                <a:ea typeface="Calibri" pitchFamily="34" charset="-122"/>
-                <a:cs typeface="Calibri" pitchFamily="34" charset="-120"/>
-              </a:rPr>
-              <a:t>Tamper object IDs to reach other users' data → each secret = a flag</a:t>
-            </a:r>
-            <a:endParaRPr lang="en-US" sz="1350" dirty="0"/>
-          </a:p>
-        </p:txBody>
-      </p:sp>
-      <p:sp>
-        <p:nvSpPr>
-          <p:cNvPr id="8" name="Shape 5"/>
-          <p:cNvSpPr/>
-          <p:nvPr/>
-        </p:nvSpPr>
-        <p:spPr>
-          <a:xfrm>
-            <a:off x="502920" y="1783080"/>
-            <a:ext cx="384048" cy="384048"/>
-          </a:xfrm>
-          <a:prstGeom prst="ellipse">
-            <a:avLst/>
-          </a:prstGeom>
-          <a:solidFill>
-            <a:srgbClr val="E35205"/>
-          </a:solidFill>
-          <a:ln/>
-        </p:spPr>
-      </p:sp>
-      <p:sp>
-        <p:nvSpPr>
-          <p:cNvPr id="9" name="Text 6"/>
-          <p:cNvSpPr/>
-          <p:nvPr/>
-        </p:nvSpPr>
-        <p:spPr>
-          <a:xfrm>
-            <a:off x="502920" y="1783080"/>
-            <a:ext cx="384048" cy="384048"/>
-          </a:xfrm>
-          <a:prstGeom prst="rect">
-            <a:avLst/>
-          </a:prstGeom>
-          <a:noFill/>
-          <a:ln/>
-        </p:spPr>
-        <p:txBody>
-          <a:bodyPr wrap="square" lIns="0" tIns="0" rIns="0" bIns="0" rtlCol="0" anchor="ctr"/>
-          <a:lstStyle/>
-          <a:p>
-            <a:pPr algn="ctr" indent="0" marL="0">
-              <a:buNone/>
-            </a:pPr>
-            <a:r>
-              <a:rPr lang="en-US" sz="1500" b="1" dirty="0">
-                <a:solidFill>
-                  <a:srgbClr val="0E1726"/>
-                </a:solidFill>
-                <a:latin typeface="Arial" pitchFamily="34" charset="0"/>
-                <a:ea typeface="Arial" pitchFamily="34" charset="-122"/>
-                <a:cs typeface="Arial" pitchFamily="34" charset="-120"/>
-              </a:rPr>
-              <a:t>2</a:t>
-            </a:r>
-            <a:endParaRPr lang="en-US" sz="1500" dirty="0"/>
-          </a:p>
-        </p:txBody>
-      </p:sp>
-      <p:sp>
-        <p:nvSpPr>
-          <p:cNvPr id="10" name="Text 7"/>
-          <p:cNvSpPr/>
-          <p:nvPr/>
-        </p:nvSpPr>
-        <p:spPr>
-          <a:xfrm>
-            <a:off x="1051560" y="1783080"/>
-            <a:ext cx="7589520" cy="384048"/>
-          </a:xfrm>
-          <a:prstGeom prst="rect">
-            <a:avLst/>
-          </a:prstGeom>
-          <a:noFill/>
-          <a:ln/>
-        </p:spPr>
-        <p:txBody>
-          <a:bodyPr wrap="square" lIns="0" tIns="0" rIns="0" bIns="0" rtlCol="0" anchor="ctr"/>
-          <a:lstStyle/>
-          <a:p>
-            <a:pPr indent="0" marL="0">
-              <a:buNone/>
-            </a:pPr>
-            <a:r>
-              <a:rPr lang="en-US" sz="1350" dirty="0">
-                <a:solidFill>
-                  <a:srgbClr val="1F2937"/>
-                </a:solidFill>
-                <a:latin typeface="Calibri" pitchFamily="34" charset="0"/>
-                <a:ea typeface="Calibri" pitchFamily="34" charset="-122"/>
-                <a:cs typeface="Calibri" pitchFamily="34" charset="-120"/>
-              </a:rPr>
-              <a:t>Forge a weak JWT to become admin</a:t>
-            </a:r>
-            <a:endParaRPr lang="en-US" sz="1350" dirty="0"/>
-          </a:p>
-        </p:txBody>
-      </p:sp>
-      <p:sp>
-        <p:nvSpPr>
-          <p:cNvPr id="11" name="Shape 8"/>
-          <p:cNvSpPr/>
-          <p:nvPr/>
-        </p:nvSpPr>
-        <p:spPr>
-          <a:xfrm>
-            <a:off x="502920" y="2240280"/>
-            <a:ext cx="384048" cy="384048"/>
-          </a:xfrm>
-          <a:prstGeom prst="ellipse">
-            <a:avLst/>
-          </a:prstGeom>
-          <a:solidFill>
-            <a:srgbClr val="E35205"/>
-          </a:solidFill>
-          <a:ln/>
-        </p:spPr>
-      </p:sp>
-      <p:sp>
-        <p:nvSpPr>
-          <p:cNvPr id="12" name="Text 9"/>
-          <p:cNvSpPr/>
-          <p:nvPr/>
-        </p:nvSpPr>
-        <p:spPr>
-          <a:xfrm>
-            <a:off x="502920" y="2240280"/>
-            <a:ext cx="384048" cy="384048"/>
-          </a:xfrm>
-          <a:prstGeom prst="rect">
-            <a:avLst/>
-          </a:prstGeom>
-          <a:noFill/>
-          <a:ln/>
-        </p:spPr>
-        <p:txBody>
-          <a:bodyPr wrap="square" lIns="0" tIns="0" rIns="0" bIns="0" rtlCol="0" anchor="ctr"/>
-          <a:lstStyle/>
-          <a:p>
-            <a:pPr algn="ctr" indent="0" marL="0">
-              <a:buNone/>
-            </a:pPr>
-            <a:r>
-              <a:rPr lang="en-US" sz="1500" b="1" dirty="0">
-                <a:solidFill>
-                  <a:srgbClr val="0E1726"/>
-                </a:solidFill>
-                <a:latin typeface="Arial" pitchFamily="34" charset="0"/>
-                <a:ea typeface="Arial" pitchFamily="34" charset="-122"/>
-                <a:cs typeface="Arial" pitchFamily="34" charset="-120"/>
-              </a:rPr>
-              <a:t>3</a:t>
-            </a:r>
-            <a:endParaRPr lang="en-US" sz="1500" dirty="0"/>
-          </a:p>
-        </p:txBody>
-      </p:sp>
-      <p:sp>
-        <p:nvSpPr>
-          <p:cNvPr id="13" name="Text 10"/>
-          <p:cNvSpPr/>
-          <p:nvPr/>
-        </p:nvSpPr>
-        <p:spPr>
-          <a:xfrm>
-            <a:off x="1051560" y="2240280"/>
-            <a:ext cx="7589520" cy="384048"/>
-          </a:xfrm>
-          <a:prstGeom prst="rect">
-            <a:avLst/>
-          </a:prstGeom>
-          <a:noFill/>
-          <a:ln/>
-        </p:spPr>
-        <p:txBody>
-          <a:bodyPr wrap="square" lIns="0" tIns="0" rIns="0" bIns="0" rtlCol="0" anchor="ctr"/>
-          <a:lstStyle/>
-          <a:p>
-            <a:pPr indent="0" marL="0">
-              <a:buNone/>
-            </a:pPr>
-            <a:r>
-              <a:rPr lang="en-US" sz="1350" dirty="0">
-                <a:solidFill>
-                  <a:srgbClr val="1F2937"/>
-                </a:solidFill>
-                <a:latin typeface="Calibri" pitchFamily="34" charset="0"/>
-                <a:ea typeface="Calibri" pitchFamily="34" charset="-122"/>
-                <a:cs typeface="Calibri" pitchFamily="34" charset="-120"/>
-              </a:rPr>
-              <a:t>Round 2: implement RBAC checks + fix token signing/verification</a:t>
-            </a:r>
-            <a:endParaRPr lang="en-US" sz="1350" dirty="0"/>
-          </a:p>
-        </p:txBody>
-      </p:sp>
-      <p:sp>
-        <p:nvSpPr>
-          <p:cNvPr id="14" name="Text 11"/>
-          <p:cNvSpPr/>
-          <p:nvPr/>
-        </p:nvSpPr>
-        <p:spPr>
-          <a:xfrm>
-            <a:off x="457200" y="4800600"/>
-            <a:ext cx="6949440" cy="274320"/>
-          </a:xfrm>
-          <a:prstGeom prst="rect">
-            <a:avLst/>
-          </a:prstGeom>
-          <a:noFill/>
-          <a:ln/>
-        </p:spPr>
-        <p:txBody>
-          <a:bodyPr wrap="square" lIns="0" tIns="0" rIns="0" bIns="0" rtlCol="0" anchor="ctr"/>
-          <a:lstStyle/>
-          <a:p>
-            <a:pPr indent="0" marL="0">
-              <a:buNone/>
-            </a:pPr>
-            <a:r>
-              <a:rPr lang="en-US" sz="900" dirty="0">
-                <a:solidFill>
-                  <a:srgbClr val="64748B"/>
-                </a:solidFill>
-                <a:latin typeface="Calibri" pitchFamily="34" charset="0"/>
-                <a:ea typeface="Calibri" pitchFamily="34" charset="-122"/>
-                <a:cs typeface="Calibri" pitchFamily="34" charset="-120"/>
-              </a:rPr>
-              <a:t>Software Security · Week 6</a:t>
-            </a:r>
-            <a:endParaRPr lang="en-US" sz="900" dirty="0"/>
-          </a:p>
-        </p:txBody>
-      </p:sp>
-      <p:pic>
-        <p:nvPicPr>
-          <p:cNvPr id="15" name="Image 1" descr="/Users/pop7/Library/CloudStorage/OneDrive-MonsterConnectCo.,Ltd/Lecture/KOSEN69 - software-security/slides/pptx/assets/logo-small.png">    </p:cNvPr>
           <p:cNvPicPr>
             <a:picLocks noChangeAspect="1"/>
           </p:cNvPicPr>
@@ -6232,7 +6143,7 @@
                 <a:ea typeface="Arial" pitchFamily="34" charset="-122"/>
                 <a:cs typeface="Arial" pitchFamily="34" charset="-120"/>
               </a:rPr>
-              <a:t>Lab steps</a:t>
+              <a:t>🗺️ Game — IDOR Treasure Hunt + JWT Forgery</a:t>
             </a:r>
             <a:endParaRPr lang="en-US" sz="2600" dirty="0"/>
           </a:p>
@@ -6246,16 +6157,14 @@
         </p:nvSpPr>
         <p:spPr>
           <a:xfrm>
-            <a:off x="457200" y="1325880"/>
-            <a:ext cx="8229600" cy="822960"/>
-          </a:xfrm>
-          <a:prstGeom prst="roundRect">
-            <a:avLst>
-              <a:gd name="adj" fmla="val 8889"/>
-            </a:avLst>
+            <a:off x="502920" y="1325880"/>
+            <a:ext cx="384048" cy="384048"/>
+          </a:xfrm>
+          <a:prstGeom prst="ellipse">
+            <a:avLst/>
           </a:prstGeom>
           <a:solidFill>
-            <a:srgbClr val="E8EDF3"/>
+            <a:srgbClr val="E35205"/>
           </a:solidFill>
           <a:ln/>
         </p:spPr>
@@ -6268,8 +6177,8 @@
         </p:nvSpPr>
         <p:spPr>
           <a:xfrm>
-            <a:off x="731520" y="1325880"/>
-            <a:ext cx="7680960" cy="822960"/>
+            <a:off x="502920" y="1325880"/>
+            <a:ext cx="384048" cy="384048"/>
           </a:xfrm>
           <a:prstGeom prst="rect">
             <a:avLst/>
@@ -6279,35 +6188,76 @@
         </p:spPr>
         <p:txBody>
           <a:bodyPr wrap="square" lIns="0" tIns="0" rIns="0" bIns="0" rtlCol="0" anchor="ctr"/>
+          <a:lstStyle/>
+          <a:p>
+            <a:pPr algn="ctr" indent="0" marL="0">
+              <a:buNone/>
+            </a:pPr>
+            <a:r>
+              <a:rPr lang="en-US" sz="1500" b="1" dirty="0">
+                <a:solidFill>
+                  <a:srgbClr val="0E1726"/>
+                </a:solidFill>
+                <a:latin typeface="Arial" pitchFamily="34" charset="0"/>
+                <a:ea typeface="Arial" pitchFamily="34" charset="-122"/>
+                <a:cs typeface="Arial" pitchFamily="34" charset="-120"/>
+              </a:rPr>
+              <a:t>1</a:t>
+            </a:r>
+            <a:endParaRPr lang="en-US" sz="1500" dirty="0"/>
+          </a:p>
+        </p:txBody>
+      </p:sp>
+      <p:sp>
+        <p:nvSpPr>
+          <p:cNvPr id="7" name="Text 4"/>
+          <p:cNvSpPr/>
+          <p:nvPr/>
+        </p:nvSpPr>
+        <p:spPr>
+          <a:xfrm>
+            <a:off x="1051560" y="1325880"/>
+            <a:ext cx="7589520" cy="658368"/>
+          </a:xfrm>
+          <a:prstGeom prst="rect">
+            <a:avLst/>
+          </a:prstGeom>
+          <a:noFill/>
+          <a:ln/>
+        </p:spPr>
+        <p:txBody>
+          <a:bodyPr wrap="square" lIns="0" tIns="0" rIns="0" bIns="0" rtlCol="0" anchor="ctr">
+            <a:normAutofit/>
+          </a:bodyPr>
           <a:lstStyle/>
           <a:p>
             <a:pPr indent="0" marL="0">
               <a:buNone/>
             </a:pPr>
             <a:r>
-              <a:rPr lang="en-US" sz="1400" i="1" dirty="0">
-                <a:solidFill>
-                  <a:srgbClr val="E35205"/>
+              <a:rPr lang="en-US" sz="1350" dirty="0">
+                <a:solidFill>
+                  <a:srgbClr val="1F2937"/>
                 </a:solidFill>
                 <a:latin typeface="Calibri" pitchFamily="34" charset="0"/>
                 <a:ea typeface="Calibri" pitchFamily="34" charset="-122"/>
                 <a:cs typeface="Calibri" pitchFamily="34" charset="-120"/>
               </a:rPr>
-              <a:t>📋 Worksheet 6 — labs/week06-authn-authz/worksheet.md (Part 3) · kickoff: docker compose up → http://localhost:8080</a:t>
-            </a:r>
-            <a:endParaRPr lang="en-US" sz="1400" dirty="0"/>
-          </a:p>
-        </p:txBody>
-      </p:sp>
-      <p:sp>
-        <p:nvSpPr>
-          <p:cNvPr id="7" name="Shape 4"/>
-          <p:cNvSpPr/>
-          <p:nvPr/>
-        </p:nvSpPr>
-        <p:spPr>
-          <a:xfrm>
-            <a:off x="502920" y="2313432"/>
+              <a:t>Tamper object IDs to reach another user's data (horizontal — become "bob," not admin) → each secret = a flag</a:t>
+            </a:r>
+            <a:endParaRPr lang="en-US" sz="1350" dirty="0"/>
+          </a:p>
+        </p:txBody>
+      </p:sp>
+      <p:sp>
+        <p:nvSpPr>
+          <p:cNvPr id="8" name="Shape 5"/>
+          <p:cNvSpPr/>
+          <p:nvPr/>
+        </p:nvSpPr>
+        <p:spPr>
+          <a:xfrm>
+            <a:off x="502920" y="2057400"/>
             <a:ext cx="384048" cy="384048"/>
           </a:xfrm>
           <a:prstGeom prst="ellipse">
@@ -6321,13 +6271,13 @@
       </p:sp>
       <p:sp>
         <p:nvSpPr>
-          <p:cNvPr id="8" name="Text 5"/>
-          <p:cNvSpPr/>
-          <p:nvPr/>
-        </p:nvSpPr>
-        <p:spPr>
-          <a:xfrm>
-            <a:off x="502920" y="2313432"/>
+          <p:cNvPr id="9" name="Text 6"/>
+          <p:cNvSpPr/>
+          <p:nvPr/>
+        </p:nvSpPr>
+        <p:spPr>
+          <a:xfrm>
+            <a:off x="502920" y="2057400"/>
             <a:ext cx="384048" cy="384048"/>
           </a:xfrm>
           <a:prstGeom prst="rect">
@@ -6352,7 +6302,7 @@
                 <a:ea typeface="Arial" pitchFamily="34" charset="-122"/>
                 <a:cs typeface="Arial" pitchFamily="34" charset="-120"/>
               </a:rPr>
-              <a:t>1</a:t>
+              <a:t>2</a:t>
             </a:r>
             <a:endParaRPr lang="en-US" sz="1500" dirty="0"/>
           </a:p>
@@ -6360,14 +6310,14 @@
       </p:sp>
       <p:sp>
         <p:nvSpPr>
-          <p:cNvPr id="9" name="Text 6"/>
-          <p:cNvSpPr/>
-          <p:nvPr/>
-        </p:nvSpPr>
-        <p:spPr>
-          <a:xfrm>
-            <a:off x="1051560" y="2313432"/>
-            <a:ext cx="7589520" cy="384048"/>
+          <p:cNvPr id="10" name="Text 7"/>
+          <p:cNvSpPr/>
+          <p:nvPr/>
+        </p:nvSpPr>
+        <p:spPr>
+          <a:xfrm>
+            <a:off x="1051560" y="2057400"/>
+            <a:ext cx="7589520" cy="402336"/>
           </a:xfrm>
           <a:prstGeom prst="rect">
             <a:avLst/>
@@ -6376,7 +6326,9 @@
           <a:ln/>
         </p:spPr>
         <p:txBody>
-          <a:bodyPr wrap="square" lIns="0" tIns="0" rIns="0" bIns="0" rtlCol="0" anchor="ctr"/>
+          <a:bodyPr wrap="square" lIns="0" tIns="0" rIns="0" bIns="0" rtlCol="0" anchor="ctr">
+            <a:normAutofit/>
+          </a:bodyPr>
           <a:lstStyle/>
           <a:p>
             <a:pPr indent="0" marL="0">
@@ -6391,7 +6343,7 @@
                 <a:ea typeface="Calibri" pitchFamily="34" charset="-122"/>
                 <a:cs typeface="Calibri" pitchFamily="34" charset="-120"/>
               </a:rPr>
-              <a:t>Find IDOR endpoints; enumerate other users' objects</a:t>
+              <a:t>Forge a weak JWT two ways: alg:none, then crack the hardcoded HMAC secret</a:t>
             </a:r>
             <a:endParaRPr lang="en-US" sz="1350" dirty="0"/>
           </a:p>
@@ -6399,13 +6351,13 @@
       </p:sp>
       <p:sp>
         <p:nvSpPr>
-          <p:cNvPr id="10" name="Shape 7"/>
-          <p:cNvSpPr/>
-          <p:nvPr/>
-        </p:nvSpPr>
-        <p:spPr>
-          <a:xfrm>
-            <a:off x="502920" y="2770632"/>
+          <p:cNvPr id="11" name="Shape 8"/>
+          <p:cNvSpPr/>
+          <p:nvPr/>
+        </p:nvSpPr>
+        <p:spPr>
+          <a:xfrm>
+            <a:off x="502920" y="2532888"/>
             <a:ext cx="384048" cy="384048"/>
           </a:xfrm>
           <a:prstGeom prst="ellipse">
@@ -6419,13 +6371,13 @@
       </p:sp>
       <p:sp>
         <p:nvSpPr>
-          <p:cNvPr id="11" name="Text 8"/>
-          <p:cNvSpPr/>
-          <p:nvPr/>
-        </p:nvSpPr>
-        <p:spPr>
-          <a:xfrm>
-            <a:off x="502920" y="2770632"/>
+          <p:cNvPr id="12" name="Text 9"/>
+          <p:cNvSpPr/>
+          <p:nvPr/>
+        </p:nvSpPr>
+        <p:spPr>
+          <a:xfrm>
+            <a:off x="502920" y="2532888"/>
             <a:ext cx="384048" cy="384048"/>
           </a:xfrm>
           <a:prstGeom prst="rect">
@@ -6450,7 +6402,7 @@
                 <a:ea typeface="Arial" pitchFamily="34" charset="-122"/>
                 <a:cs typeface="Arial" pitchFamily="34" charset="-120"/>
               </a:rPr>
-              <a:t>2</a:t>
+              <a:t>3</a:t>
             </a:r>
             <a:endParaRPr lang="en-US" sz="1500" dirty="0"/>
           </a:p>
@@ -6458,14 +6410,14 @@
       </p:sp>
       <p:sp>
         <p:nvSpPr>
-          <p:cNvPr id="12" name="Text 9"/>
-          <p:cNvSpPr/>
-          <p:nvPr/>
-        </p:nvSpPr>
-        <p:spPr>
-          <a:xfrm>
-            <a:off x="1051560" y="2770632"/>
-            <a:ext cx="7589520" cy="384048"/>
+          <p:cNvPr id="13" name="Text 10"/>
+          <p:cNvSpPr/>
+          <p:nvPr/>
+        </p:nvSpPr>
+        <p:spPr>
+          <a:xfrm>
+            <a:off x="1051560" y="2532888"/>
+            <a:ext cx="7589520" cy="658368"/>
           </a:xfrm>
           <a:prstGeom prst="rect">
             <a:avLst/>
@@ -6474,7 +6426,9 @@
           <a:ln/>
         </p:spPr>
         <p:txBody>
-          <a:bodyPr wrap="square" lIns="0" tIns="0" rIns="0" bIns="0" rtlCol="0" anchor="ctr"/>
+          <a:bodyPr wrap="square" lIns="0" tIns="0" rIns="0" bIns="0" rtlCol="0" anchor="ctr">
+            <a:normAutofit/>
+          </a:bodyPr>
           <a:lstStyle/>
           <a:p>
             <a:pPr indent="0" marL="0">
@@ -6489,7 +6443,7 @@
                 <a:ea typeface="Calibri" pitchFamily="34" charset="-122"/>
                 <a:cs typeface="Calibri" pitchFamily="34" charset="-120"/>
               </a:rPr>
-              <a:t>Crack/forge a weak JWT (e.g. alg:none or weak secret)</a:t>
+              <a:t>Defend: switch to solution_app.py (already fixed), prove it blocks all three attacks (403 + two 401s), cite the exact fix line for each</a:t>
             </a:r>
             <a:endParaRPr lang="en-US" sz="1350" dirty="0"/>
           </a:p>
@@ -6497,73 +6451,14 @@
       </p:sp>
       <p:sp>
         <p:nvSpPr>
-          <p:cNvPr id="13" name="Shape 10"/>
-          <p:cNvSpPr/>
-          <p:nvPr/>
-        </p:nvSpPr>
-        <p:spPr>
-          <a:xfrm>
-            <a:off x="502920" y="3227832"/>
-            <a:ext cx="384048" cy="384048"/>
-          </a:xfrm>
-          <a:prstGeom prst="ellipse">
-            <a:avLst/>
-          </a:prstGeom>
-          <a:solidFill>
-            <a:srgbClr val="E35205"/>
-          </a:solidFill>
-          <a:ln/>
-        </p:spPr>
-      </p:sp>
-      <p:sp>
-        <p:nvSpPr>
           <p:cNvPr id="14" name="Text 11"/>
           <p:cNvSpPr/>
           <p:nvPr/>
         </p:nvSpPr>
         <p:spPr>
           <a:xfrm>
-            <a:off x="502920" y="3227832"/>
-            <a:ext cx="384048" cy="384048"/>
-          </a:xfrm>
-          <a:prstGeom prst="rect">
-            <a:avLst/>
-          </a:prstGeom>
-          <a:noFill/>
-          <a:ln/>
-        </p:spPr>
-        <p:txBody>
-          <a:bodyPr wrap="square" lIns="0" tIns="0" rIns="0" bIns="0" rtlCol="0" anchor="ctr"/>
-          <a:lstStyle/>
-          <a:p>
-            <a:pPr algn="ctr" indent="0" marL="0">
-              <a:buNone/>
-            </a:pPr>
-            <a:r>
-              <a:rPr lang="en-US" sz="1500" b="1" dirty="0">
-                <a:solidFill>
-                  <a:srgbClr val="0E1726"/>
-                </a:solidFill>
-                <a:latin typeface="Arial" pitchFamily="34" charset="0"/>
-                <a:ea typeface="Arial" pitchFamily="34" charset="-122"/>
-                <a:cs typeface="Arial" pitchFamily="34" charset="-120"/>
-              </a:rPr>
-              <a:t>3</a:t>
-            </a:r>
-            <a:endParaRPr lang="en-US" sz="1500" dirty="0"/>
-          </a:p>
-        </p:txBody>
-      </p:sp>
-      <p:sp>
-        <p:nvSpPr>
-          <p:cNvPr id="15" name="Text 12"/>
-          <p:cNvSpPr/>
-          <p:nvPr/>
-        </p:nvSpPr>
-        <p:spPr>
-          <a:xfrm>
-            <a:off x="1051560" y="3227832"/>
-            <a:ext cx="7589520" cy="384048"/>
+            <a:off x="457200" y="4800600"/>
+            <a:ext cx="6949440" cy="274320"/>
           </a:xfrm>
           <a:prstGeom prst="rect">
             <a:avLst/>
@@ -6579,151 +6474,14 @@
               <a:buNone/>
             </a:pPr>
             <a:r>
-              <a:rPr lang="en-US" sz="1350" dirty="0">
-                <a:solidFill>
-                  <a:srgbClr val="1F2937"/>
+              <a:rPr lang="en-US" sz="900" dirty="0">
+                <a:solidFill>
+                  <a:srgbClr val="64748B"/>
                 </a:solidFill>
                 <a:latin typeface="Calibri" pitchFamily="34" charset="0"/>
                 <a:ea typeface="Calibri" pitchFamily="34" charset="-122"/>
                 <a:cs typeface="Calibri" pitchFamily="34" charset="-120"/>
               </a:rPr>
-              <a:t>Add ownership checks + proper JWT verification</a:t>
-            </a:r>
-            <a:endParaRPr lang="en-US" sz="1350" dirty="0"/>
-          </a:p>
-        </p:txBody>
-      </p:sp>
-      <p:sp>
-        <p:nvSpPr>
-          <p:cNvPr id="16" name="Shape 13"/>
-          <p:cNvSpPr/>
-          <p:nvPr/>
-        </p:nvSpPr>
-        <p:spPr>
-          <a:xfrm>
-            <a:off x="502920" y="3685032"/>
-            <a:ext cx="384048" cy="384048"/>
-          </a:xfrm>
-          <a:prstGeom prst="ellipse">
-            <a:avLst/>
-          </a:prstGeom>
-          <a:solidFill>
-            <a:srgbClr val="E35205"/>
-          </a:solidFill>
-          <a:ln/>
-        </p:spPr>
-      </p:sp>
-      <p:sp>
-        <p:nvSpPr>
-          <p:cNvPr id="17" name="Text 14"/>
-          <p:cNvSpPr/>
-          <p:nvPr/>
-        </p:nvSpPr>
-        <p:spPr>
-          <a:xfrm>
-            <a:off x="502920" y="3685032"/>
-            <a:ext cx="384048" cy="384048"/>
-          </a:xfrm>
-          <a:prstGeom prst="rect">
-            <a:avLst/>
-          </a:prstGeom>
-          <a:noFill/>
-          <a:ln/>
-        </p:spPr>
-        <p:txBody>
-          <a:bodyPr wrap="square" lIns="0" tIns="0" rIns="0" bIns="0" rtlCol="0" anchor="ctr"/>
-          <a:lstStyle/>
-          <a:p>
-            <a:pPr algn="ctr" indent="0" marL="0">
-              <a:buNone/>
-            </a:pPr>
-            <a:r>
-              <a:rPr lang="en-US" sz="1500" b="1" dirty="0">
-                <a:solidFill>
-                  <a:srgbClr val="0E1726"/>
-                </a:solidFill>
-                <a:latin typeface="Arial" pitchFamily="34" charset="0"/>
-                <a:ea typeface="Arial" pitchFamily="34" charset="-122"/>
-                <a:cs typeface="Arial" pitchFamily="34" charset="-120"/>
-              </a:rPr>
-              <a:t>4</a:t>
-            </a:r>
-            <a:endParaRPr lang="en-US" sz="1500" dirty="0"/>
-          </a:p>
-        </p:txBody>
-      </p:sp>
-      <p:sp>
-        <p:nvSpPr>
-          <p:cNvPr id="18" name="Text 15"/>
-          <p:cNvSpPr/>
-          <p:nvPr/>
-        </p:nvSpPr>
-        <p:spPr>
-          <a:xfrm>
-            <a:off x="1051560" y="3685032"/>
-            <a:ext cx="7589520" cy="384048"/>
-          </a:xfrm>
-          <a:prstGeom prst="rect">
-            <a:avLst/>
-          </a:prstGeom>
-          <a:noFill/>
-          <a:ln/>
-        </p:spPr>
-        <p:txBody>
-          <a:bodyPr wrap="square" lIns="0" tIns="0" rIns="0" bIns="0" rtlCol="0" anchor="ctr"/>
-          <a:lstStyle/>
-          <a:p>
-            <a:pPr indent="0" marL="0">
-              <a:buNone/>
-            </a:pPr>
-            <a:r>
-              <a:rPr lang="en-US" sz="1350" dirty="0">
-                <a:solidFill>
-                  <a:srgbClr val="1F2937"/>
-                </a:solidFill>
-                <a:latin typeface="Calibri" pitchFamily="34" charset="0"/>
-                <a:ea typeface="Calibri" pitchFamily="34" charset="-122"/>
-                <a:cs typeface="Calibri" pitchFamily="34" charset="-120"/>
-              </a:rPr>
-              <a:t>Re-test: access denied</a:t>
-            </a:r>
-            <a:endParaRPr lang="en-US" sz="1350" dirty="0"/>
-          </a:p>
-        </p:txBody>
-      </p:sp>
-      <p:sp>
-        <p:nvSpPr>
-          <p:cNvPr id="19" name="Text 16"/>
-          <p:cNvSpPr/>
-          <p:nvPr/>
-        </p:nvSpPr>
-        <p:spPr>
-          <a:xfrm>
-            <a:off x="457200" y="4800600"/>
-            <a:ext cx="6949440" cy="274320"/>
-          </a:xfrm>
-          <a:prstGeom prst="rect">
-            <a:avLst/>
-          </a:prstGeom>
-          <a:noFill/>
-          <a:ln/>
-        </p:spPr>
-        <p:txBody>
-          <a:bodyPr wrap="square" lIns="0" tIns="0" rIns="0" bIns="0" rtlCol="0" anchor="ctr"/>
-          <a:lstStyle/>
-          <a:p>
-            <a:pPr indent="0" marL="0">
-              <a:buNone/>
-            </a:pPr>
-            <a:r>
-              <a:rPr lang="en-US" sz="900" dirty="0">
-                <a:solidFill>
-                  <a:srgbClr val="64748B"/>
-                </a:solidFill>
-                <a:latin typeface="Calibri" pitchFamily="34" charset="0"/>
-                <a:ea typeface="Calibri" pitchFamily="34" charset="-122"/>
-                <a:cs typeface="Calibri" pitchFamily="34" charset="-120"/>
-              </a:rPr>
               <a:t>Software Security · Week 6</a:t>
             </a:r>
             <a:endParaRPr lang="en-US" sz="900" dirty="0"/>
@@ -6732,7 +6490,7 @@
       </p:sp>
       <p:pic>
         <p:nvPicPr>
-          <p:cNvPr id="20" name="Image 1" descr="/Users/pop7/Library/CloudStorage/OneDrive-MonsterConnectCo.,Ltd/Lecture/KOSEN69 - software-security/slides/pptx/assets/logo-small.png">    </p:cNvPr>
+          <p:cNvPr id="15" name="Image 1" descr="/Users/pop7/Library/CloudStorage/OneDrive-MonsterConnectCo.,Ltd/Lecture/KOSEN69 - software-security/slides/pptx/assets/logo-small.png">    </p:cNvPr>
           <p:cNvPicPr>
             <a:picLocks noChangeAspect="1"/>
           </p:cNvPicPr>
@@ -6870,7 +6628,7 @@
                 <a:ea typeface="Arial" pitchFamily="34" charset="-122"/>
                 <a:cs typeface="Arial" pitchFamily="34" charset="-120"/>
               </a:rPr>
-              <a:t>Deliverable</a:t>
+              <a:t>Lab steps</a:t>
             </a:r>
             <a:endParaRPr lang="en-US" sz="2600" dirty="0"/>
           </a:p>
@@ -6885,24 +6643,17 @@
         <p:spPr>
           <a:xfrm>
             <a:off x="457200" y="1325880"/>
-            <a:ext cx="8229600" cy="1517904"/>
+            <a:ext cx="8229600" cy="822960"/>
           </a:xfrm>
           <a:prstGeom prst="roundRect">
             <a:avLst>
-              <a:gd name="adj" fmla="val 4819"/>
+              <a:gd name="adj" fmla="val 8889"/>
             </a:avLst>
           </a:prstGeom>
           <a:solidFill>
-            <a:srgbClr val="F1F5F9"/>
+            <a:srgbClr val="E8EDF3"/>
           </a:solidFill>
           <a:ln/>
-          <a:effectLst>
-            <a:outerShdw sx="100000" sy="100000" kx="0" ky="0" algn="bl" rotWithShape="0" blurRad="76200" dist="25400" dir="5400000">
-              <a:srgbClr val="000000">
-                <a:alpha val="12000"/>
-              </a:srgbClr>
-            </a:outerShdw>
-          </a:effectLst>
         </p:spPr>
       </p:sp>
       <p:sp>
@@ -6913,8 +6664,8 @@
         </p:nvSpPr>
         <p:spPr>
           <a:xfrm>
-            <a:off x="731520" y="1435608"/>
-            <a:ext cx="7680960" cy="1298448"/>
+            <a:off x="731520" y="1325880"/>
+            <a:ext cx="7680960" cy="822960"/>
           </a:xfrm>
           <a:prstGeom prst="rect">
             <a:avLst/>
@@ -6923,39 +6674,116 @@
           <a:ln/>
         </p:spPr>
         <p:txBody>
-          <a:bodyPr wrap="square" lIns="0" tIns="0" rIns="0" bIns="0" rtlCol="0" anchor="t"/>
-          <a:lstStyle/>
-          <a:p>
-            <a:pPr marL="342900" indent="-342900">
-              <a:spcAft>
-                <a:spcPts val="600"/>
-              </a:spcAft>
-              <a:buSzPct val="100000"/>
-              <a:buChar char="•"/>
-            </a:pPr>
-            <a:r>
-              <a:rPr lang="en-US" sz="1400" dirty="0">
-                <a:solidFill>
-                  <a:srgbClr val="1F2937"/>
+          <a:bodyPr wrap="square" lIns="0" tIns="0" rIns="0" bIns="0" rtlCol="0" anchor="ctr">
+            <a:normAutofit/>
+          </a:bodyPr>
+          <a:lstStyle/>
+          <a:p>
+            <a:pPr indent="0" marL="0">
+              <a:buNone/>
+            </a:pPr>
+            <a:r>
+              <a:rPr lang="en-US" sz="1400" i="1" dirty="0">
+                <a:solidFill>
+                  <a:srgbClr val="E35205"/>
                 </a:solidFill>
                 <a:latin typeface="Calibri" pitchFamily="34" charset="0"/>
                 <a:ea typeface="Calibri" pitchFamily="34" charset="-122"/>
                 <a:cs typeface="Calibri" pitchFamily="34" charset="-120"/>
               </a:rPr>
-              <a:t>IDOR + JWT findings with impact</a:t>
+              <a:t>📋 Worksheet 6 — labs/week06-authn-authz/worksheet.md (Part 3) · kickoff: docker compose up → http://localhost:8080</a:t>
             </a:r>
             <a:endParaRPr lang="en-US" sz="1400" dirty="0"/>
           </a:p>
-          <a:p>
-            <a:pPr marL="342900" indent="-342900">
-              <a:spcAft>
-                <a:spcPts val="600"/>
-              </a:spcAft>
-              <a:buSzPct val="100000"/>
-              <a:buChar char="•"/>
-            </a:pPr>
-            <a:r>
-              <a:rPr lang="en-US" sz="1400" dirty="0">
+        </p:txBody>
+      </p:sp>
+      <p:sp>
+        <p:nvSpPr>
+          <p:cNvPr id="7" name="Shape 4"/>
+          <p:cNvSpPr/>
+          <p:nvPr/>
+        </p:nvSpPr>
+        <p:spPr>
+          <a:xfrm>
+            <a:off x="502920" y="2313432"/>
+            <a:ext cx="384048" cy="384048"/>
+          </a:xfrm>
+          <a:prstGeom prst="ellipse">
+            <a:avLst/>
+          </a:prstGeom>
+          <a:solidFill>
+            <a:srgbClr val="E35205"/>
+          </a:solidFill>
+          <a:ln/>
+        </p:spPr>
+      </p:sp>
+      <p:sp>
+        <p:nvSpPr>
+          <p:cNvPr id="8" name="Text 5"/>
+          <p:cNvSpPr/>
+          <p:nvPr/>
+        </p:nvSpPr>
+        <p:spPr>
+          <a:xfrm>
+            <a:off x="502920" y="2313432"/>
+            <a:ext cx="384048" cy="384048"/>
+          </a:xfrm>
+          <a:prstGeom prst="rect">
+            <a:avLst/>
+          </a:prstGeom>
+          <a:noFill/>
+          <a:ln/>
+        </p:spPr>
+        <p:txBody>
+          <a:bodyPr wrap="square" lIns="0" tIns="0" rIns="0" bIns="0" rtlCol="0" anchor="ctr"/>
+          <a:lstStyle/>
+          <a:p>
+            <a:pPr algn="ctr" indent="0" marL="0">
+              <a:buNone/>
+            </a:pPr>
+            <a:r>
+              <a:rPr lang="en-US" sz="1500" b="1" dirty="0">
+                <a:solidFill>
+                  <a:srgbClr val="0E1726"/>
+                </a:solidFill>
+                <a:latin typeface="Arial" pitchFamily="34" charset="0"/>
+                <a:ea typeface="Arial" pitchFamily="34" charset="-122"/>
+                <a:cs typeface="Arial" pitchFamily="34" charset="-120"/>
+              </a:rPr>
+              <a:t>1</a:t>
+            </a:r>
+            <a:endParaRPr lang="en-US" sz="1500" dirty="0"/>
+          </a:p>
+        </p:txBody>
+      </p:sp>
+      <p:sp>
+        <p:nvSpPr>
+          <p:cNvPr id="9" name="Text 6"/>
+          <p:cNvSpPr/>
+          <p:nvPr/>
+        </p:nvSpPr>
+        <p:spPr>
+          <a:xfrm>
+            <a:off x="1051560" y="2313432"/>
+            <a:ext cx="7589520" cy="402336"/>
+          </a:xfrm>
+          <a:prstGeom prst="rect">
+            <a:avLst/>
+          </a:prstGeom>
+          <a:noFill/>
+          <a:ln/>
+        </p:spPr>
+        <p:txBody>
+          <a:bodyPr wrap="square" lIns="0" tIns="0" rIns="0" bIns="0" rtlCol="0" anchor="ctr">
+            <a:normAutofit/>
+          </a:bodyPr>
+          <a:lstStyle/>
+          <a:p>
+            <a:pPr indent="0" marL="0">
+              <a:buNone/>
+            </a:pPr>
+            <a:r>
+              <a:rPr lang="en-US" sz="1350" dirty="0">
                 <a:solidFill>
                   <a:srgbClr val="1F2937"/>
                 </a:solidFill>
@@ -6963,20 +6791,99 @@
                 <a:ea typeface="Calibri" pitchFamily="34" charset="-122"/>
                 <a:cs typeface="Calibri" pitchFamily="34" charset="-120"/>
               </a:rPr>
-              <a:t>Fixed authorization + token handling</a:t>
-            </a:r>
-            <a:endParaRPr lang="en-US" sz="1400" dirty="0"/>
-          </a:p>
-          <a:p>
-            <a:pPr marL="342900" indent="-342900">
-              <a:spcAft>
-                <a:spcPts val="600"/>
-              </a:spcAft>
-              <a:buSzPct val="100000"/>
-              <a:buChar char="•"/>
-            </a:pPr>
-            <a:r>
-              <a:rPr lang="en-US" sz="1400" dirty="0">
+              <a:t>Find IDOR endpoints; enumerate other users' objects</a:t>
+            </a:r>
+            <a:endParaRPr lang="en-US" sz="1350" dirty="0"/>
+          </a:p>
+        </p:txBody>
+      </p:sp>
+      <p:sp>
+        <p:nvSpPr>
+          <p:cNvPr id="10" name="Shape 7"/>
+          <p:cNvSpPr/>
+          <p:nvPr/>
+        </p:nvSpPr>
+        <p:spPr>
+          <a:xfrm>
+            <a:off x="502920" y="2788920"/>
+            <a:ext cx="384048" cy="384048"/>
+          </a:xfrm>
+          <a:prstGeom prst="ellipse">
+            <a:avLst/>
+          </a:prstGeom>
+          <a:solidFill>
+            <a:srgbClr val="E35205"/>
+          </a:solidFill>
+          <a:ln/>
+        </p:spPr>
+      </p:sp>
+      <p:sp>
+        <p:nvSpPr>
+          <p:cNvPr id="11" name="Text 8"/>
+          <p:cNvSpPr/>
+          <p:nvPr/>
+        </p:nvSpPr>
+        <p:spPr>
+          <a:xfrm>
+            <a:off x="502920" y="2788920"/>
+            <a:ext cx="384048" cy="384048"/>
+          </a:xfrm>
+          <a:prstGeom prst="rect">
+            <a:avLst/>
+          </a:prstGeom>
+          <a:noFill/>
+          <a:ln/>
+        </p:spPr>
+        <p:txBody>
+          <a:bodyPr wrap="square" lIns="0" tIns="0" rIns="0" bIns="0" rtlCol="0" anchor="ctr"/>
+          <a:lstStyle/>
+          <a:p>
+            <a:pPr algn="ctr" indent="0" marL="0">
+              <a:buNone/>
+            </a:pPr>
+            <a:r>
+              <a:rPr lang="en-US" sz="1500" b="1" dirty="0">
+                <a:solidFill>
+                  <a:srgbClr val="0E1726"/>
+                </a:solidFill>
+                <a:latin typeface="Arial" pitchFamily="34" charset="0"/>
+                <a:ea typeface="Arial" pitchFamily="34" charset="-122"/>
+                <a:cs typeface="Arial" pitchFamily="34" charset="-120"/>
+              </a:rPr>
+              <a:t>2</a:t>
+            </a:r>
+            <a:endParaRPr lang="en-US" sz="1500" dirty="0"/>
+          </a:p>
+        </p:txBody>
+      </p:sp>
+      <p:sp>
+        <p:nvSpPr>
+          <p:cNvPr id="12" name="Text 9"/>
+          <p:cNvSpPr/>
+          <p:nvPr/>
+        </p:nvSpPr>
+        <p:spPr>
+          <a:xfrm>
+            <a:off x="1051560" y="2788920"/>
+            <a:ext cx="7589520" cy="658368"/>
+          </a:xfrm>
+          <a:prstGeom prst="rect">
+            <a:avLst/>
+          </a:prstGeom>
+          <a:noFill/>
+          <a:ln/>
+        </p:spPr>
+        <p:txBody>
+          <a:bodyPr wrap="square" lIns="0" tIns="0" rIns="0" bIns="0" rtlCol="0" anchor="ctr">
+            <a:normAutofit/>
+          </a:bodyPr>
+          <a:lstStyle/>
+          <a:p>
+            <a:pPr indent="0" marL="0">
+              <a:buNone/>
+            </a:pPr>
+            <a:r>
+              <a:rPr lang="en-US" sz="1350" dirty="0">
                 <a:solidFill>
                   <a:srgbClr val="1F2937"/>
                 </a:solidFill>
@@ -6984,20 +6891,99 @@
                 <a:ea typeface="Calibri" pitchFamily="34" charset="-122"/>
                 <a:cs typeface="Calibri" pitchFamily="34" charset="-120"/>
               </a:rPr>
-              <a:t>Proof the forged token / cross-user access now fails</a:t>
-            </a:r>
-            <a:endParaRPr lang="en-US" sz="1400" dirty="0"/>
-          </a:p>
-          <a:p>
-            <a:pPr marL="342900" indent="-342900">
-              <a:spcAft>
-                <a:spcPts val="600"/>
-              </a:spcAft>
-              <a:buSzPct val="100000"/>
-              <a:buChar char="•"/>
-            </a:pPr>
-            <a:r>
-              <a:rPr lang="en-US" sz="1400" dirty="0">
+              <a:t>Crack/forge a weak JWT (alg:none AND the weak HMAC secret — two separate graded attacks)</a:t>
+            </a:r>
+            <a:endParaRPr lang="en-US" sz="1350" dirty="0"/>
+          </a:p>
+        </p:txBody>
+      </p:sp>
+      <p:sp>
+        <p:nvSpPr>
+          <p:cNvPr id="13" name="Shape 10"/>
+          <p:cNvSpPr/>
+          <p:nvPr/>
+        </p:nvSpPr>
+        <p:spPr>
+          <a:xfrm>
+            <a:off x="502920" y="3520440"/>
+            <a:ext cx="384048" cy="384048"/>
+          </a:xfrm>
+          <a:prstGeom prst="ellipse">
+            <a:avLst/>
+          </a:prstGeom>
+          <a:solidFill>
+            <a:srgbClr val="E35205"/>
+          </a:solidFill>
+          <a:ln/>
+        </p:spPr>
+      </p:sp>
+      <p:sp>
+        <p:nvSpPr>
+          <p:cNvPr id="14" name="Text 11"/>
+          <p:cNvSpPr/>
+          <p:nvPr/>
+        </p:nvSpPr>
+        <p:spPr>
+          <a:xfrm>
+            <a:off x="502920" y="3520440"/>
+            <a:ext cx="384048" cy="384048"/>
+          </a:xfrm>
+          <a:prstGeom prst="rect">
+            <a:avLst/>
+          </a:prstGeom>
+          <a:noFill/>
+          <a:ln/>
+        </p:spPr>
+        <p:txBody>
+          <a:bodyPr wrap="square" lIns="0" tIns="0" rIns="0" bIns="0" rtlCol="0" anchor="ctr"/>
+          <a:lstStyle/>
+          <a:p>
+            <a:pPr algn="ctr" indent="0" marL="0">
+              <a:buNone/>
+            </a:pPr>
+            <a:r>
+              <a:rPr lang="en-US" sz="1500" b="1" dirty="0">
+                <a:solidFill>
+                  <a:srgbClr val="0E1726"/>
+                </a:solidFill>
+                <a:latin typeface="Arial" pitchFamily="34" charset="0"/>
+                <a:ea typeface="Arial" pitchFamily="34" charset="-122"/>
+                <a:cs typeface="Arial" pitchFamily="34" charset="-120"/>
+              </a:rPr>
+              <a:t>3</a:t>
+            </a:r>
+            <a:endParaRPr lang="en-US" sz="1500" dirty="0"/>
+          </a:p>
+        </p:txBody>
+      </p:sp>
+      <p:sp>
+        <p:nvSpPr>
+          <p:cNvPr id="15" name="Text 12"/>
+          <p:cNvSpPr/>
+          <p:nvPr/>
+        </p:nvSpPr>
+        <p:spPr>
+          <a:xfrm>
+            <a:off x="1051560" y="3520440"/>
+            <a:ext cx="7589520" cy="402336"/>
+          </a:xfrm>
+          <a:prstGeom prst="rect">
+            <a:avLst/>
+          </a:prstGeom>
+          <a:noFill/>
+          <a:ln/>
+        </p:spPr>
+        <p:txBody>
+          <a:bodyPr wrap="square" lIns="0" tIns="0" rIns="0" bIns="0" rtlCol="0" anchor="ctr">
+            <a:normAutofit/>
+          </a:bodyPr>
+          <a:lstStyle/>
+          <a:p>
+            <a:pPr indent="0" marL="0">
+              <a:buNone/>
+            </a:pPr>
+            <a:r>
+              <a:rPr lang="en-US" sz="1350" dirty="0">
                 <a:solidFill>
                   <a:srgbClr val="1F2937"/>
                 </a:solidFill>
@@ -7005,22 +6991,42 @@
                 <a:ea typeface="Calibri" pitchFamily="34" charset="-122"/>
                 <a:cs typeface="Calibri" pitchFamily="34" charset="-120"/>
               </a:rPr>
-              <a:t>+ Audit the AI / EiPE / Prompt Problem (see worksheet)</a:t>
-            </a:r>
-            <a:endParaRPr lang="en-US" sz="1400" dirty="0"/>
-          </a:p>
-        </p:txBody>
-      </p:sp>
-      <p:sp>
-        <p:nvSpPr>
-          <p:cNvPr id="7" name="Text 4"/>
-          <p:cNvSpPr/>
-          <p:nvPr/>
-        </p:nvSpPr>
-        <p:spPr>
-          <a:xfrm>
-            <a:off x="457200" y="4800600"/>
-            <a:ext cx="6949440" cy="274320"/>
+              <a:t>Switch to solution_app.py; re-test: access denied</a:t>
+            </a:r>
+            <a:endParaRPr lang="en-US" sz="1350" dirty="0"/>
+          </a:p>
+        </p:txBody>
+      </p:sp>
+      <p:sp>
+        <p:nvSpPr>
+          <p:cNvPr id="16" name="Shape 13"/>
+          <p:cNvSpPr/>
+          <p:nvPr/>
+        </p:nvSpPr>
+        <p:spPr>
+          <a:xfrm>
+            <a:off x="502920" y="3995928"/>
+            <a:ext cx="384048" cy="384048"/>
+          </a:xfrm>
+          <a:prstGeom prst="ellipse">
+            <a:avLst/>
+          </a:prstGeom>
+          <a:solidFill>
+            <a:srgbClr val="E35205"/>
+          </a:solidFill>
+          <a:ln/>
+        </p:spPr>
+      </p:sp>
+      <p:sp>
+        <p:nvSpPr>
+          <p:cNvPr id="17" name="Text 14"/>
+          <p:cNvSpPr/>
+          <p:nvPr/>
+        </p:nvSpPr>
+        <p:spPr>
+          <a:xfrm>
+            <a:off x="502920" y="3995928"/>
+            <a:ext cx="384048" cy="384048"/>
           </a:xfrm>
           <a:prstGeom prst="rect">
             <a:avLst/>
@@ -7030,20 +7036,100 @@
         </p:spPr>
         <p:txBody>
           <a:bodyPr wrap="square" lIns="0" tIns="0" rIns="0" bIns="0" rtlCol="0" anchor="ctr"/>
+          <a:lstStyle/>
+          <a:p>
+            <a:pPr algn="ctr" indent="0" marL="0">
+              <a:buNone/>
+            </a:pPr>
+            <a:r>
+              <a:rPr lang="en-US" sz="1500" b="1" dirty="0">
+                <a:solidFill>
+                  <a:srgbClr val="0E1726"/>
+                </a:solidFill>
+                <a:latin typeface="Arial" pitchFamily="34" charset="0"/>
+                <a:ea typeface="Arial" pitchFamily="34" charset="-122"/>
+                <a:cs typeface="Arial" pitchFamily="34" charset="-120"/>
+              </a:rPr>
+              <a:t>4</a:t>
+            </a:r>
+            <a:endParaRPr lang="en-US" sz="1500" dirty="0"/>
+          </a:p>
+        </p:txBody>
+      </p:sp>
+      <p:sp>
+        <p:nvSpPr>
+          <p:cNvPr id="18" name="Text 15"/>
+          <p:cNvSpPr/>
+          <p:nvPr/>
+        </p:nvSpPr>
+        <p:spPr>
+          <a:xfrm>
+            <a:off x="1051560" y="3995928"/>
+            <a:ext cx="7589520" cy="402336"/>
+          </a:xfrm>
+          <a:prstGeom prst="rect">
+            <a:avLst/>
+          </a:prstGeom>
+          <a:noFill/>
+          <a:ln/>
+        </p:spPr>
+        <p:txBody>
+          <a:bodyPr wrap="square" lIns="0" tIns="0" rIns="0" bIns="0" rtlCol="0" anchor="ctr">
+            <a:normAutofit/>
+          </a:bodyPr>
           <a:lstStyle/>
           <a:p>
             <a:pPr indent="0" marL="0">
               <a:buNone/>
             </a:pPr>
             <a:r>
-              <a:rPr lang="en-US" sz="900" dirty="0">
-                <a:solidFill>
-                  <a:srgbClr val="64748B"/>
+              <a:rPr lang="en-US" sz="1350" dirty="0">
+                <a:solidFill>
+                  <a:srgbClr val="1F2937"/>
                 </a:solidFill>
                 <a:latin typeface="Calibri" pitchFamily="34" charset="0"/>
                 <a:ea typeface="Calibri" pitchFamily="34" charset="-122"/>
                 <a:cs typeface="Calibri" pitchFamily="34" charset="-120"/>
               </a:rPr>
+              <a:t>Cite the exact line that fixes each of the three attacks</a:t>
+            </a:r>
+            <a:endParaRPr lang="en-US" sz="1350" dirty="0"/>
+          </a:p>
+        </p:txBody>
+      </p:sp>
+      <p:sp>
+        <p:nvSpPr>
+          <p:cNvPr id="19" name="Text 16"/>
+          <p:cNvSpPr/>
+          <p:nvPr/>
+        </p:nvSpPr>
+        <p:spPr>
+          <a:xfrm>
+            <a:off x="457200" y="4800600"/>
+            <a:ext cx="6949440" cy="274320"/>
+          </a:xfrm>
+          <a:prstGeom prst="rect">
+            <a:avLst/>
+          </a:prstGeom>
+          <a:noFill/>
+          <a:ln/>
+        </p:spPr>
+        <p:txBody>
+          <a:bodyPr wrap="square" lIns="0" tIns="0" rIns="0" bIns="0" rtlCol="0" anchor="ctr"/>
+          <a:lstStyle/>
+          <a:p>
+            <a:pPr indent="0" marL="0">
+              <a:buNone/>
+            </a:pPr>
+            <a:r>
+              <a:rPr lang="en-US" sz="900" dirty="0">
+                <a:solidFill>
+                  <a:srgbClr val="64748B"/>
+                </a:solidFill>
+                <a:latin typeface="Calibri" pitchFamily="34" charset="0"/>
+                <a:ea typeface="Calibri" pitchFamily="34" charset="-122"/>
+                <a:cs typeface="Calibri" pitchFamily="34" charset="-120"/>
+              </a:rPr>
               <a:t>Software Security · Week 6</a:t>
             </a:r>
             <a:endParaRPr lang="en-US" sz="900" dirty="0"/>
@@ -7052,7 +7138,7 @@
       </p:sp>
       <p:pic>
         <p:nvPicPr>
-          <p:cNvPr id="8" name="Image 1" descr="/Users/pop7/Library/CloudStorage/OneDrive-MonsterConnectCo.,Ltd/Lecture/KOSEN69 - software-security/slides/pptx/assets/logo-small.png">    </p:cNvPr>
+          <p:cNvPr id="20" name="Image 1" descr="/Users/pop7/Library/CloudStorage/OneDrive-MonsterConnectCo.,Ltd/Lecture/KOSEN69 - software-security/slides/pptx/assets/logo-small.png">    </p:cNvPr>
           <p:cNvPicPr>
             <a:picLocks noChangeAspect="1"/>
           </p:cNvPicPr>
@@ -7190,7 +7276,7 @@
                 <a:ea typeface="Arial" pitchFamily="34" charset="-122"/>
                 <a:cs typeface="Arial" pitchFamily="34" charset="-120"/>
               </a:rPr>
-              <a:t>Key takeaways</a:t>
+              <a:t>Deliverable</a:t>
             </a:r>
             <a:endParaRPr lang="en-US" sz="2600" dirty="0"/>
           </a:p>
@@ -7205,11 +7291,11 @@
         <p:spPr>
           <a:xfrm>
             <a:off x="457200" y="1325880"/>
-            <a:ext cx="8229600" cy="1207008"/>
+            <a:ext cx="8229600" cy="1517904"/>
           </a:xfrm>
           <a:prstGeom prst="roundRect">
             <a:avLst>
-              <a:gd name="adj" fmla="val 6061"/>
+              <a:gd name="adj" fmla="val 4819"/>
             </a:avLst>
           </a:prstGeom>
           <a:solidFill>
@@ -7234,7 +7320,7 @@
         <p:spPr>
           <a:xfrm>
             <a:off x="731520" y="1435608"/>
-            <a:ext cx="7680960" cy="987552"/>
+            <a:ext cx="7680960" cy="1298448"/>
           </a:xfrm>
           <a:prstGeom prst="rect">
             <a:avLst/>
@@ -7243,7 +7329,9 @@
           <a:ln/>
         </p:spPr>
         <p:txBody>
-          <a:bodyPr wrap="square" lIns="0" tIns="0" rIns="0" bIns="0" rtlCol="0" anchor="t"/>
+          <a:bodyPr wrap="square" lIns="0" tIns="0" rIns="0" bIns="0" rtlCol="0" anchor="t">
+            <a:normAutofit/>
+          </a:bodyPr>
           <a:lstStyle/>
           <a:p>
             <a:pPr marL="342900" indent="-342900">
@@ -7262,7 +7350,7 @@
                 <a:ea typeface="Calibri" pitchFamily="34" charset="-122"/>
                 <a:cs typeface="Calibri" pitchFamily="34" charset="-120"/>
               </a:rPr>
-              <a:t>Authenticate once, authorize every request</a:t>
+              <a:t>IDOR + JWT findings with impact</a:t>
             </a:r>
             <a:endParaRPr lang="en-US" sz="1400" dirty="0"/>
           </a:p>
@@ -7283,7 +7371,7 @@
                 <a:ea typeface="Calibri" pitchFamily="34" charset="-122"/>
                 <a:cs typeface="Calibri" pitchFamily="34" charset="-120"/>
               </a:rPr>
-              <a:t>Never trust client-supplied IDs or tokens blindly</a:t>
+              <a:t>Citation of the fix lines in solution_app.py for all three attacks</a:t>
             </a:r>
             <a:endParaRPr lang="en-US" sz="1400" dirty="0"/>
           </a:p>
@@ -7304,7 +7392,28 @@
                 <a:ea typeface="Calibri" pitchFamily="34" charset="-122"/>
                 <a:cs typeface="Calibri" pitchFamily="34" charset="-120"/>
               </a:rPr>
-              <a:t>Deny by default</a:t>
+              <a:t>Proof the forged token / cross-user access now fails</a:t>
+            </a:r>
+            <a:endParaRPr lang="en-US" sz="1400" dirty="0"/>
+          </a:p>
+          <a:p>
+            <a:pPr marL="342900" indent="-342900">
+              <a:spcAft>
+                <a:spcPts val="600"/>
+              </a:spcAft>
+              <a:buSzPct val="100000"/>
+              <a:buChar char="•"/>
+            </a:pPr>
+            <a:r>
+              <a:rPr lang="en-US" sz="1400" dirty="0">
+                <a:solidFill>
+                  <a:srgbClr val="1F2937"/>
+                </a:solidFill>
+                <a:latin typeface="Calibri" pitchFamily="34" charset="0"/>
+                <a:ea typeface="Calibri" pitchFamily="34" charset="-122"/>
+                <a:cs typeface="Calibri" pitchFamily="34" charset="-120"/>
+              </a:rPr>
+              <a:t>+ Audit the AI / EiPE / Prompt Problem (see worksheet)</a:t>
             </a:r>
             <a:endParaRPr lang="en-US" sz="1400" dirty="0"/>
           </a:p>
@@ -7407,14 +7516,65 @@
       </p:grpSpPr>
       <p:sp>
         <p:nvSpPr>
-          <p:cNvPr id="2" name="Text 0"/>
-          <p:cNvSpPr/>
-          <p:nvPr/>
-        </p:nvSpPr>
-        <p:spPr>
-          <a:xfrm>
-            <a:off x="640080" y="1737360"/>
-            <a:ext cx="7863840" cy="1097280"/>
+          <p:cNvPr id="2" name="Shape 0"/>
+          <p:cNvSpPr/>
+          <p:nvPr/>
+        </p:nvSpPr>
+        <p:spPr>
+          <a:xfrm>
+            <a:off x="457200" y="384048"/>
+            <a:ext cx="530352" cy="530352"/>
+          </a:xfrm>
+          <a:prstGeom prst="ellipse">
+            <a:avLst/>
+          </a:prstGeom>
+          <a:solidFill>
+            <a:srgbClr val="E35205"/>
+          </a:solidFill>
+          <a:ln/>
+          <a:effectLst>
+            <a:outerShdw sx="100000" sy="100000" kx="0" ky="0" algn="bl" rotWithShape="0" blurRad="76200" dist="25400" dir="5400000">
+              <a:srgbClr val="000000">
+                <a:alpha val="12000"/>
+              </a:srgbClr>
+            </a:outerShdw>
+          </a:effectLst>
+        </p:spPr>
+      </p:sp>
+      <p:pic>
+        <p:nvPicPr>
+          <p:cNvPr id="3" name="Image 0" descr="preencoded.png">    </p:cNvPr>
+          <p:cNvPicPr>
+            <a:picLocks noChangeAspect="1"/>
+          </p:cNvPicPr>
+          <p:nvPr/>
+        </p:nvPicPr>
+        <p:blipFill>
+          <a:blip r:embed="rId1"/>
+          <a:stretch>
+            <a:fillRect/>
+          </a:stretch>
+        </p:blipFill>
+        <p:spPr>
+          <a:xfrm>
+            <a:off x="594360" y="521208"/>
+            <a:ext cx="256032" cy="256032"/>
+          </a:xfrm>
+          <a:prstGeom prst="rect">
+            <a:avLst/>
+          </a:prstGeom>
+        </p:spPr>
+      </p:pic>
+      <p:sp>
+        <p:nvSpPr>
+          <p:cNvPr id="4" name="Text 1"/>
+          <p:cNvSpPr/>
+          <p:nvPr/>
+        </p:nvSpPr>
+        <p:spPr>
+          <a:xfrm>
+            <a:off x="1143000" y="329184"/>
+            <a:ext cx="7498080" cy="603504"/>
           </a:xfrm>
           <a:prstGeom prst="rect">
             <a:avLst/>
@@ -7430,7 +7590,7 @@
               <a:buNone/>
             </a:pPr>
             <a:r>
-              <a:rPr lang="en-US" sz="4600" b="1" dirty="0">
+              <a:rPr lang="en-US" sz="2600" b="1" dirty="0">
                 <a:solidFill>
                   <a:srgbClr val="1F2937"/>
                 </a:solidFill>
@@ -7438,22 +7598,51 @@
                 <a:ea typeface="Arial" pitchFamily="34" charset="-122"/>
                 <a:cs typeface="Arial" pitchFamily="34" charset="-120"/>
               </a:rPr>
-              <a:t>Questions?</a:t>
-            </a:r>
-            <a:endParaRPr lang="en-US" sz="4600" dirty="0"/>
-          </a:p>
-        </p:txBody>
-      </p:sp>
-      <p:sp>
-        <p:nvSpPr>
-          <p:cNvPr id="3" name="Text 1"/>
-          <p:cNvSpPr/>
-          <p:nvPr/>
-        </p:nvSpPr>
-        <p:spPr>
-          <a:xfrm>
-            <a:off x="658368" y="2834640"/>
-            <a:ext cx="7863840" cy="731520"/>
+              <a:t>Key takeaways</a:t>
+            </a:r>
+            <a:endParaRPr lang="en-US" sz="2600" dirty="0"/>
+          </a:p>
+        </p:txBody>
+      </p:sp>
+      <p:sp>
+        <p:nvSpPr>
+          <p:cNvPr id="5" name="Shape 2"/>
+          <p:cNvSpPr/>
+          <p:nvPr/>
+        </p:nvSpPr>
+        <p:spPr>
+          <a:xfrm>
+            <a:off x="457200" y="1325880"/>
+            <a:ext cx="8229600" cy="1207008"/>
+          </a:xfrm>
+          <a:prstGeom prst="roundRect">
+            <a:avLst>
+              <a:gd name="adj" fmla="val 6061"/>
+            </a:avLst>
+          </a:prstGeom>
+          <a:solidFill>
+            <a:srgbClr val="F1F5F9"/>
+          </a:solidFill>
+          <a:ln/>
+          <a:effectLst>
+            <a:outerShdw sx="100000" sy="100000" kx="0" ky="0" algn="bl" rotWithShape="0" blurRad="76200" dist="25400" dir="5400000">
+              <a:srgbClr val="000000">
+                <a:alpha val="12000"/>
+              </a:srgbClr>
+            </a:outerShdw>
+          </a:effectLst>
+        </p:spPr>
+      </p:sp>
+      <p:sp>
+        <p:nvSpPr>
+          <p:cNvPr id="6" name="Text 3"/>
+          <p:cNvSpPr/>
+          <p:nvPr/>
+        </p:nvSpPr>
+        <p:spPr>
+          <a:xfrm>
+            <a:off x="731520" y="1435608"/>
+            <a:ext cx="7680960" cy="987552"/>
           </a:xfrm>
           <a:prstGeom prst="rect">
             <a:avLst/>
@@ -7462,37 +7651,124 @@
           <a:ln/>
         </p:spPr>
         <p:txBody>
-          <a:bodyPr wrap="square" lIns="0" tIns="0" rIns="0" bIns="0" rtlCol="0" anchor="ctr"/>
-          <a:lstStyle/>
-          <a:p>
-            <a:pPr indent="0" marL="0">
-              <a:buNone/>
-            </a:pPr>
-            <a:r>
-              <a:rPr lang="en-US" sz="1800" dirty="0">
-                <a:solidFill>
-                  <a:srgbClr val="E35205"/>
+          <a:bodyPr wrap="square" lIns="0" tIns="0" rIns="0" bIns="0" rtlCol="0" anchor="t">
+            <a:normAutofit/>
+          </a:bodyPr>
+          <a:lstStyle/>
+          <a:p>
+            <a:pPr marL="342900" indent="-342900">
+              <a:spcAft>
+                <a:spcPts val="600"/>
+              </a:spcAft>
+              <a:buSzPct val="100000"/>
+              <a:buChar char="•"/>
+            </a:pPr>
+            <a:r>
+              <a:rPr lang="en-US" sz="1400" dirty="0">
+                <a:solidFill>
+                  <a:srgbClr val="1F2937"/>
                 </a:solidFill>
                 <a:latin typeface="Calibri" pitchFamily="34" charset="0"/>
                 <a:ea typeface="Calibri" pitchFamily="34" charset="-122"/>
                 <a:cs typeface="Calibri" pitchFamily="34" charset="-120"/>
               </a:rPr>
-              <a:t>Next week: Reflection &amp; review (midterm prep)</a:t>
-            </a:r>
-            <a:endParaRPr lang="en-US" sz="1800" dirty="0"/>
+              <a:t>Authenticate once, authorize every request</a:t>
+            </a:r>
+            <a:endParaRPr lang="en-US" sz="1400" dirty="0"/>
+          </a:p>
+          <a:p>
+            <a:pPr marL="342900" indent="-342900">
+              <a:spcAft>
+                <a:spcPts val="600"/>
+              </a:spcAft>
+              <a:buSzPct val="100000"/>
+              <a:buChar char="•"/>
+            </a:pPr>
+            <a:r>
+              <a:rPr lang="en-US" sz="1400" dirty="0">
+                <a:solidFill>
+                  <a:srgbClr val="1F2937"/>
+                </a:solidFill>
+                <a:latin typeface="Calibri" pitchFamily="34" charset="0"/>
+                <a:ea typeface="Calibri" pitchFamily="34" charset="-122"/>
+                <a:cs typeface="Calibri" pitchFamily="34" charset="-120"/>
+              </a:rPr>
+              <a:t>Never trust client-supplied IDs or tokens blindly</a:t>
+            </a:r>
+            <a:endParaRPr lang="en-US" sz="1400" dirty="0"/>
+          </a:p>
+          <a:p>
+            <a:pPr marL="342900" indent="-342900">
+              <a:spcAft>
+                <a:spcPts val="600"/>
+              </a:spcAft>
+              <a:buSzPct val="100000"/>
+              <a:buChar char="•"/>
+            </a:pPr>
+            <a:r>
+              <a:rPr lang="en-US" sz="1400" dirty="0">
+                <a:solidFill>
+                  <a:srgbClr val="1F2937"/>
+                </a:solidFill>
+                <a:latin typeface="Calibri" pitchFamily="34" charset="0"/>
+                <a:ea typeface="Calibri" pitchFamily="34" charset="-122"/>
+                <a:cs typeface="Calibri" pitchFamily="34" charset="-120"/>
+              </a:rPr>
+              <a:t>Deny by default</a:t>
+            </a:r>
+            <a:endParaRPr lang="en-US" sz="1400" dirty="0"/>
+          </a:p>
+        </p:txBody>
+      </p:sp>
+      <p:sp>
+        <p:nvSpPr>
+          <p:cNvPr id="7" name="Text 4"/>
+          <p:cNvSpPr/>
+          <p:nvPr/>
+        </p:nvSpPr>
+        <p:spPr>
+          <a:xfrm>
+            <a:off x="457200" y="4800600"/>
+            <a:ext cx="6949440" cy="274320"/>
+          </a:xfrm>
+          <a:prstGeom prst="rect">
+            <a:avLst/>
+          </a:prstGeom>
+          <a:noFill/>
+          <a:ln/>
+        </p:spPr>
+        <p:txBody>
+          <a:bodyPr wrap="square" lIns="0" tIns="0" rIns="0" bIns="0" rtlCol="0" anchor="ctr"/>
+          <a:lstStyle/>
+          <a:p>
+            <a:pPr indent="0" marL="0">
+              <a:buNone/>
+            </a:pPr>
+            <a:r>
+              <a:rPr lang="en-US" sz="900" dirty="0">
+                <a:solidFill>
+                  <a:srgbClr val="64748B"/>
+                </a:solidFill>
+                <a:latin typeface="Calibri" pitchFamily="34" charset="0"/>
+                <a:ea typeface="Calibri" pitchFamily="34" charset="-122"/>
+                <a:cs typeface="Calibri" pitchFamily="34" charset="-120"/>
+              </a:rPr>
+              <a:t>Software Security · Week 6</a:t>
+            </a:r>
+            <a:endParaRPr lang="en-US" sz="900" dirty="0"/>
           </a:p>
         </p:txBody>
       </p:sp>
       <p:pic>
         <p:nvPicPr>
-          <p:cNvPr id="4" name="Image 0" descr="/Users/pop7/Library/CloudStorage/OneDrive-MonsterConnectCo.,Ltd/Lecture/KOSEN69 - software-security/slides/pptx/assets/logo-small.png">    </p:cNvPr>
+          <p:cNvPr id="8" name="Image 1" descr="/Users/pop7/Library/CloudStorage/OneDrive-MonsterConnectCo.,Ltd/Lecture/KOSEN69 - software-security/slides/pptx/assets/logo-small.png">    </p:cNvPr>
           <p:cNvPicPr>
             <a:picLocks noChangeAspect="1"/>
           </p:cNvPicPr>
           <p:nvPr/>
         </p:nvPicPr>
         <p:blipFill>
-          <a:blip r:embed="rId1"/>
+          <a:blip r:embed="rId2"/>
           <a:stretch>
             <a:fillRect/>
           </a:stretch>
@@ -7676,7 +7952,9 @@
           <a:ln/>
         </p:spPr>
         <p:txBody>
-          <a:bodyPr wrap="square" lIns="0" tIns="0" rIns="0" bIns="0" rtlCol="0" anchor="t"/>
+          <a:bodyPr wrap="square" lIns="0" tIns="0" rIns="0" bIns="0" rtlCol="0" anchor="t">
+            <a:normAutofit/>
+          </a:bodyPr>
           <a:lstStyle/>
           <a:p>
             <a:pPr marL="342900" indent="-342900">
@@ -7834,6 +8112,140 @@
         </p:nvPicPr>
         <p:blipFill>
           <a:blip r:embed="rId2"/>
+          <a:stretch>
+            <a:fillRect/>
+          </a:stretch>
+        </p:blipFill>
+        <p:spPr>
+          <a:xfrm>
+            <a:off x="7882128" y="4700016"/>
+            <a:ext cx="768096" cy="356616"/>
+          </a:xfrm>
+          <a:prstGeom prst="rect">
+            <a:avLst/>
+          </a:prstGeom>
+        </p:spPr>
+      </p:pic>
+    </p:spTree>
+  </p:cSld>
+  <p:clrMapOvr>
+    <a:masterClrMapping/>
+  </p:clrMapOvr>
+</p:sld>
+</file>
+
+<file path=ppt/slides/slide20.xml><?xml version="1.0" encoding="utf-8"?>
+<p:sld xmlns:a="http://schemas.openxmlformats.org/drawingml/2006/main" xmlns:r="http://schemas.openxmlformats.org/officeDocument/2006/relationships" xmlns:p="http://schemas.openxmlformats.org/presentationml/2006/main">
+  <p:cSld name="Slide 20">
+    <p:bg>
+      <p:bgPr>
+        <a:solidFill>
+          <a:srgbClr val="FFFFFF"/>
+        </a:solidFill>
+      </p:bgPr>
+    </p:bg>
+    <p:spTree>
+      <p:nvGrpSpPr>
+        <p:cNvPr id="1" name=""/>
+        <p:cNvGrpSpPr/>
+        <p:nvPr/>
+      </p:nvGrpSpPr>
+      <p:grpSpPr>
+        <a:xfrm>
+          <a:off x="0" y="0"/>
+          <a:ext cx="0" cy="0"/>
+          <a:chOff x="0" y="0"/>
+          <a:chExt cx="0" cy="0"/>
+        </a:xfrm>
+      </p:grpSpPr>
+      <p:sp>
+        <p:nvSpPr>
+          <p:cNvPr id="2" name="Text 0"/>
+          <p:cNvSpPr/>
+          <p:nvPr/>
+        </p:nvSpPr>
+        <p:spPr>
+          <a:xfrm>
+            <a:off x="640080" y="1737360"/>
+            <a:ext cx="7863840" cy="1097280"/>
+          </a:xfrm>
+          <a:prstGeom prst="rect">
+            <a:avLst/>
+          </a:prstGeom>
+          <a:noFill/>
+          <a:ln/>
+        </p:spPr>
+        <p:txBody>
+          <a:bodyPr wrap="square" lIns="0" tIns="0" rIns="0" bIns="0" rtlCol="0" anchor="ctr"/>
+          <a:lstStyle/>
+          <a:p>
+            <a:pPr indent="0" marL="0">
+              <a:buNone/>
+            </a:pPr>
+            <a:r>
+              <a:rPr lang="en-US" sz="4600" b="1" dirty="0">
+                <a:solidFill>
+                  <a:srgbClr val="1F2937"/>
+                </a:solidFill>
+                <a:latin typeface="Arial" pitchFamily="34" charset="0"/>
+                <a:ea typeface="Arial" pitchFamily="34" charset="-122"/>
+                <a:cs typeface="Arial" pitchFamily="34" charset="-120"/>
+              </a:rPr>
+              <a:t>Questions?</a:t>
+            </a:r>
+            <a:endParaRPr lang="en-US" sz="4600" dirty="0"/>
+          </a:p>
+        </p:txBody>
+      </p:sp>
+      <p:sp>
+        <p:nvSpPr>
+          <p:cNvPr id="3" name="Text 1"/>
+          <p:cNvSpPr/>
+          <p:nvPr/>
+        </p:nvSpPr>
+        <p:spPr>
+          <a:xfrm>
+            <a:off x="658368" y="2834640"/>
+            <a:ext cx="7863840" cy="731520"/>
+          </a:xfrm>
+          <a:prstGeom prst="rect">
+            <a:avLst/>
+          </a:prstGeom>
+          <a:noFill/>
+          <a:ln/>
+        </p:spPr>
+        <p:txBody>
+          <a:bodyPr wrap="square" lIns="0" tIns="0" rIns="0" bIns="0" rtlCol="0" anchor="ctr"/>
+          <a:lstStyle/>
+          <a:p>
+            <a:pPr indent="0" marL="0">
+              <a:buNone/>
+            </a:pPr>
+            <a:r>
+              <a:rPr lang="en-US" sz="1800" dirty="0">
+                <a:solidFill>
+                  <a:srgbClr val="E35205"/>
+                </a:solidFill>
+                <a:latin typeface="Calibri" pitchFamily="34" charset="0"/>
+                <a:ea typeface="Calibri" pitchFamily="34" charset="-122"/>
+                <a:cs typeface="Calibri" pitchFamily="34" charset="-120"/>
+              </a:rPr>
+              <a:t>Next week: Reflection &amp; review (midterm prep)</a:t>
+            </a:r>
+            <a:endParaRPr lang="en-US" sz="1800" dirty="0"/>
+          </a:p>
+        </p:txBody>
+      </p:sp>
+      <p:pic>
+        <p:nvPicPr>
+          <p:cNvPr id="4" name="Image 0" descr="/Users/pop7/Library/CloudStorage/OneDrive-MonsterConnectCo.,Ltd/Lecture/KOSEN69 - software-security/slides/pptx/assets/logo-small.png">    </p:cNvPr>
+          <p:cNvPicPr>
+            <a:picLocks noChangeAspect="1"/>
+          </p:cNvPicPr>
+          <p:nvPr/>
+        </p:nvPicPr>
+        <p:blipFill>
+          <a:blip r:embed="rId1"/>
           <a:stretch>
             <a:fillRect/>
           </a:stretch>
@@ -8017,7 +8429,9 @@
           <a:ln/>
         </p:spPr>
         <p:txBody>
-          <a:bodyPr wrap="square" lIns="0" tIns="0" rIns="0" bIns="0" rtlCol="0" anchor="t"/>
+          <a:bodyPr wrap="square" lIns="0" tIns="0" rIns="0" bIns="0" rtlCol="0" anchor="t">
+            <a:normAutofit/>
+          </a:bodyPr>
           <a:lstStyle/>
           <a:p>
             <a:pPr marL="342900" indent="-342900">
@@ -8295,7 +8709,9 @@
           <a:ln/>
         </p:spPr>
         <p:txBody>
-          <a:bodyPr wrap="square" lIns="0" tIns="0" rIns="0" bIns="0" rtlCol="0" anchor="t"/>
+          <a:bodyPr wrap="square" lIns="0" tIns="0" rIns="0" bIns="0" rtlCol="0" anchor="t">
+            <a:normAutofit/>
+          </a:bodyPr>
           <a:lstStyle/>
           <a:p>
             <a:pPr marL="342900" indent="-342900">
@@ -8577,11 +8993,11 @@
         <p:spPr>
           <a:xfrm>
             <a:off x="457200" y="1325880"/>
-            <a:ext cx="8229600" cy="1207008"/>
+            <a:ext cx="8229600" cy="2121408"/>
           </a:xfrm>
           <a:prstGeom prst="roundRect">
             <a:avLst>
-              <a:gd name="adj" fmla="val 6061"/>
+              <a:gd name="adj" fmla="val 3448"/>
             </a:avLst>
           </a:prstGeom>
           <a:solidFill>
@@ -8606,7 +9022,7 @@
         <p:spPr>
           <a:xfrm>
             <a:off x="731520" y="1435608"/>
-            <a:ext cx="7680960" cy="987552"/>
+            <a:ext cx="7680960" cy="1901952"/>
           </a:xfrm>
           <a:prstGeom prst="rect">
             <a:avLst/>
@@ -8615,7 +9031,9 @@
           <a:ln/>
         </p:spPr>
         <p:txBody>
-          <a:bodyPr wrap="square" lIns="0" tIns="0" rIns="0" bIns="0" rtlCol="0" anchor="t"/>
+          <a:bodyPr wrap="square" lIns="0" tIns="0" rIns="0" bIns="0" rtlCol="0" anchor="t">
+            <a:normAutofit/>
+          </a:bodyPr>
           <a:lstStyle/>
           <a:p>
             <a:pPr marL="342900" indent="-342900">
@@ -8655,7 +9073,7 @@
                 <a:ea typeface="Calibri" pitchFamily="34" charset="-122"/>
                 <a:cs typeface="Calibri" pitchFamily="34" charset="-120"/>
               </a:rPr>
-              <a:t>Stored in cookie (HttpOnly, Secure, SameSite)</a:t>
+              <a:t>Classic pattern: stored in a cookie (HttpOnly, Secure, SameSite)</a:t>
             </a:r>
             <a:endParaRPr lang="en-US" sz="1400" dirty="0"/>
           </a:p>
@@ -8677,6 +9095,27 @@
                 <a:cs typeface="Calibri" pitchFamily="34" charset="-120"/>
               </a:rPr>
               <a:t>Risks: fixation, predictable IDs, no expiry, no logout invalidation</a:t>
+            </a:r>
+            <a:endParaRPr lang="en-US" sz="1400" dirty="0"/>
+          </a:p>
+          <a:p>
+            <a:pPr marL="342900" indent="-342900">
+              <a:spcAft>
+                <a:spcPts val="600"/>
+              </a:spcAft>
+              <a:buSzPct val="100000"/>
+              <a:buChar char="•"/>
+            </a:pPr>
+            <a:r>
+              <a:rPr lang="en-US" sz="1400" dirty="0">
+                <a:solidFill>
+                  <a:srgbClr val="1F2937"/>
+                </a:solidFill>
+                <a:latin typeface="Calibri" pitchFamily="34" charset="0"/>
+                <a:ea typeface="Calibri" pitchFamily="34" charset="-122"/>
+                <a:cs typeface="Calibri" pitchFamily="34" charset="-120"/>
+              </a:rPr>
+              <a:t>Today's lab is 100% JWT bearer-token — no cookies at all. Of these four risks, only "no expiry" is what you'll actually exercise (the fix adds a 15-min exp claim); fixation/predictable-ID/logout-invalidation are cookie-session concepts, general knowledge, not tested here</a:t>
             </a:r>
             <a:endParaRPr lang="en-US" sz="1400" dirty="0"/>
           </a:p>
@@ -8876,11 +9315,11 @@
         <p:spPr>
           <a:xfrm>
             <a:off x="457200" y="1325880"/>
-            <a:ext cx="8229600" cy="530352"/>
+            <a:ext cx="8229600" cy="493776"/>
           </a:xfrm>
           <a:prstGeom prst="roundRect">
             <a:avLst>
-              <a:gd name="adj" fmla="val 10345"/>
+              <a:gd name="adj" fmla="val 11111"/>
             </a:avLst>
           </a:prstGeom>
           <a:solidFill>
@@ -8903,7 +9342,7 @@
         <p:spPr>
           <a:xfrm>
             <a:off x="640080" y="1399032"/>
-            <a:ext cx="7863840" cy="384048"/>
+            <a:ext cx="7863840" cy="347472"/>
           </a:xfrm>
           <a:prstGeom prst="rect">
             <a:avLst/>
@@ -8912,7 +9351,9 @@
           <a:ln/>
         </p:spPr>
         <p:txBody>
-          <a:bodyPr wrap="square" lIns="0" tIns="0" rIns="0" bIns="0" rtlCol="0" anchor="t"/>
+          <a:bodyPr wrap="square" lIns="0" tIns="0" rIns="0" bIns="0" rtlCol="0" anchor="t">
+            <a:normAutofit/>
+          </a:bodyPr>
           <a:lstStyle/>
           <a:p>
             <a:pPr indent="0" marL="0">
@@ -8941,7 +9382,7 @@
         </p:nvSpPr>
         <p:spPr>
           <a:xfrm>
-            <a:off x="457200" y="2020824"/>
+            <a:off x="457200" y="1984248"/>
             <a:ext cx="8229600" cy="1517904"/>
           </a:xfrm>
           <a:prstGeom prst="roundRect">
@@ -8970,7 +9411,7 @@
         </p:nvSpPr>
         <p:spPr>
           <a:xfrm>
-            <a:off x="731520" y="2130552"/>
+            <a:off x="731520" y="2093976"/>
             <a:ext cx="7680960" cy="1298448"/>
           </a:xfrm>
           <a:prstGeom prst="rect">
@@ -8980,7 +9421,9 @@
           <a:ln/>
         </p:spPr>
         <p:txBody>
-          <a:bodyPr wrap="square" lIns="0" tIns="0" rIns="0" bIns="0" rtlCol="0" anchor="t"/>
+          <a:bodyPr wrap="square" lIns="0" tIns="0" rIns="0" bIns="0" rtlCol="0" anchor="t">
+            <a:normAutofit/>
+          </a:bodyPr>
           <a:lstStyle/>
           <a:p>
             <a:pPr marL="342900" indent="-342900">
@@ -9300,7 +9743,9 @@
           <a:ln/>
         </p:spPr>
         <p:txBody>
-          <a:bodyPr wrap="square" lIns="0" tIns="0" rIns="0" bIns="0" rtlCol="0" anchor="t"/>
+          <a:bodyPr wrap="square" lIns="0" tIns="0" rIns="0" bIns="0" rtlCol="0" anchor="t">
+            <a:normAutofit/>
+          </a:bodyPr>
           <a:lstStyle/>
           <a:p>
             <a:pPr marL="342900" indent="-342900">
@@ -9561,11 +10006,11 @@
         <p:spPr>
           <a:xfrm>
             <a:off x="457200" y="1325880"/>
-            <a:ext cx="8229600" cy="786384"/>
+            <a:ext cx="8229600" cy="713232"/>
           </a:xfrm>
           <a:prstGeom prst="roundRect">
             <a:avLst>
-              <a:gd name="adj" fmla="val 6977"/>
+              <a:gd name="adj" fmla="val 7692"/>
             </a:avLst>
           </a:prstGeom>
           <a:solidFill>
@@ -9588,7 +10033,7 @@
         <p:spPr>
           <a:xfrm>
             <a:off x="640080" y="1399032"/>
-            <a:ext cx="7863840" cy="640080"/>
+            <a:ext cx="7863840" cy="566928"/>
           </a:xfrm>
           <a:prstGeom prst="rect">
             <a:avLst/>
@@ -9597,7 +10042,9 @@
           <a:ln/>
         </p:spPr>
         <p:txBody>
-          <a:bodyPr wrap="square" lIns="0" tIns="0" rIns="0" bIns="0" rtlCol="0" anchor="t"/>
+          <a:bodyPr wrap="square" lIns="0" tIns="0" rIns="0" bIns="0" rtlCol="0" anchor="t">
+            <a:normAutofit/>
+          </a:bodyPr>
           <a:lstStyle/>
           <a:p>
             <a:pPr indent="0" marL="0">
@@ -9612,7 +10059,7 @@
                 <a:ea typeface="Courier New" pitchFamily="34" charset="-122"/>
                 <a:cs typeface="Courier New" pitchFamily="34" charset="-120"/>
               </a:rPr>
-              <a:t>GET /api/orders/1001   → your order</a:t>
+              <a:t>GET /api/orders/1   → your order</a:t>
             </a:r>
             <a:endParaRPr lang="en-US" sz="1150" dirty="0"/>
           </a:p>
@@ -9629,7 +10076,7 @@
                 <a:ea typeface="Courier New" pitchFamily="34" charset="-122"/>
                 <a:cs typeface="Courier New" pitchFamily="34" charset="-120"/>
               </a:rPr>
-              <a:t>GET /api/orders/1002   → someone else's  😱</a:t>
+              <a:t>GET /api/orders/2   → someone else's  😱</a:t>
             </a:r>
             <a:endParaRPr lang="en-US" sz="1150" dirty="0"/>
           </a:p>
@@ -9643,7 +10090,7 @@
         </p:nvSpPr>
         <p:spPr>
           <a:xfrm>
-            <a:off x="457200" y="2276856"/>
+            <a:off x="457200" y="2203704"/>
             <a:ext cx="8229600" cy="896112"/>
           </a:xfrm>
           <a:prstGeom prst="roundRect">
@@ -9672,7 +10119,7 @@
         </p:nvSpPr>
         <p:spPr>
           <a:xfrm>
-            <a:off x="731520" y="2386584"/>
+            <a:off x="731520" y="2313432"/>
             <a:ext cx="7680960" cy="676656"/>
           </a:xfrm>
           <a:prstGeom prst="rect">
@@ -9682,7 +10129,9 @@
           <a:ln/>
         </p:spPr>
         <p:txBody>
-          <a:bodyPr wrap="square" lIns="0" tIns="0" rIns="0" bIns="0" rtlCol="0" anchor="t"/>
+          <a:bodyPr wrap="square" lIns="0" tIns="0" rIns="0" bIns="0" rtlCol="0" anchor="t">
+            <a:normAutofit/>
+          </a:bodyPr>
           <a:lstStyle/>
           <a:p>
             <a:pPr marL="342900" indent="-342900">
@@ -9960,7 +10409,9 @@
           <a:ln/>
         </p:spPr>
         <p:txBody>
-          <a:bodyPr wrap="square" lIns="0" tIns="0" rIns="0" bIns="0" rtlCol="0" anchor="t"/>
+          <a:bodyPr wrap="square" lIns="0" tIns="0" rIns="0" bIns="0" rtlCol="0" anchor="t">
+            <a:normAutofit/>
+          </a:bodyPr>
           <a:lstStyle/>
           <a:p>
             <a:pPr marL="342900" indent="-342900">
@@ -10088,7 +10539,9 @@
           <a:ln/>
         </p:spPr>
         <p:txBody>
-          <a:bodyPr wrap="square" lIns="0" tIns="0" rIns="0" bIns="0" rtlCol="0" anchor="ctr"/>
+          <a:bodyPr wrap="square" lIns="0" tIns="0" rIns="0" bIns="0" rtlCol="0" anchor="ctr">
+            <a:normAutofit/>
+          </a:bodyPr>
           <a:lstStyle/>
           <a:p>
             <a:pPr indent="0" marL="0">

--- a/slides/pptx/week06.pptx
+++ b/slides/pptx/week06.pptx
@@ -25,9 +25,10 @@
     <p:sldId id="273" r:id="rId19"/>
     <p:sldId id="274" r:id="rId20"/>
     <p:sldId id="275" r:id="rId21"/>
+    <p:sldId id="276" r:id="rId22"/>
   </p:sldIdLst>
   <p:notesMasterIdLst>
-    <p:notesMasterId r:id="rId22"/>
+    <p:notesMasterId r:id="rId23"/>
   </p:notesMasterIdLst>
   <p:sldSz cx="9144000" cy="5143500"/>
   <p:notesSz cx="5143500" cy="9144000"/>
@@ -609,7 +610,7 @@
           <a:p>
             <a:r>
               <a:rPr lang="en-US" dirty="0"/>
-              <a:t>Run this interactively — give 2 minutes, then poll answers. (1) QA only. (2) add JIRA-write, narrowly (least privilege, not a full role bump). (3) Developer (write Git); discuss whether QA's staging deploy counts. ~6 min.</a:t>
+              <a:t>Quick taxonomy — general knowledge. Today's lab does NOT implement RBAC/ABAC: the actual fix is a flat ownership check (`order["owner"] != user`), no roles or permissions structure at all. Don't tell students they'll build RBAC today; they won't. Stress the three best-practice principles — especially implicit deny (default to no access). ~4 min.</a:t>
             </a:r>
             <a:endParaRPr lang="en-US" dirty="0"/>
           </a:p>
@@ -785,7 +786,7 @@
           <a:p>
             <a:r>
               <a:rPr lang="en-US" dirty="0"/>
-              <a:t>Ties W4 (SQLi auth bypass + upload→RCE) into incident response. Walk the three lines as a story: get in → plant webshell → run commands. Teach URL-decoding (%20=space). Defenders read logs; attackers leave them. ~5 min.</a:t>
+              <a:t>Run this interactively — give 2 minutes, then poll answers. (1) QA only. (2) add JIRA-write, narrowly (least privilege, not a full role bump). (3) Developer (write Git); discuss whether QA's staging deploy counts. ~6 min.</a:t>
             </a:r>
             <a:endParaRPr lang="en-US" dirty="0"/>
           </a:p>
@@ -873,7 +874,7 @@
           <a:p>
             <a:r>
               <a:rPr lang="en-US" dirty="0"/>
-              <a:t>Reference for the worksheet — these three are what's actually graded (worksheet header + Q1). CWE-321 is easy to drop since it's not the "obvious" JWT CWE, but it's the weak-secret task's specific id. ~1 min.</a:t>
+              <a:t>Ties W4 (SQLi auth bypass + upload→RCE) into incident response. Walk the three lines as a story: get in → plant webshell → run commands. Teach URL-decoding (%20=space). Defenders read logs; attackers leave them. ~5 min.</a:t>
             </a:r>
             <a:endParaRPr lang="en-US" dirty="0"/>
           </a:p>
@@ -961,7 +962,7 @@
           <a:p>
             <a:r>
               <a:rPr lang="en-US" dirty="0"/>
-              <a:t>The payoff. #1: authorize EVERY request, deny by default. "Check ownership, not just authentication" is the IDOR fix in one line. Centralize so you can't forget a check on one endpoint. ~6 min.</a:t>
+              <a:t>Reference for the worksheet — these three are what's actually graded (worksheet header + Q1). CWE-321 is easy to drop since it's not the "obvious" JWT CWE, but it's the weak-secret task's specific id. ~1 min.</a:t>
             </a:r>
             <a:endParaRPr lang="en-US" dirty="0"/>
           </a:p>
@@ -1049,7 +1050,7 @@
           <a:p>
             <a:r>
               <a:rPr lang="en-US" dirty="0"/>
-              <a:t>Practical — they'll use Repeater to tweak object ids and Intruder to enumerate. Demo: intercept, change orders/1→2, forward, see another user's data. Set scope first so you don't attack out-of-bounds. ~5 min.</a:t>
+              <a:t>The payoff. #1: authorize EVERY request, deny by default. "Check ownership, not just authentication" is the IDOR fix in one line. Centralize so you can't forget a check on one endpoint. ~6 min.</a:t>
             </a:r>
             <a:endParaRPr lang="en-US" dirty="0"/>
           </a:p>
@@ -1137,7 +1138,7 @@
           <a:p>
             <a:r>
               <a:rPr lang="en-US" dirty="0"/>
-              <a:t>Explain before lab. Treasure hunt = enumerate ids for per-student flags — it's horizontal privilege escalation (become another regular user), not vertical (become admin); /api/admin exists in the code but no graded task ever targets it, don't imply it does. Defend is read-and-cite against a pre-written fix, not student-authored RBAC — nothing here is role-based. ~3 min.</a:t>
+              <a:t>Practical — they'll use Repeater to tweak object ids and Intruder to enumerate. Demo: intercept, change orders/1→2, forward, see another user's data. Set scope first so you don't attack out-of-bounds. ~5 min.</a:t>
             </a:r>
             <a:endParaRPr lang="en-US" dirty="0"/>
           </a:p>
@@ -1225,7 +1226,7 @@
           <a:p>
             <a:r>
               <a:rPr lang="en-US" dirty="0"/>
-              <a:t>Logistics. Steps 3-4 (verify the defense + cite the fix) graded — no student-authored fix code in this lab, the fix is handed to them already written. Q6 of the quiz asks for the object id they used + the fix + their personal flag. Also the NoteVault project access-control task.</a:t>
+              <a:t>Explain before lab. Treasure hunt = enumerate ids for per-student flags — it's horizontal privilege escalation (become another regular user), not vertical (become admin); /api/admin exists in the code but no graded task ever targets it, don't imply it does. Defend is read-and-cite against a pre-written fix, not student-authored RBAC — nothing here is role-based. ~3 min.</a:t>
             </a:r>
             <a:endParaRPr lang="en-US" dirty="0"/>
           </a:p>
@@ -1313,7 +1314,7 @@
           <a:p>
             <a:r>
               <a:rPr lang="en-US" dirty="0"/>
-              <a:t>Before/after + proof — "citation," not "you wrote a fix": the correct app is provided pre-written. AI-resilient tasks count.</a:t>
+              <a:t>Logistics. Steps 3-4 (verify the defense + cite the fix) graded — no student-authored fix code in this lab, the fix is handed to them already written. Q6 of the quiz asks for the object id they used + the fix + their personal flag. Also the NoteVault project access-control task.</a:t>
             </a:r>
             <a:endParaRPr lang="en-US" dirty="0"/>
           </a:p>
@@ -1401,7 +1402,7 @@
           <a:p>
             <a:r>
               <a:rPr lang="en-US" dirty="0"/>
-              <a:t>Recap. Cold-call: "we authenticated the user — why can they still read another user's order?" (no ownership/authz check). ~2 min.</a:t>
+              <a:t>Before/after + proof — "citation," not "you wrote a fix": the correct app is provided pre-written. AI-resilient tasks count.</a:t>
             </a:r>
             <a:endParaRPr lang="en-US" dirty="0"/>
           </a:p>
@@ -1577,7 +1578,7 @@
           <a:p>
             <a:r>
               <a:rPr lang="en-US" dirty="0"/>
-              <a:t>Wrap the teaching block: "Next week we consolidate W1-6 — Jeopardy + a mock CTF in the exact midterm format. Bring your cheat-sheet of CWEs." Remind cumulative review quiz in W7.</a:t>
+              <a:t>Recap. Cold-call: "we authenticated the user — why can they still read another user's order?" (no ownership/authz check). ~2 min.</a:t>
             </a:r>
             <a:endParaRPr lang="en-US" dirty="0"/>
           </a:p>
@@ -1601,6 +1602,94 @@
             <a:fld id="{F7021451-1387-4CA6-816F-3879F97B5CBC}" type="slidenum">
               <a:rPr lang="en-US"/>
               <a:t>20</a:t>
+            </a:fld>
+            <a:endParaRPr lang="en-US"/>
+          </a:p>
+        </p:txBody>
+      </p:sp>
+    </p:spTree>
+    <p:extLst>
+      <p:ext uri="{BB962C8B-B14F-4D97-AF65-F5344CB8AC3E}">
+        <p14:creationId xmlns:p14="http://schemas.microsoft.com/office/powerpoint/2010/main" val="1024086991"/>
+      </p:ext>
+    </p:extLst>
+  </p:cSld>
+  <p:clrMapOvr>
+    <a:masterClrMapping/>
+  </p:clrMapOvr>
+</p:notes>
+</file>
+
+<file path=ppt/notesSlides/notesSlide21.xml><?xml version="1.0" encoding="utf-8"?>
+<p:notes xmlns:a="http://schemas.openxmlformats.org/drawingml/2006/main" xmlns:r="http://schemas.openxmlformats.org/officeDocument/2006/relationships" xmlns:p="http://schemas.openxmlformats.org/presentationml/2006/main">
+  <p:cSld>
+    <p:spTree>
+      <p:nvGrpSpPr>
+        <p:cNvPr id="1" name=""/>
+        <p:cNvGrpSpPr/>
+        <p:nvPr/>
+      </p:nvGrpSpPr>
+      <p:grpSpPr>
+        <a:xfrm>
+          <a:off x="0" y="0"/>
+          <a:ext cx="0" cy="0"/>
+          <a:chOff x="0" y="0"/>
+          <a:chExt cx="0" cy="0"/>
+        </a:xfrm>
+      </p:grpSpPr>
+      <p:sp>
+        <p:nvSpPr>
+          <p:cNvPr id="2" name="Slide Image Placeholder 1"/>
+          <p:cNvSpPr>
+            <a:spLocks noGrp="1" noRot="1" noChangeAspect="1"/>
+          </p:cNvSpPr>
+          <p:nvPr>
+            <p:ph type="sldImg"/>
+          </p:nvPr>
+        </p:nvSpPr>
+        <p:spPr/>
+      </p:sp>
+      <p:sp>
+        <p:nvSpPr>
+          <p:cNvPr id="3" name="Notes Placeholder 2"/>
+          <p:cNvSpPr>
+            <a:spLocks noGrp="1"/>
+          </p:cNvSpPr>
+          <p:nvPr>
+            <p:ph type="body" idx="1"/>
+          </p:nvPr>
+        </p:nvSpPr>
+        <p:spPr/>
+        <p:txBody>
+          <a:bodyPr/>
+          <a:lstStyle/>
+          <a:p>
+            <a:r>
+              <a:rPr lang="en-US" dirty="0"/>
+              <a:t>Wrap the teaching block: "Next week we consolidate W1-6 — Jeopardy + a mock CTF in the exact midterm format. Bring your cheat-sheet of CWEs." Remind cumulative review quiz in W7.</a:t>
+            </a:r>
+            <a:endParaRPr lang="en-US" dirty="0"/>
+          </a:p>
+        </p:txBody>
+      </p:sp>
+      <p:sp>
+        <p:nvSpPr>
+          <p:cNvPr id="4" name="Slide Number Placeholder 3"/>
+          <p:cNvSpPr>
+            <a:spLocks noGrp="1"/>
+          </p:cNvSpPr>
+          <p:nvPr>
+            <p:ph type="sldNum" sz="quarter" idx="10"/>
+          </p:nvPr>
+        </p:nvSpPr>
+        <p:spPr/>
+        <p:txBody>
+          <a:bodyPr/>
+          <a:lstStyle/>
+          <a:p>
+            <a:fld id="{F7021451-1387-4CA6-816F-3879F97B5CBC}" type="slidenum">
+              <a:rPr lang="en-US"/>
+              <a:t>21</a:t>
             </a:fld>
             <a:endParaRPr lang="en-US"/>
           </a:p>
@@ -1929,7 +2018,7 @@
           <a:p>
             <a:r>
               <a:rPr lang="en-US" dirty="0"/>
-              <a:t>Decode a JWT live (jwt.io) to show the payload is just base64 — NOT encrypted. The `alg:none` attack is the JWT Forgery game: server trusts the header's claimed algorithm. Emphasize: never put secrets in the payload. ~7 min.</a:t>
+              <a:t>The sim IS the "decode a JWT live" demo — edit the payload, watch base64url decode instantly (not encrypted), then flip alg to none and watch a server that trusts the header accept it. Emphasize: never put secrets in the payload. This is the JWT Forgery game, live. ~7 min.</a:t>
             </a:r>
             <a:endParaRPr lang="en-US" dirty="0"/>
           </a:p>
@@ -2193,7 +2282,7 @@
           <a:p>
             <a:r>
               <a:rPr lang="en-US" dirty="0"/>
-              <a:t>Quick taxonomy — general knowledge. Today's lab does NOT implement RBAC/ABAC: the actual fix is a flat ownership check (`order["owner"] != user`), no roles or permissions structure at all. Don't tell students they'll build RBAC today; they won't. Stress the three best-practice principles — especially implicit deny (default to no access). ~4 min.</a:t>
+              <a:t>The thesis of the whole week, made concrete: JWT pitfalls broke Gate 1, IDOR broke Gate 2, and they're independent failures — fixing one doesn't fix the other. This is why "Defenses" lists both "verify JWT" and "check ownership" as separate bullets, not one fix. ~4 min.</a:t>
             </a:r>
             <a:endParaRPr lang="en-US" dirty="0"/>
           </a:p>
@@ -2826,6 +2915,391 @@
                 <a:ea typeface="Arial" pitchFamily="34" charset="-122"/>
                 <a:cs typeface="Arial" pitchFamily="34" charset="-120"/>
               </a:rPr>
+              <a:t>Access control models</a:t>
+            </a:r>
+            <a:endParaRPr lang="en-US" sz="2600" dirty="0"/>
+          </a:p>
+        </p:txBody>
+      </p:sp>
+      <p:sp>
+        <p:nvSpPr>
+          <p:cNvPr id="5" name="Shape 2"/>
+          <p:cNvSpPr/>
+          <p:nvPr/>
+        </p:nvSpPr>
+        <p:spPr>
+          <a:xfrm>
+            <a:off x="457200" y="1325880"/>
+            <a:ext cx="8229600" cy="1517904"/>
+          </a:xfrm>
+          <a:prstGeom prst="roundRect">
+            <a:avLst>
+              <a:gd name="adj" fmla="val 4819"/>
+            </a:avLst>
+          </a:prstGeom>
+          <a:solidFill>
+            <a:srgbClr val="F1F5F9"/>
+          </a:solidFill>
+          <a:ln/>
+          <a:effectLst>
+            <a:outerShdw sx="100000" sy="100000" kx="0" ky="0" algn="bl" rotWithShape="0" blurRad="76200" dist="25400" dir="5400000">
+              <a:srgbClr val="000000">
+                <a:alpha val="12000"/>
+              </a:srgbClr>
+            </a:outerShdw>
+          </a:effectLst>
+        </p:spPr>
+      </p:sp>
+      <p:sp>
+        <p:nvSpPr>
+          <p:cNvPr id="6" name="Text 3"/>
+          <p:cNvSpPr/>
+          <p:nvPr/>
+        </p:nvSpPr>
+        <p:spPr>
+          <a:xfrm>
+            <a:off x="731520" y="1435608"/>
+            <a:ext cx="7680960" cy="1298448"/>
+          </a:xfrm>
+          <a:prstGeom prst="rect">
+            <a:avLst/>
+          </a:prstGeom>
+          <a:noFill/>
+          <a:ln/>
+        </p:spPr>
+        <p:txBody>
+          <a:bodyPr wrap="square" lIns="0" tIns="0" rIns="0" bIns="0" rtlCol="0" anchor="t">
+            <a:normAutofit/>
+          </a:bodyPr>
+          <a:lstStyle/>
+          <a:p>
+            <a:pPr marL="342900" indent="-342900">
+              <a:spcAft>
+                <a:spcPts val="600"/>
+              </a:spcAft>
+              <a:buSzPct val="100000"/>
+              <a:buChar char="•"/>
+            </a:pPr>
+            <a:r>
+              <a:rPr lang="en-US" sz="1400" dirty="0">
+                <a:solidFill>
+                  <a:srgbClr val="1F2937"/>
+                </a:solidFill>
+                <a:latin typeface="Calibri" pitchFamily="34" charset="0"/>
+                <a:ea typeface="Calibri" pitchFamily="34" charset="-122"/>
+                <a:cs typeface="Calibri" pitchFamily="34" charset="-120"/>
+              </a:rPr>
+              <a:t>MAC — Mandatory: system-enforced labels (military)</a:t>
+            </a:r>
+            <a:endParaRPr lang="en-US" sz="1400" dirty="0"/>
+          </a:p>
+          <a:p>
+            <a:pPr marL="342900" indent="-342900">
+              <a:spcAft>
+                <a:spcPts val="600"/>
+              </a:spcAft>
+              <a:buSzPct val="100000"/>
+              <a:buChar char="•"/>
+            </a:pPr>
+            <a:r>
+              <a:rPr lang="en-US" sz="1400" dirty="0">
+                <a:solidFill>
+                  <a:srgbClr val="1F2937"/>
+                </a:solidFill>
+                <a:latin typeface="Calibri" pitchFamily="34" charset="0"/>
+                <a:ea typeface="Calibri" pitchFamily="34" charset="-122"/>
+                <a:cs typeface="Calibri" pitchFamily="34" charset="-120"/>
+              </a:rPr>
+              <a:t>DAC — Discretionary: owner grants access (file perms)</a:t>
+            </a:r>
+            <a:endParaRPr lang="en-US" sz="1400" dirty="0"/>
+          </a:p>
+          <a:p>
+            <a:pPr marL="342900" indent="-342900">
+              <a:spcAft>
+                <a:spcPts val="600"/>
+              </a:spcAft>
+              <a:buSzPct val="100000"/>
+              <a:buChar char="•"/>
+            </a:pPr>
+            <a:r>
+              <a:rPr lang="en-US" sz="1400" dirty="0">
+                <a:solidFill>
+                  <a:srgbClr val="1F2937"/>
+                </a:solidFill>
+                <a:latin typeface="Calibri" pitchFamily="34" charset="0"/>
+                <a:ea typeface="Calibri" pitchFamily="34" charset="-122"/>
+                <a:cs typeface="Calibri" pitchFamily="34" charset="-120"/>
+              </a:rPr>
+              <a:t>RBAC — Role-Based: permissions via roles</a:t>
+            </a:r>
+            <a:endParaRPr lang="en-US" sz="1400" dirty="0"/>
+          </a:p>
+          <a:p>
+            <a:pPr marL="342900" indent="-342900">
+              <a:spcAft>
+                <a:spcPts val="600"/>
+              </a:spcAft>
+              <a:buSzPct val="100000"/>
+              <a:buChar char="•"/>
+            </a:pPr>
+            <a:r>
+              <a:rPr lang="en-US" sz="1400" dirty="0">
+                <a:solidFill>
+                  <a:srgbClr val="1F2937"/>
+                </a:solidFill>
+                <a:latin typeface="Calibri" pitchFamily="34" charset="0"/>
+                <a:ea typeface="Calibri" pitchFamily="34" charset="-122"/>
+                <a:cs typeface="Calibri" pitchFamily="34" charset="-120"/>
+              </a:rPr>
+              <a:t>RuBAC — Rule-Based: conditions (time of day, IP)</a:t>
+            </a:r>
+            <a:endParaRPr lang="en-US" sz="1400" dirty="0"/>
+          </a:p>
+        </p:txBody>
+      </p:sp>
+      <p:sp>
+        <p:nvSpPr>
+          <p:cNvPr id="7" name="Shape 4"/>
+          <p:cNvSpPr/>
+          <p:nvPr/>
+        </p:nvSpPr>
+        <p:spPr>
+          <a:xfrm>
+            <a:off x="457200" y="3008376"/>
+            <a:ext cx="8229600" cy="822960"/>
+          </a:xfrm>
+          <a:prstGeom prst="roundRect">
+            <a:avLst>
+              <a:gd name="adj" fmla="val 8889"/>
+            </a:avLst>
+          </a:prstGeom>
+          <a:solidFill>
+            <a:srgbClr val="E8EDF3"/>
+          </a:solidFill>
+          <a:ln/>
+        </p:spPr>
+      </p:sp>
+      <p:sp>
+        <p:nvSpPr>
+          <p:cNvPr id="8" name="Text 5"/>
+          <p:cNvSpPr/>
+          <p:nvPr/>
+        </p:nvSpPr>
+        <p:spPr>
+          <a:xfrm>
+            <a:off x="731520" y="3008376"/>
+            <a:ext cx="7680960" cy="822960"/>
+          </a:xfrm>
+          <a:prstGeom prst="rect">
+            <a:avLst/>
+          </a:prstGeom>
+          <a:noFill/>
+          <a:ln/>
+        </p:spPr>
+        <p:txBody>
+          <a:bodyPr wrap="square" lIns="0" tIns="0" rIns="0" bIns="0" rtlCol="0" anchor="ctr">
+            <a:normAutofit/>
+          </a:bodyPr>
+          <a:lstStyle/>
+          <a:p>
+            <a:pPr indent="0" marL="0">
+              <a:buNone/>
+            </a:pPr>
+            <a:r>
+              <a:rPr lang="en-US" sz="1400" i="1" dirty="0">
+                <a:solidFill>
+                  <a:srgbClr val="E35205"/>
+                </a:solidFill>
+                <a:latin typeface="Calibri" pitchFamily="34" charset="0"/>
+                <a:ea typeface="Calibri" pitchFamily="34" charset="-122"/>
+                <a:cs typeface="Calibri" pitchFamily="34" charset="-120"/>
+              </a:rPr>
+              <a:t>Best practices: separation of duties · least privilege · implicit deny</a:t>
+            </a:r>
+            <a:endParaRPr lang="en-US" sz="1400" dirty="0"/>
+          </a:p>
+        </p:txBody>
+      </p:sp>
+      <p:sp>
+        <p:nvSpPr>
+          <p:cNvPr id="9" name="Text 6"/>
+          <p:cNvSpPr/>
+          <p:nvPr/>
+        </p:nvSpPr>
+        <p:spPr>
+          <a:xfrm>
+            <a:off x="457200" y="4800600"/>
+            <a:ext cx="6949440" cy="274320"/>
+          </a:xfrm>
+          <a:prstGeom prst="rect">
+            <a:avLst/>
+          </a:prstGeom>
+          <a:noFill/>
+          <a:ln/>
+        </p:spPr>
+        <p:txBody>
+          <a:bodyPr wrap="square" lIns="0" tIns="0" rIns="0" bIns="0" rtlCol="0" anchor="ctr"/>
+          <a:lstStyle/>
+          <a:p>
+            <a:pPr indent="0" marL="0">
+              <a:buNone/>
+            </a:pPr>
+            <a:r>
+              <a:rPr lang="en-US" sz="900" dirty="0">
+                <a:solidFill>
+                  <a:srgbClr val="64748B"/>
+                </a:solidFill>
+                <a:latin typeface="Calibri" pitchFamily="34" charset="0"/>
+                <a:ea typeface="Calibri" pitchFamily="34" charset="-122"/>
+                <a:cs typeface="Calibri" pitchFamily="34" charset="-120"/>
+              </a:rPr>
+              <a:t>Software Security · Week 6</a:t>
+            </a:r>
+            <a:endParaRPr lang="en-US" sz="900" dirty="0"/>
+          </a:p>
+        </p:txBody>
+      </p:sp>
+      <p:pic>
+        <p:nvPicPr>
+          <p:cNvPr id="10" name="Image 1" descr="/Users/pop7/Library/CloudStorage/OneDrive-MonsterConnectCo.,Ltd/Lecture/KOSEN69 - software-security/slides/pptx/assets/logo-small.png">    </p:cNvPr>
+          <p:cNvPicPr>
+            <a:picLocks noChangeAspect="1"/>
+          </p:cNvPicPr>
+          <p:nvPr/>
+        </p:nvPicPr>
+        <p:blipFill>
+          <a:blip r:embed="rId2"/>
+          <a:stretch>
+            <a:fillRect/>
+          </a:stretch>
+        </p:blipFill>
+        <p:spPr>
+          <a:xfrm>
+            <a:off x="7882128" y="4700016"/>
+            <a:ext cx="768096" cy="356616"/>
+          </a:xfrm>
+          <a:prstGeom prst="rect">
+            <a:avLst/>
+          </a:prstGeom>
+        </p:spPr>
+      </p:pic>
+    </p:spTree>
+  </p:cSld>
+  <p:clrMapOvr>
+    <a:masterClrMapping/>
+  </p:clrMapOvr>
+</p:sld>
+</file>
+
+<file path=ppt/slides/slide11.xml><?xml version="1.0" encoding="utf-8"?>
+<p:sld xmlns:a="http://schemas.openxmlformats.org/drawingml/2006/main" xmlns:r="http://schemas.openxmlformats.org/officeDocument/2006/relationships" xmlns:p="http://schemas.openxmlformats.org/presentationml/2006/main">
+  <p:cSld name="Slide 11">
+    <p:bg>
+      <p:bgPr>
+        <a:solidFill>
+          <a:srgbClr val="FFFFFF"/>
+        </a:solidFill>
+      </p:bgPr>
+    </p:bg>
+    <p:spTree>
+      <p:nvGrpSpPr>
+        <p:cNvPr id="1" name=""/>
+        <p:cNvGrpSpPr/>
+        <p:nvPr/>
+      </p:nvGrpSpPr>
+      <p:grpSpPr>
+        <a:xfrm>
+          <a:off x="0" y="0"/>
+          <a:ext cx="0" cy="0"/>
+          <a:chOff x="0" y="0"/>
+          <a:chExt cx="0" cy="0"/>
+        </a:xfrm>
+      </p:grpSpPr>
+      <p:sp>
+        <p:nvSpPr>
+          <p:cNvPr id="2" name="Shape 0"/>
+          <p:cNvSpPr/>
+          <p:nvPr/>
+        </p:nvSpPr>
+        <p:spPr>
+          <a:xfrm>
+            <a:off x="457200" y="384048"/>
+            <a:ext cx="530352" cy="530352"/>
+          </a:xfrm>
+          <a:prstGeom prst="ellipse">
+            <a:avLst/>
+          </a:prstGeom>
+          <a:solidFill>
+            <a:srgbClr val="E35205"/>
+          </a:solidFill>
+          <a:ln/>
+          <a:effectLst>
+            <a:outerShdw sx="100000" sy="100000" kx="0" ky="0" algn="bl" rotWithShape="0" blurRad="76200" dist="25400" dir="5400000">
+              <a:srgbClr val="000000">
+                <a:alpha val="12000"/>
+              </a:srgbClr>
+            </a:outerShdw>
+          </a:effectLst>
+        </p:spPr>
+      </p:sp>
+      <p:pic>
+        <p:nvPicPr>
+          <p:cNvPr id="3" name="Image 0" descr="preencoded.png">    </p:cNvPr>
+          <p:cNvPicPr>
+            <a:picLocks noChangeAspect="1"/>
+          </p:cNvPicPr>
+          <p:nvPr/>
+        </p:nvPicPr>
+        <p:blipFill>
+          <a:blip r:embed="rId1"/>
+          <a:stretch>
+            <a:fillRect/>
+          </a:stretch>
+        </p:blipFill>
+        <p:spPr>
+          <a:xfrm>
+            <a:off x="594360" y="521208"/>
+            <a:ext cx="256032" cy="256032"/>
+          </a:xfrm>
+          <a:prstGeom prst="rect">
+            <a:avLst/>
+          </a:prstGeom>
+        </p:spPr>
+      </p:pic>
+      <p:sp>
+        <p:nvSpPr>
+          <p:cNvPr id="4" name="Text 1"/>
+          <p:cNvSpPr/>
+          <p:nvPr/>
+        </p:nvSpPr>
+        <p:spPr>
+          <a:xfrm>
+            <a:off x="1143000" y="329184"/>
+            <a:ext cx="7498080" cy="603504"/>
+          </a:xfrm>
+          <a:prstGeom prst="rect">
+            <a:avLst/>
+          </a:prstGeom>
+          <a:noFill/>
+          <a:ln/>
+        </p:spPr>
+        <p:txBody>
+          <a:bodyPr wrap="square" lIns="0" tIns="0" rIns="0" bIns="0" rtlCol="0" anchor="ctr"/>
+          <a:lstStyle/>
+          <a:p>
+            <a:pPr indent="0" marL="0">
+              <a:buNone/>
+            </a:pPr>
+            <a:r>
+              <a:rPr lang="en-US" sz="2600" b="1" dirty="0">
+                <a:solidFill>
+                  <a:srgbClr val="1F2937"/>
+                </a:solidFill>
+                <a:latin typeface="Arial" pitchFamily="34" charset="0"/>
+                <a:ea typeface="Arial" pitchFamily="34" charset="-122"/>
+                <a:cs typeface="Arial" pitchFamily="34" charset="-120"/>
+              </a:rPr>
               <a:t>Exercise — RBAC</a:t>
             </a:r>
             <a:endParaRPr lang="en-US" sz="2600" dirty="0"/>
@@ -2834,7 +3308,7 @@
       </p:sp>
       <p:graphicFrame>
         <p:nvGraphicFramePr>
-          <p:cNvPr id="11" name="Table 0"/>
+          <p:cNvPr id="12" name="Table 0"/>
           <p:cNvGraphicFramePr>
             <a:graphicFrameLocks noGrp="1"/>
           </p:cNvGraphicFramePr>
@@ -3653,391 +4127,6 @@
 </p:sld>
 </file>
 
-<file path=ppt/slides/slide11.xml><?xml version="1.0" encoding="utf-8"?>
-<p:sld xmlns:a="http://schemas.openxmlformats.org/drawingml/2006/main" xmlns:r="http://schemas.openxmlformats.org/officeDocument/2006/relationships" xmlns:p="http://schemas.openxmlformats.org/presentationml/2006/main">
-  <p:cSld name="Slide 11">
-    <p:bg>
-      <p:bgPr>
-        <a:solidFill>
-          <a:srgbClr val="FFFFFF"/>
-        </a:solidFill>
-      </p:bgPr>
-    </p:bg>
-    <p:spTree>
-      <p:nvGrpSpPr>
-        <p:cNvPr id="1" name=""/>
-        <p:cNvGrpSpPr/>
-        <p:nvPr/>
-      </p:nvGrpSpPr>
-      <p:grpSpPr>
-        <a:xfrm>
-          <a:off x="0" y="0"/>
-          <a:ext cx="0" cy="0"/>
-          <a:chOff x="0" y="0"/>
-          <a:chExt cx="0" cy="0"/>
-        </a:xfrm>
-      </p:grpSpPr>
-      <p:sp>
-        <p:nvSpPr>
-          <p:cNvPr id="2" name="Shape 0"/>
-          <p:cNvSpPr/>
-          <p:nvPr/>
-        </p:nvSpPr>
-        <p:spPr>
-          <a:xfrm>
-            <a:off x="457200" y="384048"/>
-            <a:ext cx="530352" cy="530352"/>
-          </a:xfrm>
-          <a:prstGeom prst="ellipse">
-            <a:avLst/>
-          </a:prstGeom>
-          <a:solidFill>
-            <a:srgbClr val="E35205"/>
-          </a:solidFill>
-          <a:ln/>
-          <a:effectLst>
-            <a:outerShdw sx="100000" sy="100000" kx="0" ky="0" algn="bl" rotWithShape="0" blurRad="76200" dist="25400" dir="5400000">
-              <a:srgbClr val="000000">
-                <a:alpha val="12000"/>
-              </a:srgbClr>
-            </a:outerShdw>
-          </a:effectLst>
-        </p:spPr>
-      </p:sp>
-      <p:pic>
-        <p:nvPicPr>
-          <p:cNvPr id="3" name="Image 0" descr="preencoded.png">    </p:cNvPr>
-          <p:cNvPicPr>
-            <a:picLocks noChangeAspect="1"/>
-          </p:cNvPicPr>
-          <p:nvPr/>
-        </p:nvPicPr>
-        <p:blipFill>
-          <a:blip r:embed="rId1"/>
-          <a:stretch>
-            <a:fillRect/>
-          </a:stretch>
-        </p:blipFill>
-        <p:spPr>
-          <a:xfrm>
-            <a:off x="594360" y="521208"/>
-            <a:ext cx="256032" cy="256032"/>
-          </a:xfrm>
-          <a:prstGeom prst="rect">
-            <a:avLst/>
-          </a:prstGeom>
-        </p:spPr>
-      </p:pic>
-      <p:sp>
-        <p:nvSpPr>
-          <p:cNvPr id="4" name="Text 1"/>
-          <p:cNvSpPr/>
-          <p:nvPr/>
-        </p:nvSpPr>
-        <p:spPr>
-          <a:xfrm>
-            <a:off x="1143000" y="329184"/>
-            <a:ext cx="7498080" cy="603504"/>
-          </a:xfrm>
-          <a:prstGeom prst="rect">
-            <a:avLst/>
-          </a:prstGeom>
-          <a:noFill/>
-          <a:ln/>
-        </p:spPr>
-        <p:txBody>
-          <a:bodyPr wrap="square" lIns="0" tIns="0" rIns="0" bIns="0" rtlCol="0" anchor="ctr"/>
-          <a:lstStyle/>
-          <a:p>
-            <a:pPr indent="0" marL="0">
-              <a:buNone/>
-            </a:pPr>
-            <a:r>
-              <a:rPr lang="en-US" sz="2600" b="1" dirty="0">
-                <a:solidFill>
-                  <a:srgbClr val="1F2937"/>
-                </a:solidFill>
-                <a:latin typeface="Arial" pitchFamily="34" charset="0"/>
-                <a:ea typeface="Arial" pitchFamily="34" charset="-122"/>
-                <a:cs typeface="Arial" pitchFamily="34" charset="-120"/>
-              </a:rPr>
-              <a:t>Exercise — RBAC (cont.)</a:t>
-            </a:r>
-            <a:endParaRPr lang="en-US" sz="2600" dirty="0"/>
-          </a:p>
-        </p:txBody>
-      </p:sp>
-      <p:sp>
-        <p:nvSpPr>
-          <p:cNvPr id="5" name="Shape 2"/>
-          <p:cNvSpPr/>
-          <p:nvPr/>
-        </p:nvSpPr>
-        <p:spPr>
-          <a:xfrm>
-            <a:off x="502920" y="1325880"/>
-            <a:ext cx="384048" cy="384048"/>
-          </a:xfrm>
-          <a:prstGeom prst="ellipse">
-            <a:avLst/>
-          </a:prstGeom>
-          <a:solidFill>
-            <a:srgbClr val="E35205"/>
-          </a:solidFill>
-          <a:ln/>
-        </p:spPr>
-      </p:sp>
-      <p:sp>
-        <p:nvSpPr>
-          <p:cNvPr id="6" name="Text 3"/>
-          <p:cNvSpPr/>
-          <p:nvPr/>
-        </p:nvSpPr>
-        <p:spPr>
-          <a:xfrm>
-            <a:off x="502920" y="1325880"/>
-            <a:ext cx="384048" cy="384048"/>
-          </a:xfrm>
-          <a:prstGeom prst="rect">
-            <a:avLst/>
-          </a:prstGeom>
-          <a:noFill/>
-          <a:ln/>
-        </p:spPr>
-        <p:txBody>
-          <a:bodyPr wrap="square" lIns="0" tIns="0" rIns="0" bIns="0" rtlCol="0" anchor="ctr"/>
-          <a:lstStyle/>
-          <a:p>
-            <a:pPr algn="ctr" indent="0" marL="0">
-              <a:buNone/>
-            </a:pPr>
-            <a:r>
-              <a:rPr lang="en-US" sz="1500" b="1" dirty="0">
-                <a:solidFill>
-                  <a:srgbClr val="0E1726"/>
-                </a:solidFill>
-                <a:latin typeface="Arial" pitchFamily="34" charset="0"/>
-                <a:ea typeface="Arial" pitchFamily="34" charset="-122"/>
-                <a:cs typeface="Arial" pitchFamily="34" charset="-120"/>
-              </a:rPr>
-              <a:t>2</a:t>
-            </a:r>
-            <a:endParaRPr lang="en-US" sz="1500" dirty="0"/>
-          </a:p>
-        </p:txBody>
-      </p:sp>
-      <p:sp>
-        <p:nvSpPr>
-          <p:cNvPr id="7" name="Text 4"/>
-          <p:cNvSpPr/>
-          <p:nvPr/>
-        </p:nvSpPr>
-        <p:spPr>
-          <a:xfrm>
-            <a:off x="1051560" y="1325880"/>
-            <a:ext cx="7589520" cy="402336"/>
-          </a:xfrm>
-          <a:prstGeom prst="rect">
-            <a:avLst/>
-          </a:prstGeom>
-          <a:noFill/>
-          <a:ln/>
-        </p:spPr>
-        <p:txBody>
-          <a:bodyPr wrap="square" lIns="0" tIns="0" rIns="0" bIns="0" rtlCol="0" anchor="ctr">
-            <a:normAutofit/>
-          </a:bodyPr>
-          <a:lstStyle/>
-          <a:p>
-            <a:pPr indent="0" marL="0">
-              <a:buNone/>
-            </a:pPr>
-            <a:r>
-              <a:rPr lang="en-US" sz="1350" dirty="0">
-                <a:solidFill>
-                  <a:srgbClr val="1F2937"/>
-                </a:solidFill>
-                <a:latin typeface="Calibri" pitchFamily="34" charset="0"/>
-                <a:ea typeface="Calibri" pitchFamily="34" charset="-122"/>
-                <a:cs typeface="Calibri" pitchFamily="34" charset="-120"/>
-              </a:rPr>
-              <a:t>An intern must create bug entries — which role's perms to add?</a:t>
-            </a:r>
-            <a:endParaRPr lang="en-US" sz="1350" dirty="0"/>
-          </a:p>
-        </p:txBody>
-      </p:sp>
-      <p:sp>
-        <p:nvSpPr>
-          <p:cNvPr id="8" name="Shape 5"/>
-          <p:cNvSpPr/>
-          <p:nvPr/>
-        </p:nvSpPr>
-        <p:spPr>
-          <a:xfrm>
-            <a:off x="502920" y="1801368"/>
-            <a:ext cx="384048" cy="384048"/>
-          </a:xfrm>
-          <a:prstGeom prst="ellipse">
-            <a:avLst/>
-          </a:prstGeom>
-          <a:solidFill>
-            <a:srgbClr val="E35205"/>
-          </a:solidFill>
-          <a:ln/>
-        </p:spPr>
-      </p:sp>
-      <p:sp>
-        <p:nvSpPr>
-          <p:cNvPr id="9" name="Text 6"/>
-          <p:cNvSpPr/>
-          <p:nvPr/>
-        </p:nvSpPr>
-        <p:spPr>
-          <a:xfrm>
-            <a:off x="502920" y="1801368"/>
-            <a:ext cx="384048" cy="384048"/>
-          </a:xfrm>
-          <a:prstGeom prst="rect">
-            <a:avLst/>
-          </a:prstGeom>
-          <a:noFill/>
-          <a:ln/>
-        </p:spPr>
-        <p:txBody>
-          <a:bodyPr wrap="square" lIns="0" tIns="0" rIns="0" bIns="0" rtlCol="0" anchor="ctr"/>
-          <a:lstStyle/>
-          <a:p>
-            <a:pPr algn="ctr" indent="0" marL="0">
-              <a:buNone/>
-            </a:pPr>
-            <a:r>
-              <a:rPr lang="en-US" sz="1500" b="1" dirty="0">
-                <a:solidFill>
-                  <a:srgbClr val="0E1726"/>
-                </a:solidFill>
-                <a:latin typeface="Arial" pitchFamily="34" charset="0"/>
-                <a:ea typeface="Arial" pitchFamily="34" charset="-122"/>
-                <a:cs typeface="Arial" pitchFamily="34" charset="-120"/>
-              </a:rPr>
-              <a:t>3</a:t>
-            </a:r>
-            <a:endParaRPr lang="en-US" sz="1500" dirty="0"/>
-          </a:p>
-        </p:txBody>
-      </p:sp>
-      <p:sp>
-        <p:nvSpPr>
-          <p:cNvPr id="10" name="Text 7"/>
-          <p:cNvSpPr/>
-          <p:nvPr/>
-        </p:nvSpPr>
-        <p:spPr>
-          <a:xfrm>
-            <a:off x="1051560" y="1801368"/>
-            <a:ext cx="7589520" cy="402336"/>
-          </a:xfrm>
-          <a:prstGeom prst="rect">
-            <a:avLst/>
-          </a:prstGeom>
-          <a:noFill/>
-          <a:ln/>
-        </p:spPr>
-        <p:txBody>
-          <a:bodyPr wrap="square" lIns="0" tIns="0" rIns="0" bIns="0" rtlCol="0" anchor="ctr">
-            <a:normAutofit/>
-          </a:bodyPr>
-          <a:lstStyle/>
-          <a:p>
-            <a:pPr indent="0" marL="0">
-              <a:buNone/>
-            </a:pPr>
-            <a:r>
-              <a:rPr lang="en-US" sz="1350" dirty="0">
-                <a:solidFill>
-                  <a:srgbClr val="1F2937"/>
-                </a:solidFill>
-                <a:latin typeface="Calibri" pitchFamily="34" charset="0"/>
-                <a:ea typeface="Calibri" pitchFamily="34" charset="-122"/>
-                <a:cs typeface="Calibri" pitchFamily="34" charset="-120"/>
-              </a:rPr>
-              <a:t>List all roles that can modify the codebase.</a:t>
-            </a:r>
-            <a:endParaRPr lang="en-US" sz="1350" dirty="0"/>
-          </a:p>
-        </p:txBody>
-      </p:sp>
-      <p:sp>
-        <p:nvSpPr>
-          <p:cNvPr id="11" name="Text 8"/>
-          <p:cNvSpPr/>
-          <p:nvPr/>
-        </p:nvSpPr>
-        <p:spPr>
-          <a:xfrm>
-            <a:off x="457200" y="4800600"/>
-            <a:ext cx="6949440" cy="274320"/>
-          </a:xfrm>
-          <a:prstGeom prst="rect">
-            <a:avLst/>
-          </a:prstGeom>
-          <a:noFill/>
-          <a:ln/>
-        </p:spPr>
-        <p:txBody>
-          <a:bodyPr wrap="square" lIns="0" tIns="0" rIns="0" bIns="0" rtlCol="0" anchor="ctr"/>
-          <a:lstStyle/>
-          <a:p>
-            <a:pPr indent="0" marL="0">
-              <a:buNone/>
-            </a:pPr>
-            <a:r>
-              <a:rPr lang="en-US" sz="900" dirty="0">
-                <a:solidFill>
-                  <a:srgbClr val="64748B"/>
-                </a:solidFill>
-                <a:latin typeface="Calibri" pitchFamily="34" charset="0"/>
-                <a:ea typeface="Calibri" pitchFamily="34" charset="-122"/>
-                <a:cs typeface="Calibri" pitchFamily="34" charset="-120"/>
-              </a:rPr>
-              <a:t>Software Security · Week 6</a:t>
-            </a:r>
-            <a:endParaRPr lang="en-US" sz="900" dirty="0"/>
-          </a:p>
-        </p:txBody>
-      </p:sp>
-      <p:pic>
-        <p:nvPicPr>
-          <p:cNvPr id="12" name="Image 1" descr="/Users/pop7/Library/CloudStorage/OneDrive-MonsterConnectCo.,Ltd/Lecture/KOSEN69 - software-security/slides/pptx/assets/logo-small.png">    </p:cNvPr>
-          <p:cNvPicPr>
-            <a:picLocks noChangeAspect="1"/>
-          </p:cNvPicPr>
-          <p:nvPr/>
-        </p:nvPicPr>
-        <p:blipFill>
-          <a:blip r:embed="rId2"/>
-          <a:stretch>
-            <a:fillRect/>
-          </a:stretch>
-        </p:blipFill>
-        <p:spPr>
-          <a:xfrm>
-            <a:off x="7882128" y="4700016"/>
-            <a:ext cx="768096" cy="356616"/>
-          </a:xfrm>
-          <a:prstGeom prst="rect">
-            <a:avLst/>
-          </a:prstGeom>
-        </p:spPr>
-      </p:pic>
-    </p:spTree>
-  </p:cSld>
-  <p:clrMapOvr>
-    <a:masterClrMapping/>
-  </p:clrMapOvr>
-</p:sld>
-</file>
-
 <file path=ppt/slides/slide12.xml><?xml version="1.0" encoding="utf-8"?>
 <p:sld xmlns:a="http://schemas.openxmlformats.org/drawingml/2006/main" xmlns:r="http://schemas.openxmlformats.org/officeDocument/2006/relationships" xmlns:p="http://schemas.openxmlformats.org/presentationml/2006/main">
   <p:cSld name="Slide 12">
@@ -4146,7 +4235,7 @@
                 <a:ea typeface="Arial" pitchFamily="34" charset="-122"/>
                 <a:cs typeface="Arial" pitchFamily="34" charset="-120"/>
               </a:rPr>
-              <a:t>Reading the attack in the logs</a:t>
+              <a:t>Exercise — RBAC (cont.)</a:t>
             </a:r>
             <a:endParaRPr lang="en-US" sz="2600" dirty="0"/>
           </a:p>
@@ -4154,14 +4243,34 @@
       </p:sp>
       <p:sp>
         <p:nvSpPr>
-          <p:cNvPr id="5" name="Text 2"/>
-          <p:cNvSpPr/>
-          <p:nvPr/>
-        </p:nvSpPr>
-        <p:spPr>
-          <a:xfrm>
-            <a:off x="548640" y="1325880"/>
-            <a:ext cx="8046720" cy="548640"/>
+          <p:cNvPr id="5" name="Shape 2"/>
+          <p:cNvSpPr/>
+          <p:nvPr/>
+        </p:nvSpPr>
+        <p:spPr>
+          <a:xfrm>
+            <a:off x="502920" y="1325880"/>
+            <a:ext cx="384048" cy="384048"/>
+          </a:xfrm>
+          <a:prstGeom prst="ellipse">
+            <a:avLst/>
+          </a:prstGeom>
+          <a:solidFill>
+            <a:srgbClr val="E35205"/>
+          </a:solidFill>
+          <a:ln/>
+        </p:spPr>
+      </p:sp>
+      <p:sp>
+        <p:nvSpPr>
+          <p:cNvPr id="6" name="Text 3"/>
+          <p:cNvSpPr/>
+          <p:nvPr/>
+        </p:nvSpPr>
+        <p:spPr>
+          <a:xfrm>
+            <a:off x="502920" y="1325880"/>
+            <a:ext cx="384048" cy="384048"/>
           </a:xfrm>
           <a:prstGeom prst="rect">
             <a:avLst/>
@@ -4170,7 +4279,46 @@
           <a:ln/>
         </p:spPr>
         <p:txBody>
-          <a:bodyPr wrap="square" lIns="0" tIns="0" rIns="0" bIns="0" rtlCol="0" anchor="t">
+          <a:bodyPr wrap="square" lIns="0" tIns="0" rIns="0" bIns="0" rtlCol="0" anchor="ctr"/>
+          <a:lstStyle/>
+          <a:p>
+            <a:pPr algn="ctr" indent="0" marL="0">
+              <a:buNone/>
+            </a:pPr>
+            <a:r>
+              <a:rPr lang="en-US" sz="1500" b="1" dirty="0">
+                <a:solidFill>
+                  <a:srgbClr val="0E1726"/>
+                </a:solidFill>
+                <a:latin typeface="Arial" pitchFamily="34" charset="0"/>
+                <a:ea typeface="Arial" pitchFamily="34" charset="-122"/>
+                <a:cs typeface="Arial" pitchFamily="34" charset="-120"/>
+              </a:rPr>
+              <a:t>2</a:t>
+            </a:r>
+            <a:endParaRPr lang="en-US" sz="1500" dirty="0"/>
+          </a:p>
+        </p:txBody>
+      </p:sp>
+      <p:sp>
+        <p:nvSpPr>
+          <p:cNvPr id="7" name="Text 4"/>
+          <p:cNvSpPr/>
+          <p:nvPr/>
+        </p:nvSpPr>
+        <p:spPr>
+          <a:xfrm>
+            <a:off x="1051560" y="1325880"/>
+            <a:ext cx="7589520" cy="402336"/>
+          </a:xfrm>
+          <a:prstGeom prst="rect">
+            <a:avLst/>
+          </a:prstGeom>
+          <a:noFill/>
+          <a:ln/>
+        </p:spPr>
+        <p:txBody>
+          <a:bodyPr wrap="square" lIns="0" tIns="0" rIns="0" bIns="0" rtlCol="0" anchor="ctr">
             <a:normAutofit/>
           </a:bodyPr>
           <a:lstStyle/>
@@ -4179,7 +4327,7 @@
               <a:buNone/>
             </a:pPr>
             <a:r>
-              <a:rPr lang="en-US" sz="1400" dirty="0">
+              <a:rPr lang="en-US" sz="1350" dirty="0">
                 <a:solidFill>
                   <a:srgbClr val="1F2937"/>
                 </a:solidFill>
@@ -4187,49 +4335,42 @@
                 <a:ea typeface="Calibri" pitchFamily="34" charset="-122"/>
                 <a:cs typeface="Calibri" pitchFamily="34" charset="-120"/>
               </a:rPr>
-              <a:t>Reconstruct the kill chain from Apache logs:</a:t>
-            </a:r>
-            <a:endParaRPr lang="en-US" sz="1400" dirty="0"/>
-          </a:p>
-        </p:txBody>
-      </p:sp>
-      <p:sp>
-        <p:nvSpPr>
-          <p:cNvPr id="6" name="Shape 3"/>
-          <p:cNvSpPr/>
-          <p:nvPr/>
-        </p:nvSpPr>
-        <p:spPr>
-          <a:xfrm>
-            <a:off x="457200" y="1965960"/>
-            <a:ext cx="8229600" cy="932688"/>
-          </a:xfrm>
-          <a:prstGeom prst="roundRect">
-            <a:avLst>
-              <a:gd name="adj" fmla="val 5882"/>
-            </a:avLst>
+              <a:t>An intern must create bug entries — which role's perms to add?</a:t>
+            </a:r>
+            <a:endParaRPr lang="en-US" sz="1350" dirty="0"/>
+          </a:p>
+        </p:txBody>
+      </p:sp>
+      <p:sp>
+        <p:nvSpPr>
+          <p:cNvPr id="8" name="Shape 5"/>
+          <p:cNvSpPr/>
+          <p:nvPr/>
+        </p:nvSpPr>
+        <p:spPr>
+          <a:xfrm>
+            <a:off x="502920" y="1801368"/>
+            <a:ext cx="384048" cy="384048"/>
+          </a:xfrm>
+          <a:prstGeom prst="ellipse">
+            <a:avLst/>
           </a:prstGeom>
           <a:solidFill>
-            <a:srgbClr val="0A1020"/>
+            <a:srgbClr val="E35205"/>
           </a:solidFill>
-          <a:ln w="12700">
-            <a:solidFill>
-              <a:srgbClr val="E8EDF3"/>
-            </a:solidFill>
-            <a:prstDash val="solid"/>
-          </a:ln>
-        </p:spPr>
-      </p:sp>
-      <p:sp>
-        <p:nvSpPr>
-          <p:cNvPr id="7" name="Text 4"/>
-          <p:cNvSpPr/>
-          <p:nvPr/>
-        </p:nvSpPr>
-        <p:spPr>
-          <a:xfrm>
-            <a:off x="640080" y="2039112"/>
-            <a:ext cx="7863840" cy="786384"/>
+          <a:ln/>
+        </p:spPr>
+      </p:sp>
+      <p:sp>
+        <p:nvSpPr>
+          <p:cNvPr id="9" name="Text 6"/>
+          <p:cNvSpPr/>
+          <p:nvPr/>
+        </p:nvSpPr>
+        <p:spPr>
+          <a:xfrm>
+            <a:off x="502920" y="1801368"/>
+            <a:ext cx="384048" cy="384048"/>
           </a:xfrm>
           <a:prstGeom prst="rect">
             <a:avLst/>
@@ -4238,7 +4379,46 @@
           <a:ln/>
         </p:spPr>
         <p:txBody>
-          <a:bodyPr wrap="square" lIns="0" tIns="0" rIns="0" bIns="0" rtlCol="0" anchor="t">
+          <a:bodyPr wrap="square" lIns="0" tIns="0" rIns="0" bIns="0" rtlCol="0" anchor="ctr"/>
+          <a:lstStyle/>
+          <a:p>
+            <a:pPr algn="ctr" indent="0" marL="0">
+              <a:buNone/>
+            </a:pPr>
+            <a:r>
+              <a:rPr lang="en-US" sz="1500" b="1" dirty="0">
+                <a:solidFill>
+                  <a:srgbClr val="0E1726"/>
+                </a:solidFill>
+                <a:latin typeface="Arial" pitchFamily="34" charset="0"/>
+                <a:ea typeface="Arial" pitchFamily="34" charset="-122"/>
+                <a:cs typeface="Arial" pitchFamily="34" charset="-120"/>
+              </a:rPr>
+              <a:t>3</a:t>
+            </a:r>
+            <a:endParaRPr lang="en-US" sz="1500" dirty="0"/>
+          </a:p>
+        </p:txBody>
+      </p:sp>
+      <p:sp>
+        <p:nvSpPr>
+          <p:cNvPr id="10" name="Text 7"/>
+          <p:cNvSpPr/>
+          <p:nvPr/>
+        </p:nvSpPr>
+        <p:spPr>
+          <a:xfrm>
+            <a:off x="1051560" y="1801368"/>
+            <a:ext cx="7589520" cy="402336"/>
+          </a:xfrm>
+          <a:prstGeom prst="rect">
+            <a:avLst/>
+          </a:prstGeom>
+          <a:noFill/>
+          <a:ln/>
+        </p:spPr>
+        <p:txBody>
+          <a:bodyPr wrap="square" lIns="0" tIns="0" rIns="0" bIns="0" rtlCol="0" anchor="ctr">
             <a:normAutofit/>
           </a:bodyPr>
           <a:lstStyle/>
@@ -4247,115 +4427,7 @@
               <a:buNone/>
             </a:pPr>
             <a:r>
-              <a:rPr lang="en-US" sz="1150" dirty="0">
-                <a:solidFill>
-                  <a:srgbClr val="9FE7D6"/>
-                </a:solidFill>
-                <a:latin typeface="Courier New" pitchFamily="34" charset="0"/>
-                <a:ea typeface="Courier New" pitchFamily="34" charset="-122"/>
-                <a:cs typeface="Courier New" pitchFamily="34" charset="-120"/>
-              </a:rPr>
-              <a:t>GET /login.php?username=' or 1=1 limit 1; -- a&amp;...   302   ← SQLi admin</a:t>
-            </a:r>
-            <a:endParaRPr lang="en-US" sz="1150" dirty="0"/>
-          </a:p>
-          <a:p>
-            <a:pPr indent="0" marL="0">
-              <a:buNone/>
-            </a:pPr>
-            <a:r>
-              <a:rPr lang="en-US" sz="1150" dirty="0">
-                <a:solidFill>
-                  <a:srgbClr val="9FE7D6"/>
-                </a:solidFill>
-                <a:latin typeface="Courier New" pitchFamily="34" charset="0"/>
-                <a:ea typeface="Courier New" pitchFamily="34" charset="-122"/>
-                <a:cs typeface="Courier New" pitchFamily="34" charset="-120"/>
-              </a:rPr>
-              <a:t>POST /upload.php                                     200   ← backdoor</a:t>
-            </a:r>
-            <a:endParaRPr lang="en-US" sz="1150" dirty="0"/>
-          </a:p>
-          <a:p>
-            <a:pPr indent="0" marL="0">
-              <a:buNone/>
-            </a:pPr>
-            <a:r>
-              <a:rPr lang="en-US" sz="1150" dirty="0">
-                <a:solidFill>
-                  <a:srgbClr val="9FE7D6"/>
-                </a:solidFill>
-                <a:latin typeface="Courier New" pitchFamily="34" charset="0"/>
-                <a:ea typeface="Courier New" pitchFamily="34" charset="-122"/>
-                <a:cs typeface="Courier New" pitchFamily="34" charset="-120"/>
-              </a:rPr>
-              <a:t>GET /uploads/backdoor.php?cmd=ls%20-l                200   ← RCE</a:t>
-            </a:r>
-            <a:endParaRPr lang="en-US" sz="1150" dirty="0"/>
-          </a:p>
-        </p:txBody>
-      </p:sp>
-      <p:sp>
-        <p:nvSpPr>
-          <p:cNvPr id="8" name="Shape 5"/>
-          <p:cNvSpPr/>
-          <p:nvPr/>
-        </p:nvSpPr>
-        <p:spPr>
-          <a:xfrm>
-            <a:off x="457200" y="3063240"/>
-            <a:ext cx="8229600" cy="585216"/>
-          </a:xfrm>
-          <a:prstGeom prst="roundRect">
-            <a:avLst>
-              <a:gd name="adj" fmla="val 12500"/>
-            </a:avLst>
-          </a:prstGeom>
-          <a:solidFill>
-            <a:srgbClr val="F1F5F9"/>
-          </a:solidFill>
-          <a:ln/>
-          <a:effectLst>
-            <a:outerShdw sx="100000" sy="100000" kx="0" ky="0" algn="bl" rotWithShape="0" blurRad="76200" dist="25400" dir="5400000">
-              <a:srgbClr val="000000">
-                <a:alpha val="12000"/>
-              </a:srgbClr>
-            </a:outerShdw>
-          </a:effectLst>
-        </p:spPr>
-      </p:sp>
-      <p:sp>
-        <p:nvSpPr>
-          <p:cNvPr id="9" name="Text 6"/>
-          <p:cNvSpPr/>
-          <p:nvPr/>
-        </p:nvSpPr>
-        <p:spPr>
-          <a:xfrm>
-            <a:off x="731520" y="3172968"/>
-            <a:ext cx="7680960" cy="365760"/>
-          </a:xfrm>
-          <a:prstGeom prst="rect">
-            <a:avLst/>
-          </a:prstGeom>
-          <a:noFill/>
-          <a:ln/>
-        </p:spPr>
-        <p:txBody>
-          <a:bodyPr wrap="square" lIns="0" tIns="0" rIns="0" bIns="0" rtlCol="0" anchor="t">
-            <a:normAutofit/>
-          </a:bodyPr>
-          <a:lstStyle/>
-          <a:p>
-            <a:pPr marL="342900" indent="-342900">
-              <a:spcAft>
-                <a:spcPts val="600"/>
-              </a:spcAft>
-              <a:buSzPct val="100000"/>
-              <a:buChar char="•"/>
-            </a:pPr>
-            <a:r>
-              <a:rPr lang="en-US" sz="1400" dirty="0">
+              <a:rPr lang="en-US" sz="1350" dirty="0">
                 <a:solidFill>
                   <a:srgbClr val="1F2937"/>
                 </a:solidFill>
@@ -4363,15 +4435,15 @@
                 <a:ea typeface="Calibri" pitchFamily="34" charset="-122"/>
                 <a:cs typeface="Calibri" pitchFamily="34" charset="-120"/>
               </a:rPr>
-              <a:t>%20 = space (URL-decode!) · logs let you trace what happened</a:t>
-            </a:r>
-            <a:endParaRPr lang="en-US" sz="1400" dirty="0"/>
-          </a:p>
-        </p:txBody>
-      </p:sp>
-      <p:sp>
-        <p:nvSpPr>
-          <p:cNvPr id="10" name="Text 7"/>
+              <a:t>List all roles that can modify the codebase.</a:t>
+            </a:r>
+            <a:endParaRPr lang="en-US" sz="1350" dirty="0"/>
+          </a:p>
+        </p:txBody>
+      </p:sp>
+      <p:sp>
+        <p:nvSpPr>
+          <p:cNvPr id="11" name="Text 8"/>
           <p:cNvSpPr/>
           <p:nvPr/>
         </p:nvSpPr>
@@ -4410,7 +4482,7 @@
       </p:sp>
       <p:pic>
         <p:nvPicPr>
-          <p:cNvPr id="11" name="Image 1" descr="/Users/pop7/Library/CloudStorage/OneDrive-MonsterConnectCo.,Ltd/Lecture/KOSEN69 - software-security/slides/pptx/assets/logo-small.png">    </p:cNvPr>
+          <p:cNvPr id="12" name="Image 1" descr="/Users/pop7/Library/CloudStorage/OneDrive-MonsterConnectCo.,Ltd/Lecture/KOSEN69 - software-security/slides/pptx/assets/logo-small.png">    </p:cNvPr>
           <p:cNvPicPr>
             <a:picLocks noChangeAspect="1"/>
           </p:cNvPicPr>
@@ -4548,7 +4620,7 @@
                 <a:ea typeface="Arial" pitchFamily="34" charset="-122"/>
                 <a:cs typeface="Arial" pitchFamily="34" charset="-120"/>
               </a:rPr>
-              <a:t>CWE mapping</a:t>
+              <a:t>Reading the attack in the logs</a:t>
             </a:r>
             <a:endParaRPr lang="en-US" sz="2600" dirty="0"/>
           </a:p>
@@ -4556,18 +4628,161 @@
       </p:sp>
       <p:sp>
         <p:nvSpPr>
-          <p:cNvPr id="5" name="Shape 2"/>
-          <p:cNvSpPr/>
-          <p:nvPr/>
-        </p:nvSpPr>
-        <p:spPr>
-          <a:xfrm>
-            <a:off x="457200" y="1325880"/>
-            <a:ext cx="8229600" cy="1207008"/>
+          <p:cNvPr id="5" name="Text 2"/>
+          <p:cNvSpPr/>
+          <p:nvPr/>
+        </p:nvSpPr>
+        <p:spPr>
+          <a:xfrm>
+            <a:off x="548640" y="1325880"/>
+            <a:ext cx="8046720" cy="548640"/>
+          </a:xfrm>
+          <a:prstGeom prst="rect">
+            <a:avLst/>
+          </a:prstGeom>
+          <a:noFill/>
+          <a:ln/>
+        </p:spPr>
+        <p:txBody>
+          <a:bodyPr wrap="square" lIns="0" tIns="0" rIns="0" bIns="0" rtlCol="0" anchor="t">
+            <a:normAutofit/>
+          </a:bodyPr>
+          <a:lstStyle/>
+          <a:p>
+            <a:pPr indent="0" marL="0">
+              <a:buNone/>
+            </a:pPr>
+            <a:r>
+              <a:rPr lang="en-US" sz="1400" dirty="0">
+                <a:solidFill>
+                  <a:srgbClr val="1F2937"/>
+                </a:solidFill>
+                <a:latin typeface="Calibri" pitchFamily="34" charset="0"/>
+                <a:ea typeface="Calibri" pitchFamily="34" charset="-122"/>
+                <a:cs typeface="Calibri" pitchFamily="34" charset="-120"/>
+              </a:rPr>
+              <a:t>Reconstruct the kill chain from Apache logs:</a:t>
+            </a:r>
+            <a:endParaRPr lang="en-US" sz="1400" dirty="0"/>
+          </a:p>
+        </p:txBody>
+      </p:sp>
+      <p:sp>
+        <p:nvSpPr>
+          <p:cNvPr id="6" name="Shape 3"/>
+          <p:cNvSpPr/>
+          <p:nvPr/>
+        </p:nvSpPr>
+        <p:spPr>
+          <a:xfrm>
+            <a:off x="457200" y="1965960"/>
+            <a:ext cx="8229600" cy="932688"/>
           </a:xfrm>
           <a:prstGeom prst="roundRect">
             <a:avLst>
-              <a:gd name="adj" fmla="val 6061"/>
+              <a:gd name="adj" fmla="val 5882"/>
+            </a:avLst>
+          </a:prstGeom>
+          <a:solidFill>
+            <a:srgbClr val="0A1020"/>
+          </a:solidFill>
+          <a:ln w="12700">
+            <a:solidFill>
+              <a:srgbClr val="E8EDF3"/>
+            </a:solidFill>
+            <a:prstDash val="solid"/>
+          </a:ln>
+        </p:spPr>
+      </p:sp>
+      <p:sp>
+        <p:nvSpPr>
+          <p:cNvPr id="7" name="Text 4"/>
+          <p:cNvSpPr/>
+          <p:nvPr/>
+        </p:nvSpPr>
+        <p:spPr>
+          <a:xfrm>
+            <a:off x="640080" y="2039112"/>
+            <a:ext cx="7863840" cy="786384"/>
+          </a:xfrm>
+          <a:prstGeom prst="rect">
+            <a:avLst/>
+          </a:prstGeom>
+          <a:noFill/>
+          <a:ln/>
+        </p:spPr>
+        <p:txBody>
+          <a:bodyPr wrap="square" lIns="0" tIns="0" rIns="0" bIns="0" rtlCol="0" anchor="t">
+            <a:normAutofit/>
+          </a:bodyPr>
+          <a:lstStyle/>
+          <a:p>
+            <a:pPr indent="0" marL="0">
+              <a:buNone/>
+            </a:pPr>
+            <a:r>
+              <a:rPr lang="en-US" sz="1150" dirty="0">
+                <a:solidFill>
+                  <a:srgbClr val="9FE7D6"/>
+                </a:solidFill>
+                <a:latin typeface="Courier New" pitchFamily="34" charset="0"/>
+                <a:ea typeface="Courier New" pitchFamily="34" charset="-122"/>
+                <a:cs typeface="Courier New" pitchFamily="34" charset="-120"/>
+              </a:rPr>
+              <a:t>GET /login.php?username=' or 1=1 limit 1; -- a&amp;...   302   ← SQLi admin</a:t>
+            </a:r>
+            <a:endParaRPr lang="en-US" sz="1150" dirty="0"/>
+          </a:p>
+          <a:p>
+            <a:pPr indent="0" marL="0">
+              <a:buNone/>
+            </a:pPr>
+            <a:r>
+              <a:rPr lang="en-US" sz="1150" dirty="0">
+                <a:solidFill>
+                  <a:srgbClr val="9FE7D6"/>
+                </a:solidFill>
+                <a:latin typeface="Courier New" pitchFamily="34" charset="0"/>
+                <a:ea typeface="Courier New" pitchFamily="34" charset="-122"/>
+                <a:cs typeface="Courier New" pitchFamily="34" charset="-120"/>
+              </a:rPr>
+              <a:t>POST /upload.php                                     200   ← backdoor</a:t>
+            </a:r>
+            <a:endParaRPr lang="en-US" sz="1150" dirty="0"/>
+          </a:p>
+          <a:p>
+            <a:pPr indent="0" marL="0">
+              <a:buNone/>
+            </a:pPr>
+            <a:r>
+              <a:rPr lang="en-US" sz="1150" dirty="0">
+                <a:solidFill>
+                  <a:srgbClr val="9FE7D6"/>
+                </a:solidFill>
+                <a:latin typeface="Courier New" pitchFamily="34" charset="0"/>
+                <a:ea typeface="Courier New" pitchFamily="34" charset="-122"/>
+                <a:cs typeface="Courier New" pitchFamily="34" charset="-120"/>
+              </a:rPr>
+              <a:t>GET /uploads/backdoor.php?cmd=ls%20-l                200   ← RCE</a:t>
+            </a:r>
+            <a:endParaRPr lang="en-US" sz="1150" dirty="0"/>
+          </a:p>
+        </p:txBody>
+      </p:sp>
+      <p:sp>
+        <p:nvSpPr>
+          <p:cNvPr id="8" name="Shape 5"/>
+          <p:cNvSpPr/>
+          <p:nvPr/>
+        </p:nvSpPr>
+        <p:spPr>
+          <a:xfrm>
+            <a:off x="457200" y="3063240"/>
+            <a:ext cx="8229600" cy="585216"/>
+          </a:xfrm>
+          <a:prstGeom prst="roundRect">
+            <a:avLst>
+              <a:gd name="adj" fmla="val 12500"/>
             </a:avLst>
           </a:prstGeom>
           <a:solidFill>
@@ -4585,14 +4800,14 @@
       </p:sp>
       <p:sp>
         <p:nvSpPr>
-          <p:cNvPr id="6" name="Text 3"/>
-          <p:cNvSpPr/>
-          <p:nvPr/>
-        </p:nvSpPr>
-        <p:spPr>
-          <a:xfrm>
-            <a:off x="731520" y="1435608"/>
-            <a:ext cx="7680960" cy="987552"/>
+          <p:cNvPr id="9" name="Text 6"/>
+          <p:cNvSpPr/>
+          <p:nvPr/>
+        </p:nvSpPr>
+        <p:spPr>
+          <a:xfrm>
+            <a:off x="731520" y="3172968"/>
+            <a:ext cx="7680960" cy="365760"/>
           </a:xfrm>
           <a:prstGeom prst="rect">
             <a:avLst/>
@@ -4622,87 +4837,45 @@
                 <a:ea typeface="Calibri" pitchFamily="34" charset="-122"/>
                 <a:cs typeface="Calibri" pitchFamily="34" charset="-120"/>
               </a:rPr>
-              <a:t>CWE-639 — IDOR / missing ownership check</a:t>
+              <a:t>%20 = space (URL-decode!) · logs let you trace what happened</a:t>
             </a:r>
             <a:endParaRPr lang="en-US" sz="1400" dirty="0"/>
           </a:p>
-          <a:p>
-            <a:pPr marL="342900" indent="-342900">
-              <a:spcAft>
-                <a:spcPts val="600"/>
-              </a:spcAft>
-              <a:buSzPct val="100000"/>
-              <a:buChar char="•"/>
-            </a:pPr>
-            <a:r>
-              <a:rPr lang="en-US" sz="1400" dirty="0">
-                <a:solidFill>
-                  <a:srgbClr val="1F2937"/>
+        </p:txBody>
+      </p:sp>
+      <p:sp>
+        <p:nvSpPr>
+          <p:cNvPr id="10" name="Text 7"/>
+          <p:cNvSpPr/>
+          <p:nvPr/>
+        </p:nvSpPr>
+        <p:spPr>
+          <a:xfrm>
+            <a:off x="457200" y="4800600"/>
+            <a:ext cx="6949440" cy="274320"/>
+          </a:xfrm>
+          <a:prstGeom prst="rect">
+            <a:avLst/>
+          </a:prstGeom>
+          <a:noFill/>
+          <a:ln/>
+        </p:spPr>
+        <p:txBody>
+          <a:bodyPr wrap="square" lIns="0" tIns="0" rIns="0" bIns="0" rtlCol="0" anchor="ctr"/>
+          <a:lstStyle/>
+          <a:p>
+            <a:pPr indent="0" marL="0">
+              <a:buNone/>
+            </a:pPr>
+            <a:r>
+              <a:rPr lang="en-US" sz="900" dirty="0">
+                <a:solidFill>
+                  <a:srgbClr val="64748B"/>
                 </a:solidFill>
                 <a:latin typeface="Calibri" pitchFamily="34" charset="0"/>
                 <a:ea typeface="Calibri" pitchFamily="34" charset="-122"/>
                 <a:cs typeface="Calibri" pitchFamily="34" charset="-120"/>
               </a:rPr>
-              <a:t>CWE-347 — improper signature verification (alg:none forgery)</a:t>
-            </a:r>
-            <a:endParaRPr lang="en-US" sz="1400" dirty="0"/>
-          </a:p>
-          <a:p>
-            <a:pPr marL="342900" indent="-342900">
-              <a:spcAft>
-                <a:spcPts val="600"/>
-              </a:spcAft>
-              <a:buSzPct val="100000"/>
-              <a:buChar char="•"/>
-            </a:pPr>
-            <a:r>
-              <a:rPr lang="en-US" sz="1400" dirty="0">
-                <a:solidFill>
-                  <a:srgbClr val="1F2937"/>
-                </a:solidFill>
-                <a:latin typeface="Calibri" pitchFamily="34" charset="0"/>
-                <a:ea typeface="Calibri" pitchFamily="34" charset="-122"/>
-                <a:cs typeface="Calibri" pitchFamily="34" charset="-120"/>
-              </a:rPr>
-              <a:t>CWE-321 — use of a hardcoded/weak cryptographic key (the guessable HMAC secret)</a:t>
-            </a:r>
-            <a:endParaRPr lang="en-US" sz="1400" dirty="0"/>
-          </a:p>
-        </p:txBody>
-      </p:sp>
-      <p:sp>
-        <p:nvSpPr>
-          <p:cNvPr id="7" name="Text 4"/>
-          <p:cNvSpPr/>
-          <p:nvPr/>
-        </p:nvSpPr>
-        <p:spPr>
-          <a:xfrm>
-            <a:off x="457200" y="4800600"/>
-            <a:ext cx="6949440" cy="274320"/>
-          </a:xfrm>
-          <a:prstGeom prst="rect">
-            <a:avLst/>
-          </a:prstGeom>
-          <a:noFill/>
-          <a:ln/>
-        </p:spPr>
-        <p:txBody>
-          <a:bodyPr wrap="square" lIns="0" tIns="0" rIns="0" bIns="0" rtlCol="0" anchor="ctr"/>
-          <a:lstStyle/>
-          <a:p>
-            <a:pPr indent="0" marL="0">
-              <a:buNone/>
-            </a:pPr>
-            <a:r>
-              <a:rPr lang="en-US" sz="900" dirty="0">
-                <a:solidFill>
-                  <a:srgbClr val="64748B"/>
-                </a:solidFill>
-                <a:latin typeface="Calibri" pitchFamily="34" charset="0"/>
-                <a:ea typeface="Calibri" pitchFamily="34" charset="-122"/>
-                <a:cs typeface="Calibri" pitchFamily="34" charset="-120"/>
-              </a:rPr>
               <a:t>Software Security · Week 6</a:t>
             </a:r>
             <a:endParaRPr lang="en-US" sz="900" dirty="0"/>
@@ -4711,7 +4884,7 @@
       </p:sp>
       <p:pic>
         <p:nvPicPr>
-          <p:cNvPr id="8" name="Image 1" descr="/Users/pop7/Library/CloudStorage/OneDrive-MonsterConnectCo.,Ltd/Lecture/KOSEN69 - software-security/slides/pptx/assets/logo-small.png">    </p:cNvPr>
+          <p:cNvPr id="11" name="Image 1" descr="/Users/pop7/Library/CloudStorage/OneDrive-MonsterConnectCo.,Ltd/Lecture/KOSEN69 - software-security/slides/pptx/assets/logo-small.png">    </p:cNvPr>
           <p:cNvPicPr>
             <a:picLocks noChangeAspect="1"/>
           </p:cNvPicPr>
@@ -4849,7 +5022,7 @@
                 <a:ea typeface="Arial" pitchFamily="34" charset="-122"/>
                 <a:cs typeface="Arial" pitchFamily="34" charset="-120"/>
               </a:rPr>
-              <a:t>Defenses</a:t>
+              <a:t>CWE mapping</a:t>
             </a:r>
             <a:endParaRPr lang="en-US" sz="2600" dirty="0"/>
           </a:p>
@@ -4864,11 +5037,11 @@
         <p:spPr>
           <a:xfrm>
             <a:off x="457200" y="1325880"/>
-            <a:ext cx="8229600" cy="2139696"/>
+            <a:ext cx="8229600" cy="1207008"/>
           </a:xfrm>
           <a:prstGeom prst="roundRect">
             <a:avLst>
-              <a:gd name="adj" fmla="val 3419"/>
+              <a:gd name="adj" fmla="val 6061"/>
             </a:avLst>
           </a:prstGeom>
           <a:solidFill>
@@ -4893,7 +5066,7 @@
         <p:spPr>
           <a:xfrm>
             <a:off x="731520" y="1435608"/>
-            <a:ext cx="7680960" cy="1920240"/>
+            <a:ext cx="7680960" cy="987552"/>
           </a:xfrm>
           <a:prstGeom prst="rect">
             <a:avLst/>
@@ -4923,7 +5096,7 @@
                 <a:ea typeface="Calibri" pitchFamily="34" charset="-122"/>
                 <a:cs typeface="Calibri" pitchFamily="34" charset="-120"/>
               </a:rPr>
-              <a:t>Server-side authorization on every request (deny by default)</a:t>
+              <a:t>CWE-639 — IDOR / missing ownership check</a:t>
             </a:r>
             <a:endParaRPr lang="en-US" sz="1400" dirty="0"/>
           </a:p>
@@ -4944,7 +5117,7 @@
                 <a:ea typeface="Calibri" pitchFamily="34" charset="-122"/>
                 <a:cs typeface="Calibri" pitchFamily="34" charset="-120"/>
               </a:rPr>
-              <a:t>Check ownership, not just authentication</a:t>
+              <a:t>CWE-347 — improper signature verification (alg:none forgery)</a:t>
             </a:r>
             <a:endParaRPr lang="en-US" sz="1400" dirty="0"/>
           </a:p>
@@ -4965,70 +5138,7 @@
                 <a:ea typeface="Calibri" pitchFamily="34" charset="-122"/>
                 <a:cs typeface="Calibri" pitchFamily="34" charset="-120"/>
               </a:rPr>
-              <a:t>Strong session tokens + proper expiry/rotation</a:t>
-            </a:r>
-            <a:endParaRPr lang="en-US" sz="1400" dirty="0"/>
-          </a:p>
-          <a:p>
-            <a:pPr marL="342900" indent="-342900">
-              <a:spcAft>
-                <a:spcPts val="600"/>
-              </a:spcAft>
-              <a:buSzPct val="100000"/>
-              <a:buChar char="•"/>
-            </a:pPr>
-            <a:r>
-              <a:rPr lang="en-US" sz="1400" dirty="0">
-                <a:solidFill>
-                  <a:srgbClr val="1F2937"/>
-                </a:solidFill>
-                <a:latin typeface="Calibri" pitchFamily="34" charset="0"/>
-                <a:ea typeface="Calibri" pitchFamily="34" charset="-122"/>
-                <a:cs typeface="Calibri" pitchFamily="34" charset="-120"/>
-              </a:rPr>
-              <a:t>Verify JWT signature, alg, exp, aud; keep secrets strong</a:t>
-            </a:r>
-            <a:endParaRPr lang="en-US" sz="1400" dirty="0"/>
-          </a:p>
-          <a:p>
-            <a:pPr marL="342900" indent="-342900">
-              <a:spcAft>
-                <a:spcPts val="600"/>
-              </a:spcAft>
-              <a:buSzPct val="100000"/>
-              <a:buChar char="•"/>
-            </a:pPr>
-            <a:r>
-              <a:rPr lang="en-US" sz="1400" dirty="0">
-                <a:solidFill>
-                  <a:srgbClr val="1F2937"/>
-                </a:solidFill>
-                <a:latin typeface="Calibri" pitchFamily="34" charset="0"/>
-                <a:ea typeface="Calibri" pitchFamily="34" charset="-122"/>
-                <a:cs typeface="Calibri" pitchFamily="34" charset="-120"/>
-              </a:rPr>
-              <a:t>RBAC / ABAC enforced centrally</a:t>
-            </a:r>
-            <a:endParaRPr lang="en-US" sz="1400" dirty="0"/>
-          </a:p>
-          <a:p>
-            <a:pPr marL="342900" indent="-342900">
-              <a:spcAft>
-                <a:spcPts val="600"/>
-              </a:spcAft>
-              <a:buSzPct val="100000"/>
-              <a:buChar char="•"/>
-            </a:pPr>
-            <a:r>
-              <a:rPr lang="en-US" sz="1400" dirty="0">
-                <a:solidFill>
-                  <a:srgbClr val="1F2937"/>
-                </a:solidFill>
-                <a:latin typeface="Calibri" pitchFamily="34" charset="0"/>
-                <a:ea typeface="Calibri" pitchFamily="34" charset="-122"/>
-                <a:cs typeface="Calibri" pitchFamily="34" charset="-120"/>
-              </a:rPr>
-              <a:t>Centralize the check — don't scatter if role==... everywhere</a:t>
+              <a:t>CWE-321 — use of a hardcoded/weak cryptographic key (the guessable HMAC secret)</a:t>
             </a:r>
             <a:endParaRPr lang="en-US" sz="1400" dirty="0"/>
           </a:p>
@@ -5213,6 +5323,370 @@
                 <a:ea typeface="Arial" pitchFamily="34" charset="-122"/>
                 <a:cs typeface="Arial" pitchFamily="34" charset="-120"/>
               </a:rPr>
+              <a:t>Defenses</a:t>
+            </a:r>
+            <a:endParaRPr lang="en-US" sz="2600" dirty="0"/>
+          </a:p>
+        </p:txBody>
+      </p:sp>
+      <p:sp>
+        <p:nvSpPr>
+          <p:cNvPr id="5" name="Shape 2"/>
+          <p:cNvSpPr/>
+          <p:nvPr/>
+        </p:nvSpPr>
+        <p:spPr>
+          <a:xfrm>
+            <a:off x="457200" y="1325880"/>
+            <a:ext cx="8229600" cy="2139696"/>
+          </a:xfrm>
+          <a:prstGeom prst="roundRect">
+            <a:avLst>
+              <a:gd name="adj" fmla="val 3419"/>
+            </a:avLst>
+          </a:prstGeom>
+          <a:solidFill>
+            <a:srgbClr val="F1F5F9"/>
+          </a:solidFill>
+          <a:ln/>
+          <a:effectLst>
+            <a:outerShdw sx="100000" sy="100000" kx="0" ky="0" algn="bl" rotWithShape="0" blurRad="76200" dist="25400" dir="5400000">
+              <a:srgbClr val="000000">
+                <a:alpha val="12000"/>
+              </a:srgbClr>
+            </a:outerShdw>
+          </a:effectLst>
+        </p:spPr>
+      </p:sp>
+      <p:sp>
+        <p:nvSpPr>
+          <p:cNvPr id="6" name="Text 3"/>
+          <p:cNvSpPr/>
+          <p:nvPr/>
+        </p:nvSpPr>
+        <p:spPr>
+          <a:xfrm>
+            <a:off x="731520" y="1435608"/>
+            <a:ext cx="7680960" cy="1920240"/>
+          </a:xfrm>
+          <a:prstGeom prst="rect">
+            <a:avLst/>
+          </a:prstGeom>
+          <a:noFill/>
+          <a:ln/>
+        </p:spPr>
+        <p:txBody>
+          <a:bodyPr wrap="square" lIns="0" tIns="0" rIns="0" bIns="0" rtlCol="0" anchor="t">
+            <a:normAutofit/>
+          </a:bodyPr>
+          <a:lstStyle/>
+          <a:p>
+            <a:pPr marL="342900" indent="-342900">
+              <a:spcAft>
+                <a:spcPts val="600"/>
+              </a:spcAft>
+              <a:buSzPct val="100000"/>
+              <a:buChar char="•"/>
+            </a:pPr>
+            <a:r>
+              <a:rPr lang="en-US" sz="1400" dirty="0">
+                <a:solidFill>
+                  <a:srgbClr val="1F2937"/>
+                </a:solidFill>
+                <a:latin typeface="Calibri" pitchFamily="34" charset="0"/>
+                <a:ea typeface="Calibri" pitchFamily="34" charset="-122"/>
+                <a:cs typeface="Calibri" pitchFamily="34" charset="-120"/>
+              </a:rPr>
+              <a:t>Server-side authorization on every request (deny by default)</a:t>
+            </a:r>
+            <a:endParaRPr lang="en-US" sz="1400" dirty="0"/>
+          </a:p>
+          <a:p>
+            <a:pPr marL="342900" indent="-342900">
+              <a:spcAft>
+                <a:spcPts val="600"/>
+              </a:spcAft>
+              <a:buSzPct val="100000"/>
+              <a:buChar char="•"/>
+            </a:pPr>
+            <a:r>
+              <a:rPr lang="en-US" sz="1400" dirty="0">
+                <a:solidFill>
+                  <a:srgbClr val="1F2937"/>
+                </a:solidFill>
+                <a:latin typeface="Calibri" pitchFamily="34" charset="0"/>
+                <a:ea typeface="Calibri" pitchFamily="34" charset="-122"/>
+                <a:cs typeface="Calibri" pitchFamily="34" charset="-120"/>
+              </a:rPr>
+              <a:t>Check ownership, not just authentication</a:t>
+            </a:r>
+            <a:endParaRPr lang="en-US" sz="1400" dirty="0"/>
+          </a:p>
+          <a:p>
+            <a:pPr marL="342900" indent="-342900">
+              <a:spcAft>
+                <a:spcPts val="600"/>
+              </a:spcAft>
+              <a:buSzPct val="100000"/>
+              <a:buChar char="•"/>
+            </a:pPr>
+            <a:r>
+              <a:rPr lang="en-US" sz="1400" dirty="0">
+                <a:solidFill>
+                  <a:srgbClr val="1F2937"/>
+                </a:solidFill>
+                <a:latin typeface="Calibri" pitchFamily="34" charset="0"/>
+                <a:ea typeface="Calibri" pitchFamily="34" charset="-122"/>
+                <a:cs typeface="Calibri" pitchFamily="34" charset="-120"/>
+              </a:rPr>
+              <a:t>Strong session tokens + proper expiry/rotation</a:t>
+            </a:r>
+            <a:endParaRPr lang="en-US" sz="1400" dirty="0"/>
+          </a:p>
+          <a:p>
+            <a:pPr marL="342900" indent="-342900">
+              <a:spcAft>
+                <a:spcPts val="600"/>
+              </a:spcAft>
+              <a:buSzPct val="100000"/>
+              <a:buChar char="•"/>
+            </a:pPr>
+            <a:r>
+              <a:rPr lang="en-US" sz="1400" dirty="0">
+                <a:solidFill>
+                  <a:srgbClr val="1F2937"/>
+                </a:solidFill>
+                <a:latin typeface="Calibri" pitchFamily="34" charset="0"/>
+                <a:ea typeface="Calibri" pitchFamily="34" charset="-122"/>
+                <a:cs typeface="Calibri" pitchFamily="34" charset="-120"/>
+              </a:rPr>
+              <a:t>Verify JWT signature, alg, exp, aud; keep secrets strong</a:t>
+            </a:r>
+            <a:endParaRPr lang="en-US" sz="1400" dirty="0"/>
+          </a:p>
+          <a:p>
+            <a:pPr marL="342900" indent="-342900">
+              <a:spcAft>
+                <a:spcPts val="600"/>
+              </a:spcAft>
+              <a:buSzPct val="100000"/>
+              <a:buChar char="•"/>
+            </a:pPr>
+            <a:r>
+              <a:rPr lang="en-US" sz="1400" dirty="0">
+                <a:solidFill>
+                  <a:srgbClr val="1F2937"/>
+                </a:solidFill>
+                <a:latin typeface="Calibri" pitchFamily="34" charset="0"/>
+                <a:ea typeface="Calibri" pitchFamily="34" charset="-122"/>
+                <a:cs typeface="Calibri" pitchFamily="34" charset="-120"/>
+              </a:rPr>
+              <a:t>RBAC / ABAC enforced centrally</a:t>
+            </a:r>
+            <a:endParaRPr lang="en-US" sz="1400" dirty="0"/>
+          </a:p>
+          <a:p>
+            <a:pPr marL="342900" indent="-342900">
+              <a:spcAft>
+                <a:spcPts val="600"/>
+              </a:spcAft>
+              <a:buSzPct val="100000"/>
+              <a:buChar char="•"/>
+            </a:pPr>
+            <a:r>
+              <a:rPr lang="en-US" sz="1400" dirty="0">
+                <a:solidFill>
+                  <a:srgbClr val="1F2937"/>
+                </a:solidFill>
+                <a:latin typeface="Calibri" pitchFamily="34" charset="0"/>
+                <a:ea typeface="Calibri" pitchFamily="34" charset="-122"/>
+                <a:cs typeface="Calibri" pitchFamily="34" charset="-120"/>
+              </a:rPr>
+              <a:t>Centralize the check — don't scatter if role==... everywhere</a:t>
+            </a:r>
+            <a:endParaRPr lang="en-US" sz="1400" dirty="0"/>
+          </a:p>
+        </p:txBody>
+      </p:sp>
+      <p:sp>
+        <p:nvSpPr>
+          <p:cNvPr id="7" name="Text 4"/>
+          <p:cNvSpPr/>
+          <p:nvPr/>
+        </p:nvSpPr>
+        <p:spPr>
+          <a:xfrm>
+            <a:off x="457200" y="4800600"/>
+            <a:ext cx="6949440" cy="274320"/>
+          </a:xfrm>
+          <a:prstGeom prst="rect">
+            <a:avLst/>
+          </a:prstGeom>
+          <a:noFill/>
+          <a:ln/>
+        </p:spPr>
+        <p:txBody>
+          <a:bodyPr wrap="square" lIns="0" tIns="0" rIns="0" bIns="0" rtlCol="0" anchor="ctr"/>
+          <a:lstStyle/>
+          <a:p>
+            <a:pPr indent="0" marL="0">
+              <a:buNone/>
+            </a:pPr>
+            <a:r>
+              <a:rPr lang="en-US" sz="900" dirty="0">
+                <a:solidFill>
+                  <a:srgbClr val="64748B"/>
+                </a:solidFill>
+                <a:latin typeface="Calibri" pitchFamily="34" charset="0"/>
+                <a:ea typeface="Calibri" pitchFamily="34" charset="-122"/>
+                <a:cs typeface="Calibri" pitchFamily="34" charset="-120"/>
+              </a:rPr>
+              <a:t>Software Security · Week 6</a:t>
+            </a:r>
+            <a:endParaRPr lang="en-US" sz="900" dirty="0"/>
+          </a:p>
+        </p:txBody>
+      </p:sp>
+      <p:pic>
+        <p:nvPicPr>
+          <p:cNvPr id="8" name="Image 1" descr="/Users/pop7/Library/CloudStorage/OneDrive-MonsterConnectCo.,Ltd/Lecture/KOSEN69 - software-security/slides/pptx/assets/logo-small.png">    </p:cNvPr>
+          <p:cNvPicPr>
+            <a:picLocks noChangeAspect="1"/>
+          </p:cNvPicPr>
+          <p:nvPr/>
+        </p:nvPicPr>
+        <p:blipFill>
+          <a:blip r:embed="rId2"/>
+          <a:stretch>
+            <a:fillRect/>
+          </a:stretch>
+        </p:blipFill>
+        <p:spPr>
+          <a:xfrm>
+            <a:off x="7882128" y="4700016"/>
+            <a:ext cx="768096" cy="356616"/>
+          </a:xfrm>
+          <a:prstGeom prst="rect">
+            <a:avLst/>
+          </a:prstGeom>
+        </p:spPr>
+      </p:pic>
+    </p:spTree>
+  </p:cSld>
+  <p:clrMapOvr>
+    <a:masterClrMapping/>
+  </p:clrMapOvr>
+</p:sld>
+</file>
+
+<file path=ppt/slides/slide16.xml><?xml version="1.0" encoding="utf-8"?>
+<p:sld xmlns:a="http://schemas.openxmlformats.org/drawingml/2006/main" xmlns:r="http://schemas.openxmlformats.org/officeDocument/2006/relationships" xmlns:p="http://schemas.openxmlformats.org/presentationml/2006/main">
+  <p:cSld name="Slide 16">
+    <p:bg>
+      <p:bgPr>
+        <a:solidFill>
+          <a:srgbClr val="FFFFFF"/>
+        </a:solidFill>
+      </p:bgPr>
+    </p:bg>
+    <p:spTree>
+      <p:nvGrpSpPr>
+        <p:cNvPr id="1" name=""/>
+        <p:cNvGrpSpPr/>
+        <p:nvPr/>
+      </p:nvGrpSpPr>
+      <p:grpSpPr>
+        <a:xfrm>
+          <a:off x="0" y="0"/>
+          <a:ext cx="0" cy="0"/>
+          <a:chOff x="0" y="0"/>
+          <a:chExt cx="0" cy="0"/>
+        </a:xfrm>
+      </p:grpSpPr>
+      <p:sp>
+        <p:nvSpPr>
+          <p:cNvPr id="2" name="Shape 0"/>
+          <p:cNvSpPr/>
+          <p:nvPr/>
+        </p:nvSpPr>
+        <p:spPr>
+          <a:xfrm>
+            <a:off x="457200" y="384048"/>
+            <a:ext cx="530352" cy="530352"/>
+          </a:xfrm>
+          <a:prstGeom prst="ellipse">
+            <a:avLst/>
+          </a:prstGeom>
+          <a:solidFill>
+            <a:srgbClr val="E35205"/>
+          </a:solidFill>
+          <a:ln/>
+          <a:effectLst>
+            <a:outerShdw sx="100000" sy="100000" kx="0" ky="0" algn="bl" rotWithShape="0" blurRad="76200" dist="25400" dir="5400000">
+              <a:srgbClr val="000000">
+                <a:alpha val="12000"/>
+              </a:srgbClr>
+            </a:outerShdw>
+          </a:effectLst>
+        </p:spPr>
+      </p:sp>
+      <p:pic>
+        <p:nvPicPr>
+          <p:cNvPr id="3" name="Image 0" descr="preencoded.png">    </p:cNvPr>
+          <p:cNvPicPr>
+            <a:picLocks noChangeAspect="1"/>
+          </p:cNvPicPr>
+          <p:nvPr/>
+        </p:nvPicPr>
+        <p:blipFill>
+          <a:blip r:embed="rId1"/>
+          <a:stretch>
+            <a:fillRect/>
+          </a:stretch>
+        </p:blipFill>
+        <p:spPr>
+          <a:xfrm>
+            <a:off x="594360" y="521208"/>
+            <a:ext cx="256032" cy="256032"/>
+          </a:xfrm>
+          <a:prstGeom prst="rect">
+            <a:avLst/>
+          </a:prstGeom>
+        </p:spPr>
+      </p:pic>
+      <p:sp>
+        <p:nvSpPr>
+          <p:cNvPr id="4" name="Text 1"/>
+          <p:cNvSpPr/>
+          <p:nvPr/>
+        </p:nvSpPr>
+        <p:spPr>
+          <a:xfrm>
+            <a:off x="1143000" y="329184"/>
+            <a:ext cx="7498080" cy="603504"/>
+          </a:xfrm>
+          <a:prstGeom prst="rect">
+            <a:avLst/>
+          </a:prstGeom>
+          <a:noFill/>
+          <a:ln/>
+        </p:spPr>
+        <p:txBody>
+          <a:bodyPr wrap="square" lIns="0" tIns="0" rIns="0" bIns="0" rtlCol="0" anchor="ctr"/>
+          <a:lstStyle/>
+          <a:p>
+            <a:pPr indent="0" marL="0">
+              <a:buNone/>
+            </a:pPr>
+            <a:r>
+              <a:rPr lang="en-US" sz="2600" b="1" dirty="0">
+                <a:solidFill>
+                  <a:srgbClr val="1F2937"/>
+                </a:solidFill>
+                <a:latin typeface="Arial" pitchFamily="34" charset="0"/>
+                <a:ea typeface="Arial" pitchFamily="34" charset="-122"/>
+                <a:cs typeface="Arial" pitchFamily="34" charset="-120"/>
+              </a:rPr>
               <a:t>Tool — Burp Suite workflow</a:t>
             </a:r>
             <a:endParaRPr lang="en-US" sz="2600" dirty="0"/>
@@ -5221,7 +5695,7 @@
       </p:sp>
       <p:graphicFrame>
         <p:nvGraphicFramePr>
-          <p:cNvPr id="16" name="Table 0"/>
+          <p:cNvPr id="17" name="Table 0"/>
           <p:cNvGraphicFramePr>
             <a:graphicFrameLocks noGrp="1"/>
           </p:cNvGraphicFramePr>
@@ -6035,491 +6509,6 @@
 </p:sld>
 </file>
 
-<file path=ppt/slides/slide16.xml><?xml version="1.0" encoding="utf-8"?>
-<p:sld xmlns:a="http://schemas.openxmlformats.org/drawingml/2006/main" xmlns:r="http://schemas.openxmlformats.org/officeDocument/2006/relationships" xmlns:p="http://schemas.openxmlformats.org/presentationml/2006/main">
-  <p:cSld name="Slide 16">
-    <p:bg>
-      <p:bgPr>
-        <a:solidFill>
-          <a:srgbClr val="FFFFFF"/>
-        </a:solidFill>
-      </p:bgPr>
-    </p:bg>
-    <p:spTree>
-      <p:nvGrpSpPr>
-        <p:cNvPr id="1" name=""/>
-        <p:cNvGrpSpPr/>
-        <p:nvPr/>
-      </p:nvGrpSpPr>
-      <p:grpSpPr>
-        <a:xfrm>
-          <a:off x="0" y="0"/>
-          <a:ext cx="0" cy="0"/>
-          <a:chOff x="0" y="0"/>
-          <a:chExt cx="0" cy="0"/>
-        </a:xfrm>
-      </p:grpSpPr>
-      <p:sp>
-        <p:nvSpPr>
-          <p:cNvPr id="2" name="Shape 0"/>
-          <p:cNvSpPr/>
-          <p:nvPr/>
-        </p:nvSpPr>
-        <p:spPr>
-          <a:xfrm>
-            <a:off x="457200" y="384048"/>
-            <a:ext cx="530352" cy="530352"/>
-          </a:xfrm>
-          <a:prstGeom prst="ellipse">
-            <a:avLst/>
-          </a:prstGeom>
-          <a:solidFill>
-            <a:srgbClr val="E35205"/>
-          </a:solidFill>
-          <a:ln/>
-          <a:effectLst>
-            <a:outerShdw sx="100000" sy="100000" kx="0" ky="0" algn="bl" rotWithShape="0" blurRad="76200" dist="25400" dir="5400000">
-              <a:srgbClr val="000000">
-                <a:alpha val="12000"/>
-              </a:srgbClr>
-            </a:outerShdw>
-          </a:effectLst>
-        </p:spPr>
-      </p:sp>
-      <p:pic>
-        <p:nvPicPr>
-          <p:cNvPr id="3" name="Image 0" descr="preencoded.png">    </p:cNvPr>
-          <p:cNvPicPr>
-            <a:picLocks noChangeAspect="1"/>
-          </p:cNvPicPr>
-          <p:nvPr/>
-        </p:nvPicPr>
-        <p:blipFill>
-          <a:blip r:embed="rId1"/>
-          <a:stretch>
-            <a:fillRect/>
-          </a:stretch>
-        </p:blipFill>
-        <p:spPr>
-          <a:xfrm>
-            <a:off x="594360" y="521208"/>
-            <a:ext cx="256032" cy="256032"/>
-          </a:xfrm>
-          <a:prstGeom prst="rect">
-            <a:avLst/>
-          </a:prstGeom>
-        </p:spPr>
-      </p:pic>
-      <p:sp>
-        <p:nvSpPr>
-          <p:cNvPr id="4" name="Text 1"/>
-          <p:cNvSpPr/>
-          <p:nvPr/>
-        </p:nvSpPr>
-        <p:spPr>
-          <a:xfrm>
-            <a:off x="1143000" y="329184"/>
-            <a:ext cx="7498080" cy="603504"/>
-          </a:xfrm>
-          <a:prstGeom prst="rect">
-            <a:avLst/>
-          </a:prstGeom>
-          <a:noFill/>
-          <a:ln/>
-        </p:spPr>
-        <p:txBody>
-          <a:bodyPr wrap="square" lIns="0" tIns="0" rIns="0" bIns="0" rtlCol="0" anchor="ctr"/>
-          <a:lstStyle/>
-          <a:p>
-            <a:pPr indent="0" marL="0">
-              <a:buNone/>
-            </a:pPr>
-            <a:r>
-              <a:rPr lang="en-US" sz="2600" b="1" dirty="0">
-                <a:solidFill>
-                  <a:srgbClr val="1F2937"/>
-                </a:solidFill>
-                <a:latin typeface="Arial" pitchFamily="34" charset="0"/>
-                <a:ea typeface="Arial" pitchFamily="34" charset="-122"/>
-                <a:cs typeface="Arial" pitchFamily="34" charset="-120"/>
-              </a:rPr>
-              <a:t>🗺️ Game — IDOR Treasure Hunt + JWT Forgery</a:t>
-            </a:r>
-            <a:endParaRPr lang="en-US" sz="2600" dirty="0"/>
-          </a:p>
-        </p:txBody>
-      </p:sp>
-      <p:sp>
-        <p:nvSpPr>
-          <p:cNvPr id="5" name="Shape 2"/>
-          <p:cNvSpPr/>
-          <p:nvPr/>
-        </p:nvSpPr>
-        <p:spPr>
-          <a:xfrm>
-            <a:off x="502920" y="1325880"/>
-            <a:ext cx="384048" cy="384048"/>
-          </a:xfrm>
-          <a:prstGeom prst="ellipse">
-            <a:avLst/>
-          </a:prstGeom>
-          <a:solidFill>
-            <a:srgbClr val="E35205"/>
-          </a:solidFill>
-          <a:ln/>
-        </p:spPr>
-      </p:sp>
-      <p:sp>
-        <p:nvSpPr>
-          <p:cNvPr id="6" name="Text 3"/>
-          <p:cNvSpPr/>
-          <p:nvPr/>
-        </p:nvSpPr>
-        <p:spPr>
-          <a:xfrm>
-            <a:off x="502920" y="1325880"/>
-            <a:ext cx="384048" cy="384048"/>
-          </a:xfrm>
-          <a:prstGeom prst="rect">
-            <a:avLst/>
-          </a:prstGeom>
-          <a:noFill/>
-          <a:ln/>
-        </p:spPr>
-        <p:txBody>
-          <a:bodyPr wrap="square" lIns="0" tIns="0" rIns="0" bIns="0" rtlCol="0" anchor="ctr"/>
-          <a:lstStyle/>
-          <a:p>
-            <a:pPr algn="ctr" indent="0" marL="0">
-              <a:buNone/>
-            </a:pPr>
-            <a:r>
-              <a:rPr lang="en-US" sz="1500" b="1" dirty="0">
-                <a:solidFill>
-                  <a:srgbClr val="0E1726"/>
-                </a:solidFill>
-                <a:latin typeface="Arial" pitchFamily="34" charset="0"/>
-                <a:ea typeface="Arial" pitchFamily="34" charset="-122"/>
-                <a:cs typeface="Arial" pitchFamily="34" charset="-120"/>
-              </a:rPr>
-              <a:t>1</a:t>
-            </a:r>
-            <a:endParaRPr lang="en-US" sz="1500" dirty="0"/>
-          </a:p>
-        </p:txBody>
-      </p:sp>
-      <p:sp>
-        <p:nvSpPr>
-          <p:cNvPr id="7" name="Text 4"/>
-          <p:cNvSpPr/>
-          <p:nvPr/>
-        </p:nvSpPr>
-        <p:spPr>
-          <a:xfrm>
-            <a:off x="1051560" y="1325880"/>
-            <a:ext cx="7589520" cy="658368"/>
-          </a:xfrm>
-          <a:prstGeom prst="rect">
-            <a:avLst/>
-          </a:prstGeom>
-          <a:noFill/>
-          <a:ln/>
-        </p:spPr>
-        <p:txBody>
-          <a:bodyPr wrap="square" lIns="0" tIns="0" rIns="0" bIns="0" rtlCol="0" anchor="ctr">
-            <a:normAutofit/>
-          </a:bodyPr>
-          <a:lstStyle/>
-          <a:p>
-            <a:pPr indent="0" marL="0">
-              <a:buNone/>
-            </a:pPr>
-            <a:r>
-              <a:rPr lang="en-US" sz="1350" dirty="0">
-                <a:solidFill>
-                  <a:srgbClr val="1F2937"/>
-                </a:solidFill>
-                <a:latin typeface="Calibri" pitchFamily="34" charset="0"/>
-                <a:ea typeface="Calibri" pitchFamily="34" charset="-122"/>
-                <a:cs typeface="Calibri" pitchFamily="34" charset="-120"/>
-              </a:rPr>
-              <a:t>Tamper object IDs to reach another user's data (horizontal — become "bob," not admin) → each secret = a flag</a:t>
-            </a:r>
-            <a:endParaRPr lang="en-US" sz="1350" dirty="0"/>
-          </a:p>
-        </p:txBody>
-      </p:sp>
-      <p:sp>
-        <p:nvSpPr>
-          <p:cNvPr id="8" name="Shape 5"/>
-          <p:cNvSpPr/>
-          <p:nvPr/>
-        </p:nvSpPr>
-        <p:spPr>
-          <a:xfrm>
-            <a:off x="502920" y="2057400"/>
-            <a:ext cx="384048" cy="384048"/>
-          </a:xfrm>
-          <a:prstGeom prst="ellipse">
-            <a:avLst/>
-          </a:prstGeom>
-          <a:solidFill>
-            <a:srgbClr val="E35205"/>
-          </a:solidFill>
-          <a:ln/>
-        </p:spPr>
-      </p:sp>
-      <p:sp>
-        <p:nvSpPr>
-          <p:cNvPr id="9" name="Text 6"/>
-          <p:cNvSpPr/>
-          <p:nvPr/>
-        </p:nvSpPr>
-        <p:spPr>
-          <a:xfrm>
-            <a:off x="502920" y="2057400"/>
-            <a:ext cx="384048" cy="384048"/>
-          </a:xfrm>
-          <a:prstGeom prst="rect">
-            <a:avLst/>
-          </a:prstGeom>
-          <a:noFill/>
-          <a:ln/>
-        </p:spPr>
-        <p:txBody>
-          <a:bodyPr wrap="square" lIns="0" tIns="0" rIns="0" bIns="0" rtlCol="0" anchor="ctr"/>
-          <a:lstStyle/>
-          <a:p>
-            <a:pPr algn="ctr" indent="0" marL="0">
-              <a:buNone/>
-            </a:pPr>
-            <a:r>
-              <a:rPr lang="en-US" sz="1500" b="1" dirty="0">
-                <a:solidFill>
-                  <a:srgbClr val="0E1726"/>
-                </a:solidFill>
-                <a:latin typeface="Arial" pitchFamily="34" charset="0"/>
-                <a:ea typeface="Arial" pitchFamily="34" charset="-122"/>
-                <a:cs typeface="Arial" pitchFamily="34" charset="-120"/>
-              </a:rPr>
-              <a:t>2</a:t>
-            </a:r>
-            <a:endParaRPr lang="en-US" sz="1500" dirty="0"/>
-          </a:p>
-        </p:txBody>
-      </p:sp>
-      <p:sp>
-        <p:nvSpPr>
-          <p:cNvPr id="10" name="Text 7"/>
-          <p:cNvSpPr/>
-          <p:nvPr/>
-        </p:nvSpPr>
-        <p:spPr>
-          <a:xfrm>
-            <a:off x="1051560" y="2057400"/>
-            <a:ext cx="7589520" cy="402336"/>
-          </a:xfrm>
-          <a:prstGeom prst="rect">
-            <a:avLst/>
-          </a:prstGeom>
-          <a:noFill/>
-          <a:ln/>
-        </p:spPr>
-        <p:txBody>
-          <a:bodyPr wrap="square" lIns="0" tIns="0" rIns="0" bIns="0" rtlCol="0" anchor="ctr">
-            <a:normAutofit/>
-          </a:bodyPr>
-          <a:lstStyle/>
-          <a:p>
-            <a:pPr indent="0" marL="0">
-              <a:buNone/>
-            </a:pPr>
-            <a:r>
-              <a:rPr lang="en-US" sz="1350" dirty="0">
-                <a:solidFill>
-                  <a:srgbClr val="1F2937"/>
-                </a:solidFill>
-                <a:latin typeface="Calibri" pitchFamily="34" charset="0"/>
-                <a:ea typeface="Calibri" pitchFamily="34" charset="-122"/>
-                <a:cs typeface="Calibri" pitchFamily="34" charset="-120"/>
-              </a:rPr>
-              <a:t>Forge a weak JWT two ways: alg:none, then crack the hardcoded HMAC secret</a:t>
-            </a:r>
-            <a:endParaRPr lang="en-US" sz="1350" dirty="0"/>
-          </a:p>
-        </p:txBody>
-      </p:sp>
-      <p:sp>
-        <p:nvSpPr>
-          <p:cNvPr id="11" name="Shape 8"/>
-          <p:cNvSpPr/>
-          <p:nvPr/>
-        </p:nvSpPr>
-        <p:spPr>
-          <a:xfrm>
-            <a:off x="502920" y="2532888"/>
-            <a:ext cx="384048" cy="384048"/>
-          </a:xfrm>
-          <a:prstGeom prst="ellipse">
-            <a:avLst/>
-          </a:prstGeom>
-          <a:solidFill>
-            <a:srgbClr val="E35205"/>
-          </a:solidFill>
-          <a:ln/>
-        </p:spPr>
-      </p:sp>
-      <p:sp>
-        <p:nvSpPr>
-          <p:cNvPr id="12" name="Text 9"/>
-          <p:cNvSpPr/>
-          <p:nvPr/>
-        </p:nvSpPr>
-        <p:spPr>
-          <a:xfrm>
-            <a:off x="502920" y="2532888"/>
-            <a:ext cx="384048" cy="384048"/>
-          </a:xfrm>
-          <a:prstGeom prst="rect">
-            <a:avLst/>
-          </a:prstGeom>
-          <a:noFill/>
-          <a:ln/>
-        </p:spPr>
-        <p:txBody>
-          <a:bodyPr wrap="square" lIns="0" tIns="0" rIns="0" bIns="0" rtlCol="0" anchor="ctr"/>
-          <a:lstStyle/>
-          <a:p>
-            <a:pPr algn="ctr" indent="0" marL="0">
-              <a:buNone/>
-            </a:pPr>
-            <a:r>
-              <a:rPr lang="en-US" sz="1500" b="1" dirty="0">
-                <a:solidFill>
-                  <a:srgbClr val="0E1726"/>
-                </a:solidFill>
-                <a:latin typeface="Arial" pitchFamily="34" charset="0"/>
-                <a:ea typeface="Arial" pitchFamily="34" charset="-122"/>
-                <a:cs typeface="Arial" pitchFamily="34" charset="-120"/>
-              </a:rPr>
-              <a:t>3</a:t>
-            </a:r>
-            <a:endParaRPr lang="en-US" sz="1500" dirty="0"/>
-          </a:p>
-        </p:txBody>
-      </p:sp>
-      <p:sp>
-        <p:nvSpPr>
-          <p:cNvPr id="13" name="Text 10"/>
-          <p:cNvSpPr/>
-          <p:nvPr/>
-        </p:nvSpPr>
-        <p:spPr>
-          <a:xfrm>
-            <a:off x="1051560" y="2532888"/>
-            <a:ext cx="7589520" cy="658368"/>
-          </a:xfrm>
-          <a:prstGeom prst="rect">
-            <a:avLst/>
-          </a:prstGeom>
-          <a:noFill/>
-          <a:ln/>
-        </p:spPr>
-        <p:txBody>
-          <a:bodyPr wrap="square" lIns="0" tIns="0" rIns="0" bIns="0" rtlCol="0" anchor="ctr">
-            <a:normAutofit/>
-          </a:bodyPr>
-          <a:lstStyle/>
-          <a:p>
-            <a:pPr indent="0" marL="0">
-              <a:buNone/>
-            </a:pPr>
-            <a:r>
-              <a:rPr lang="en-US" sz="1350" dirty="0">
-                <a:solidFill>
-                  <a:srgbClr val="1F2937"/>
-                </a:solidFill>
-                <a:latin typeface="Calibri" pitchFamily="34" charset="0"/>
-                <a:ea typeface="Calibri" pitchFamily="34" charset="-122"/>
-                <a:cs typeface="Calibri" pitchFamily="34" charset="-120"/>
-              </a:rPr>
-              <a:t>Defend: switch to solution_app.py (already fixed), prove it blocks all three attacks (403 + two 401s), cite the exact fix line for each</a:t>
-            </a:r>
-            <a:endParaRPr lang="en-US" sz="1350" dirty="0"/>
-          </a:p>
-        </p:txBody>
-      </p:sp>
-      <p:sp>
-        <p:nvSpPr>
-          <p:cNvPr id="14" name="Text 11"/>
-          <p:cNvSpPr/>
-          <p:nvPr/>
-        </p:nvSpPr>
-        <p:spPr>
-          <a:xfrm>
-            <a:off x="457200" y="4800600"/>
-            <a:ext cx="6949440" cy="274320"/>
-          </a:xfrm>
-          <a:prstGeom prst="rect">
-            <a:avLst/>
-          </a:prstGeom>
-          <a:noFill/>
-          <a:ln/>
-        </p:spPr>
-        <p:txBody>
-          <a:bodyPr wrap="square" lIns="0" tIns="0" rIns="0" bIns="0" rtlCol="0" anchor="ctr"/>
-          <a:lstStyle/>
-          <a:p>
-            <a:pPr indent="0" marL="0">
-              <a:buNone/>
-            </a:pPr>
-            <a:r>
-              <a:rPr lang="en-US" sz="900" dirty="0">
-                <a:solidFill>
-                  <a:srgbClr val="64748B"/>
-                </a:solidFill>
-                <a:latin typeface="Calibri" pitchFamily="34" charset="0"/>
-                <a:ea typeface="Calibri" pitchFamily="34" charset="-122"/>
-                <a:cs typeface="Calibri" pitchFamily="34" charset="-120"/>
-              </a:rPr>
-              <a:t>Software Security · Week 6</a:t>
-            </a:r>
-            <a:endParaRPr lang="en-US" sz="900" dirty="0"/>
-          </a:p>
-        </p:txBody>
-      </p:sp>
-      <p:pic>
-        <p:nvPicPr>
-          <p:cNvPr id="15" name="Image 1" descr="/Users/pop7/Library/CloudStorage/OneDrive-MonsterConnectCo.,Ltd/Lecture/KOSEN69 - software-security/slides/pptx/assets/logo-small.png">    </p:cNvPr>
-          <p:cNvPicPr>
-            <a:picLocks noChangeAspect="1"/>
-          </p:cNvPicPr>
-          <p:nvPr/>
-        </p:nvPicPr>
-        <p:blipFill>
-          <a:blip r:embed="rId2"/>
-          <a:stretch>
-            <a:fillRect/>
-          </a:stretch>
-        </p:blipFill>
-        <p:spPr>
-          <a:xfrm>
-            <a:off x="7882128" y="4700016"/>
-            <a:ext cx="768096" cy="356616"/>
-          </a:xfrm>
-          <a:prstGeom prst="rect">
-            <a:avLst/>
-          </a:prstGeom>
-        </p:spPr>
-      </p:pic>
-    </p:spTree>
-  </p:cSld>
-  <p:clrMapOvr>
-    <a:masterClrMapping/>
-  </p:clrMapOvr>
-</p:sld>
-</file>
-
 <file path=ppt/slides/slide17.xml><?xml version="1.0" encoding="utf-8"?>
 <p:sld xmlns:a="http://schemas.openxmlformats.org/drawingml/2006/main" xmlns:r="http://schemas.openxmlformats.org/officeDocument/2006/relationships" xmlns:p="http://schemas.openxmlformats.org/presentationml/2006/main">
   <p:cSld name="Slide 17">
@@ -6628,7 +6617,7 @@
                 <a:ea typeface="Arial" pitchFamily="34" charset="-122"/>
                 <a:cs typeface="Arial" pitchFamily="34" charset="-120"/>
               </a:rPr>
-              <a:t>Lab steps</a:t>
+              <a:t>🗺️ Game — IDOR Treasure Hunt + JWT Forgery</a:t>
             </a:r>
             <a:endParaRPr lang="en-US" sz="2600" dirty="0"/>
           </a:p>
@@ -6642,16 +6631,14 @@
         </p:nvSpPr>
         <p:spPr>
           <a:xfrm>
-            <a:off x="457200" y="1325880"/>
-            <a:ext cx="8229600" cy="822960"/>
-          </a:xfrm>
-          <a:prstGeom prst="roundRect">
-            <a:avLst>
-              <a:gd name="adj" fmla="val 8889"/>
-            </a:avLst>
+            <a:off x="502920" y="1325880"/>
+            <a:ext cx="384048" cy="384048"/>
+          </a:xfrm>
+          <a:prstGeom prst="ellipse">
+            <a:avLst/>
           </a:prstGeom>
           <a:solidFill>
-            <a:srgbClr val="E8EDF3"/>
+            <a:srgbClr val="E35205"/>
           </a:solidFill>
           <a:ln/>
         </p:spPr>
@@ -6664,8 +6651,47 @@
         </p:nvSpPr>
         <p:spPr>
           <a:xfrm>
-            <a:off x="731520" y="1325880"/>
-            <a:ext cx="7680960" cy="822960"/>
+            <a:off x="502920" y="1325880"/>
+            <a:ext cx="384048" cy="384048"/>
+          </a:xfrm>
+          <a:prstGeom prst="rect">
+            <a:avLst/>
+          </a:prstGeom>
+          <a:noFill/>
+          <a:ln/>
+        </p:spPr>
+        <p:txBody>
+          <a:bodyPr wrap="square" lIns="0" tIns="0" rIns="0" bIns="0" rtlCol="0" anchor="ctr"/>
+          <a:lstStyle/>
+          <a:p>
+            <a:pPr algn="ctr" indent="0" marL="0">
+              <a:buNone/>
+            </a:pPr>
+            <a:r>
+              <a:rPr lang="en-US" sz="1500" b="1" dirty="0">
+                <a:solidFill>
+                  <a:srgbClr val="0E1726"/>
+                </a:solidFill>
+                <a:latin typeface="Arial" pitchFamily="34" charset="0"/>
+                <a:ea typeface="Arial" pitchFamily="34" charset="-122"/>
+                <a:cs typeface="Arial" pitchFamily="34" charset="-120"/>
+              </a:rPr>
+              <a:t>1</a:t>
+            </a:r>
+            <a:endParaRPr lang="en-US" sz="1500" dirty="0"/>
+          </a:p>
+        </p:txBody>
+      </p:sp>
+      <p:sp>
+        <p:nvSpPr>
+          <p:cNvPr id="7" name="Text 4"/>
+          <p:cNvSpPr/>
+          <p:nvPr/>
+        </p:nvSpPr>
+        <p:spPr>
+          <a:xfrm>
+            <a:off x="1051560" y="1325880"/>
+            <a:ext cx="7589520" cy="658368"/>
           </a:xfrm>
           <a:prstGeom prst="rect">
             <a:avLst/>
@@ -6683,29 +6709,29 @@
               <a:buNone/>
             </a:pPr>
             <a:r>
-              <a:rPr lang="en-US" sz="1400" i="1" dirty="0">
-                <a:solidFill>
-                  <a:srgbClr val="E35205"/>
+              <a:rPr lang="en-US" sz="1350" dirty="0">
+                <a:solidFill>
+                  <a:srgbClr val="1F2937"/>
                 </a:solidFill>
                 <a:latin typeface="Calibri" pitchFamily="34" charset="0"/>
                 <a:ea typeface="Calibri" pitchFamily="34" charset="-122"/>
                 <a:cs typeface="Calibri" pitchFamily="34" charset="-120"/>
               </a:rPr>
-              <a:t>📋 Worksheet 6 — labs/week06-authn-authz/worksheet.md (Part 3) · kickoff: docker compose up → http://localhost:8080</a:t>
-            </a:r>
-            <a:endParaRPr lang="en-US" sz="1400" dirty="0"/>
-          </a:p>
-        </p:txBody>
-      </p:sp>
-      <p:sp>
-        <p:nvSpPr>
-          <p:cNvPr id="7" name="Shape 4"/>
-          <p:cNvSpPr/>
-          <p:nvPr/>
-        </p:nvSpPr>
-        <p:spPr>
-          <a:xfrm>
-            <a:off x="502920" y="2313432"/>
+              <a:t>Tamper object IDs to reach another user's data (horizontal — become "bob," not admin) → each secret = a flag</a:t>
+            </a:r>
+            <a:endParaRPr lang="en-US" sz="1350" dirty="0"/>
+          </a:p>
+        </p:txBody>
+      </p:sp>
+      <p:sp>
+        <p:nvSpPr>
+          <p:cNvPr id="8" name="Shape 5"/>
+          <p:cNvSpPr/>
+          <p:nvPr/>
+        </p:nvSpPr>
+        <p:spPr>
+          <a:xfrm>
+            <a:off x="502920" y="2057400"/>
             <a:ext cx="384048" cy="384048"/>
           </a:xfrm>
           <a:prstGeom prst="ellipse">
@@ -6719,13 +6745,13 @@
       </p:sp>
       <p:sp>
         <p:nvSpPr>
-          <p:cNvPr id="8" name="Text 5"/>
-          <p:cNvSpPr/>
-          <p:nvPr/>
-        </p:nvSpPr>
-        <p:spPr>
-          <a:xfrm>
-            <a:off x="502920" y="2313432"/>
+          <p:cNvPr id="9" name="Text 6"/>
+          <p:cNvSpPr/>
+          <p:nvPr/>
+        </p:nvSpPr>
+        <p:spPr>
+          <a:xfrm>
+            <a:off x="502920" y="2057400"/>
             <a:ext cx="384048" cy="384048"/>
           </a:xfrm>
           <a:prstGeom prst="rect">
@@ -6750,7 +6776,7 @@
                 <a:ea typeface="Arial" pitchFamily="34" charset="-122"/>
                 <a:cs typeface="Arial" pitchFamily="34" charset="-120"/>
               </a:rPr>
-              <a:t>1</a:t>
+              <a:t>2</a:t>
             </a:r>
             <a:endParaRPr lang="en-US" sz="1500" dirty="0"/>
           </a:p>
@@ -6758,13 +6784,13 @@
       </p:sp>
       <p:sp>
         <p:nvSpPr>
-          <p:cNvPr id="9" name="Text 6"/>
-          <p:cNvSpPr/>
-          <p:nvPr/>
-        </p:nvSpPr>
-        <p:spPr>
-          <a:xfrm>
-            <a:off x="1051560" y="2313432"/>
+          <p:cNvPr id="10" name="Text 7"/>
+          <p:cNvSpPr/>
+          <p:nvPr/>
+        </p:nvSpPr>
+        <p:spPr>
+          <a:xfrm>
+            <a:off x="1051560" y="2057400"/>
             <a:ext cx="7589520" cy="402336"/>
           </a:xfrm>
           <a:prstGeom prst="rect">
@@ -6791,7 +6817,7 @@
                 <a:ea typeface="Calibri" pitchFamily="34" charset="-122"/>
                 <a:cs typeface="Calibri" pitchFamily="34" charset="-120"/>
               </a:rPr>
-              <a:t>Find IDOR endpoints; enumerate other users' objects</a:t>
+              <a:t>Forge a weak JWT two ways: alg:none, then crack the hardcoded HMAC secret</a:t>
             </a:r>
             <a:endParaRPr lang="en-US" sz="1350" dirty="0"/>
           </a:p>
@@ -6799,13 +6825,13 @@
       </p:sp>
       <p:sp>
         <p:nvSpPr>
-          <p:cNvPr id="10" name="Shape 7"/>
-          <p:cNvSpPr/>
-          <p:nvPr/>
-        </p:nvSpPr>
-        <p:spPr>
-          <a:xfrm>
-            <a:off x="502920" y="2788920"/>
+          <p:cNvPr id="11" name="Shape 8"/>
+          <p:cNvSpPr/>
+          <p:nvPr/>
+        </p:nvSpPr>
+        <p:spPr>
+          <a:xfrm>
+            <a:off x="502920" y="2532888"/>
             <a:ext cx="384048" cy="384048"/>
           </a:xfrm>
           <a:prstGeom prst="ellipse">
@@ -6819,13 +6845,13 @@
       </p:sp>
       <p:sp>
         <p:nvSpPr>
-          <p:cNvPr id="11" name="Text 8"/>
-          <p:cNvSpPr/>
-          <p:nvPr/>
-        </p:nvSpPr>
-        <p:spPr>
-          <a:xfrm>
-            <a:off x="502920" y="2788920"/>
+          <p:cNvPr id="12" name="Text 9"/>
+          <p:cNvSpPr/>
+          <p:nvPr/>
+        </p:nvSpPr>
+        <p:spPr>
+          <a:xfrm>
+            <a:off x="502920" y="2532888"/>
             <a:ext cx="384048" cy="384048"/>
           </a:xfrm>
           <a:prstGeom prst="rect">
@@ -6850,7 +6876,7 @@
                 <a:ea typeface="Arial" pitchFamily="34" charset="-122"/>
                 <a:cs typeface="Arial" pitchFamily="34" charset="-120"/>
               </a:rPr>
-              <a:t>2</a:t>
+              <a:t>3</a:t>
             </a:r>
             <a:endParaRPr lang="en-US" sz="1500" dirty="0"/>
           </a:p>
@@ -6858,13 +6884,13 @@
       </p:sp>
       <p:sp>
         <p:nvSpPr>
-          <p:cNvPr id="12" name="Text 9"/>
-          <p:cNvSpPr/>
-          <p:nvPr/>
-        </p:nvSpPr>
-        <p:spPr>
-          <a:xfrm>
-            <a:off x="1051560" y="2788920"/>
+          <p:cNvPr id="13" name="Text 10"/>
+          <p:cNvSpPr/>
+          <p:nvPr/>
+        </p:nvSpPr>
+        <p:spPr>
+          <a:xfrm>
+            <a:off x="1051560" y="2532888"/>
             <a:ext cx="7589520" cy="658368"/>
           </a:xfrm>
           <a:prstGeom prst="rect">
@@ -6891,7 +6917,7 @@
                 <a:ea typeface="Calibri" pitchFamily="34" charset="-122"/>
                 <a:cs typeface="Calibri" pitchFamily="34" charset="-120"/>
               </a:rPr>
-              <a:t>Crack/forge a weak JWT (alg:none AND the weak HMAC secret — two separate graded attacks)</a:t>
+              <a:t>Defend: switch to solution_app.py (already fixed), prove it blocks all three attacks (403 + two 401s), cite the exact fix line for each</a:t>
             </a:r>
             <a:endParaRPr lang="en-US" sz="1350" dirty="0"/>
           </a:p>
@@ -6899,34 +6925,14 @@
       </p:sp>
       <p:sp>
         <p:nvSpPr>
-          <p:cNvPr id="13" name="Shape 10"/>
-          <p:cNvSpPr/>
-          <p:nvPr/>
-        </p:nvSpPr>
-        <p:spPr>
-          <a:xfrm>
-            <a:off x="502920" y="3520440"/>
-            <a:ext cx="384048" cy="384048"/>
-          </a:xfrm>
-          <a:prstGeom prst="ellipse">
-            <a:avLst/>
-          </a:prstGeom>
-          <a:solidFill>
-            <a:srgbClr val="E35205"/>
-          </a:solidFill>
-          <a:ln/>
-        </p:spPr>
-      </p:sp>
-      <p:sp>
-        <p:nvSpPr>
           <p:cNvPr id="14" name="Text 11"/>
           <p:cNvSpPr/>
           <p:nvPr/>
         </p:nvSpPr>
         <p:spPr>
           <a:xfrm>
-            <a:off x="502920" y="3520440"/>
-            <a:ext cx="384048" cy="384048"/>
+            <a:off x="457200" y="4800600"/>
+            <a:ext cx="6949440" cy="274320"/>
           </a:xfrm>
           <a:prstGeom prst="rect">
             <a:avLst/>
@@ -6936,200 +6942,20 @@
         </p:spPr>
         <p:txBody>
           <a:bodyPr wrap="square" lIns="0" tIns="0" rIns="0" bIns="0" rtlCol="0" anchor="ctr"/>
-          <a:lstStyle/>
-          <a:p>
-            <a:pPr algn="ctr" indent="0" marL="0">
-              <a:buNone/>
-            </a:pPr>
-            <a:r>
-              <a:rPr lang="en-US" sz="1500" b="1" dirty="0">
-                <a:solidFill>
-                  <a:srgbClr val="0E1726"/>
-                </a:solidFill>
-                <a:latin typeface="Arial" pitchFamily="34" charset="0"/>
-                <a:ea typeface="Arial" pitchFamily="34" charset="-122"/>
-                <a:cs typeface="Arial" pitchFamily="34" charset="-120"/>
-              </a:rPr>
-              <a:t>3</a:t>
-            </a:r>
-            <a:endParaRPr lang="en-US" sz="1500" dirty="0"/>
-          </a:p>
-        </p:txBody>
-      </p:sp>
-      <p:sp>
-        <p:nvSpPr>
-          <p:cNvPr id="15" name="Text 12"/>
-          <p:cNvSpPr/>
-          <p:nvPr/>
-        </p:nvSpPr>
-        <p:spPr>
-          <a:xfrm>
-            <a:off x="1051560" y="3520440"/>
-            <a:ext cx="7589520" cy="402336"/>
-          </a:xfrm>
-          <a:prstGeom prst="rect">
-            <a:avLst/>
-          </a:prstGeom>
-          <a:noFill/>
-          <a:ln/>
-        </p:spPr>
-        <p:txBody>
-          <a:bodyPr wrap="square" lIns="0" tIns="0" rIns="0" bIns="0" rtlCol="0" anchor="ctr">
-            <a:normAutofit/>
-          </a:bodyPr>
           <a:lstStyle/>
           <a:p>
             <a:pPr indent="0" marL="0">
               <a:buNone/>
             </a:pPr>
             <a:r>
-              <a:rPr lang="en-US" sz="1350" dirty="0">
-                <a:solidFill>
-                  <a:srgbClr val="1F2937"/>
+              <a:rPr lang="en-US" sz="900" dirty="0">
+                <a:solidFill>
+                  <a:srgbClr val="64748B"/>
                 </a:solidFill>
                 <a:latin typeface="Calibri" pitchFamily="34" charset="0"/>
                 <a:ea typeface="Calibri" pitchFamily="34" charset="-122"/>
                 <a:cs typeface="Calibri" pitchFamily="34" charset="-120"/>
               </a:rPr>
-              <a:t>Switch to solution_app.py; re-test: access denied</a:t>
-            </a:r>
-            <a:endParaRPr lang="en-US" sz="1350" dirty="0"/>
-          </a:p>
-        </p:txBody>
-      </p:sp>
-      <p:sp>
-        <p:nvSpPr>
-          <p:cNvPr id="16" name="Shape 13"/>
-          <p:cNvSpPr/>
-          <p:nvPr/>
-        </p:nvSpPr>
-        <p:spPr>
-          <a:xfrm>
-            <a:off x="502920" y="3995928"/>
-            <a:ext cx="384048" cy="384048"/>
-          </a:xfrm>
-          <a:prstGeom prst="ellipse">
-            <a:avLst/>
-          </a:prstGeom>
-          <a:solidFill>
-            <a:srgbClr val="E35205"/>
-          </a:solidFill>
-          <a:ln/>
-        </p:spPr>
-      </p:sp>
-      <p:sp>
-        <p:nvSpPr>
-          <p:cNvPr id="17" name="Text 14"/>
-          <p:cNvSpPr/>
-          <p:nvPr/>
-        </p:nvSpPr>
-        <p:spPr>
-          <a:xfrm>
-            <a:off x="502920" y="3995928"/>
-            <a:ext cx="384048" cy="384048"/>
-          </a:xfrm>
-          <a:prstGeom prst="rect">
-            <a:avLst/>
-          </a:prstGeom>
-          <a:noFill/>
-          <a:ln/>
-        </p:spPr>
-        <p:txBody>
-          <a:bodyPr wrap="square" lIns="0" tIns="0" rIns="0" bIns="0" rtlCol="0" anchor="ctr"/>
-          <a:lstStyle/>
-          <a:p>
-            <a:pPr algn="ctr" indent="0" marL="0">
-              <a:buNone/>
-            </a:pPr>
-            <a:r>
-              <a:rPr lang="en-US" sz="1500" b="1" dirty="0">
-                <a:solidFill>
-                  <a:srgbClr val="0E1726"/>
-                </a:solidFill>
-                <a:latin typeface="Arial" pitchFamily="34" charset="0"/>
-                <a:ea typeface="Arial" pitchFamily="34" charset="-122"/>
-                <a:cs typeface="Arial" pitchFamily="34" charset="-120"/>
-              </a:rPr>
-              <a:t>4</a:t>
-            </a:r>
-            <a:endParaRPr lang="en-US" sz="1500" dirty="0"/>
-          </a:p>
-        </p:txBody>
-      </p:sp>
-      <p:sp>
-        <p:nvSpPr>
-          <p:cNvPr id="18" name="Text 15"/>
-          <p:cNvSpPr/>
-          <p:nvPr/>
-        </p:nvSpPr>
-        <p:spPr>
-          <a:xfrm>
-            <a:off x="1051560" y="3995928"/>
-            <a:ext cx="7589520" cy="402336"/>
-          </a:xfrm>
-          <a:prstGeom prst="rect">
-            <a:avLst/>
-          </a:prstGeom>
-          <a:noFill/>
-          <a:ln/>
-        </p:spPr>
-        <p:txBody>
-          <a:bodyPr wrap="square" lIns="0" tIns="0" rIns="0" bIns="0" rtlCol="0" anchor="ctr">
-            <a:normAutofit/>
-          </a:bodyPr>
-          <a:lstStyle/>
-          <a:p>
-            <a:pPr indent="0" marL="0">
-              <a:buNone/>
-            </a:pPr>
-            <a:r>
-              <a:rPr lang="en-US" sz="1350" dirty="0">
-                <a:solidFill>
-                  <a:srgbClr val="1F2937"/>
-                </a:solidFill>
-                <a:latin typeface="Calibri" pitchFamily="34" charset="0"/>
-                <a:ea typeface="Calibri" pitchFamily="34" charset="-122"/>
-                <a:cs typeface="Calibri" pitchFamily="34" charset="-120"/>
-              </a:rPr>
-              <a:t>Cite the exact line that fixes each of the three attacks</a:t>
-            </a:r>
-            <a:endParaRPr lang="en-US" sz="1350" dirty="0"/>
-          </a:p>
-        </p:txBody>
-      </p:sp>
-      <p:sp>
-        <p:nvSpPr>
-          <p:cNvPr id="19" name="Text 16"/>
-          <p:cNvSpPr/>
-          <p:nvPr/>
-        </p:nvSpPr>
-        <p:spPr>
-          <a:xfrm>
-            <a:off x="457200" y="4800600"/>
-            <a:ext cx="6949440" cy="274320"/>
-          </a:xfrm>
-          <a:prstGeom prst="rect">
-            <a:avLst/>
-          </a:prstGeom>
-          <a:noFill/>
-          <a:ln/>
-        </p:spPr>
-        <p:txBody>
-          <a:bodyPr wrap="square" lIns="0" tIns="0" rIns="0" bIns="0" rtlCol="0" anchor="ctr"/>
-          <a:lstStyle/>
-          <a:p>
-            <a:pPr indent="0" marL="0">
-              <a:buNone/>
-            </a:pPr>
-            <a:r>
-              <a:rPr lang="en-US" sz="900" dirty="0">
-                <a:solidFill>
-                  <a:srgbClr val="64748B"/>
-                </a:solidFill>
-                <a:latin typeface="Calibri" pitchFamily="34" charset="0"/>
-                <a:ea typeface="Calibri" pitchFamily="34" charset="-122"/>
-                <a:cs typeface="Calibri" pitchFamily="34" charset="-120"/>
-              </a:rPr>
               <a:t>Software Security · Week 6</a:t>
             </a:r>
             <a:endParaRPr lang="en-US" sz="900" dirty="0"/>
@@ -7138,7 +6964,7 @@
       </p:sp>
       <p:pic>
         <p:nvPicPr>
-          <p:cNvPr id="20" name="Image 1" descr="/Users/pop7/Library/CloudStorage/OneDrive-MonsterConnectCo.,Ltd/Lecture/KOSEN69 - software-security/slides/pptx/assets/logo-small.png">    </p:cNvPr>
+          <p:cNvPr id="15" name="Image 1" descr="/Users/pop7/Library/CloudStorage/OneDrive-MonsterConnectCo.,Ltd/Lecture/KOSEN69 - software-security/slides/pptx/assets/logo-small.png">    </p:cNvPr>
           <p:cNvPicPr>
             <a:picLocks noChangeAspect="1"/>
           </p:cNvPicPr>
@@ -7276,7 +7102,7 @@
                 <a:ea typeface="Arial" pitchFamily="34" charset="-122"/>
                 <a:cs typeface="Arial" pitchFamily="34" charset="-120"/>
               </a:rPr>
-              <a:t>Deliverable</a:t>
+              <a:t>Lab steps</a:t>
             </a:r>
             <a:endParaRPr lang="en-US" sz="2600" dirty="0"/>
           </a:p>
@@ -7291,24 +7117,17 @@
         <p:spPr>
           <a:xfrm>
             <a:off x="457200" y="1325880"/>
-            <a:ext cx="8229600" cy="1517904"/>
+            <a:ext cx="8229600" cy="822960"/>
           </a:xfrm>
           <a:prstGeom prst="roundRect">
             <a:avLst>
-              <a:gd name="adj" fmla="val 4819"/>
+              <a:gd name="adj" fmla="val 8889"/>
             </a:avLst>
           </a:prstGeom>
           <a:solidFill>
-            <a:srgbClr val="F1F5F9"/>
+            <a:srgbClr val="E8EDF3"/>
           </a:solidFill>
           <a:ln/>
-          <a:effectLst>
-            <a:outerShdw sx="100000" sy="100000" kx="0" ky="0" algn="bl" rotWithShape="0" blurRad="76200" dist="25400" dir="5400000">
-              <a:srgbClr val="000000">
-                <a:alpha val="12000"/>
-              </a:srgbClr>
-            </a:outerShdw>
-          </a:effectLst>
         </p:spPr>
       </p:sp>
       <p:sp>
@@ -7319,8 +7138,8 @@
         </p:nvSpPr>
         <p:spPr>
           <a:xfrm>
-            <a:off x="731520" y="1435608"/>
-            <a:ext cx="7680960" cy="1298448"/>
+            <a:off x="731520" y="1325880"/>
+            <a:ext cx="7680960" cy="822960"/>
           </a:xfrm>
           <a:prstGeom prst="rect">
             <a:avLst/>
@@ -7329,41 +7148,116 @@
           <a:ln/>
         </p:spPr>
         <p:txBody>
-          <a:bodyPr wrap="square" lIns="0" tIns="0" rIns="0" bIns="0" rtlCol="0" anchor="t">
+          <a:bodyPr wrap="square" lIns="0" tIns="0" rIns="0" bIns="0" rtlCol="0" anchor="ctr">
             <a:normAutofit/>
           </a:bodyPr>
           <a:lstStyle/>
           <a:p>
-            <a:pPr marL="342900" indent="-342900">
-              <a:spcAft>
-                <a:spcPts val="600"/>
-              </a:spcAft>
-              <a:buSzPct val="100000"/>
-              <a:buChar char="•"/>
-            </a:pPr>
-            <a:r>
-              <a:rPr lang="en-US" sz="1400" dirty="0">
-                <a:solidFill>
-                  <a:srgbClr val="1F2937"/>
+            <a:pPr indent="0" marL="0">
+              <a:buNone/>
+            </a:pPr>
+            <a:r>
+              <a:rPr lang="en-US" sz="1400" i="1" dirty="0">
+                <a:solidFill>
+                  <a:srgbClr val="E35205"/>
                 </a:solidFill>
                 <a:latin typeface="Calibri" pitchFamily="34" charset="0"/>
                 <a:ea typeface="Calibri" pitchFamily="34" charset="-122"/>
                 <a:cs typeface="Calibri" pitchFamily="34" charset="-120"/>
               </a:rPr>
-              <a:t>IDOR + JWT findings with impact</a:t>
+              <a:t>📋 Worksheet 6 — labs/week06-authn-authz/worksheet.md (Part 3) · kickoff: docker compose up → http://localhost:8080</a:t>
             </a:r>
             <a:endParaRPr lang="en-US" sz="1400" dirty="0"/>
           </a:p>
-          <a:p>
-            <a:pPr marL="342900" indent="-342900">
-              <a:spcAft>
-                <a:spcPts val="600"/>
-              </a:spcAft>
-              <a:buSzPct val="100000"/>
-              <a:buChar char="•"/>
-            </a:pPr>
-            <a:r>
-              <a:rPr lang="en-US" sz="1400" dirty="0">
+        </p:txBody>
+      </p:sp>
+      <p:sp>
+        <p:nvSpPr>
+          <p:cNvPr id="7" name="Shape 4"/>
+          <p:cNvSpPr/>
+          <p:nvPr/>
+        </p:nvSpPr>
+        <p:spPr>
+          <a:xfrm>
+            <a:off x="502920" y="2313432"/>
+            <a:ext cx="384048" cy="384048"/>
+          </a:xfrm>
+          <a:prstGeom prst="ellipse">
+            <a:avLst/>
+          </a:prstGeom>
+          <a:solidFill>
+            <a:srgbClr val="E35205"/>
+          </a:solidFill>
+          <a:ln/>
+        </p:spPr>
+      </p:sp>
+      <p:sp>
+        <p:nvSpPr>
+          <p:cNvPr id="8" name="Text 5"/>
+          <p:cNvSpPr/>
+          <p:nvPr/>
+        </p:nvSpPr>
+        <p:spPr>
+          <a:xfrm>
+            <a:off x="502920" y="2313432"/>
+            <a:ext cx="384048" cy="384048"/>
+          </a:xfrm>
+          <a:prstGeom prst="rect">
+            <a:avLst/>
+          </a:prstGeom>
+          <a:noFill/>
+          <a:ln/>
+        </p:spPr>
+        <p:txBody>
+          <a:bodyPr wrap="square" lIns="0" tIns="0" rIns="0" bIns="0" rtlCol="0" anchor="ctr"/>
+          <a:lstStyle/>
+          <a:p>
+            <a:pPr algn="ctr" indent="0" marL="0">
+              <a:buNone/>
+            </a:pPr>
+            <a:r>
+              <a:rPr lang="en-US" sz="1500" b="1" dirty="0">
+                <a:solidFill>
+                  <a:srgbClr val="0E1726"/>
+                </a:solidFill>
+                <a:latin typeface="Arial" pitchFamily="34" charset="0"/>
+                <a:ea typeface="Arial" pitchFamily="34" charset="-122"/>
+                <a:cs typeface="Arial" pitchFamily="34" charset="-120"/>
+              </a:rPr>
+              <a:t>1</a:t>
+            </a:r>
+            <a:endParaRPr lang="en-US" sz="1500" dirty="0"/>
+          </a:p>
+        </p:txBody>
+      </p:sp>
+      <p:sp>
+        <p:nvSpPr>
+          <p:cNvPr id="9" name="Text 6"/>
+          <p:cNvSpPr/>
+          <p:nvPr/>
+        </p:nvSpPr>
+        <p:spPr>
+          <a:xfrm>
+            <a:off x="1051560" y="2313432"/>
+            <a:ext cx="7589520" cy="402336"/>
+          </a:xfrm>
+          <a:prstGeom prst="rect">
+            <a:avLst/>
+          </a:prstGeom>
+          <a:noFill/>
+          <a:ln/>
+        </p:spPr>
+        <p:txBody>
+          <a:bodyPr wrap="square" lIns="0" tIns="0" rIns="0" bIns="0" rtlCol="0" anchor="ctr">
+            <a:normAutofit/>
+          </a:bodyPr>
+          <a:lstStyle/>
+          <a:p>
+            <a:pPr indent="0" marL="0">
+              <a:buNone/>
+            </a:pPr>
+            <a:r>
+              <a:rPr lang="en-US" sz="1350" dirty="0">
                 <a:solidFill>
                   <a:srgbClr val="1F2937"/>
                 </a:solidFill>
@@ -7371,20 +7265,99 @@
                 <a:ea typeface="Calibri" pitchFamily="34" charset="-122"/>
                 <a:cs typeface="Calibri" pitchFamily="34" charset="-120"/>
               </a:rPr>
-              <a:t>Citation of the fix lines in solution_app.py for all three attacks</a:t>
-            </a:r>
-            <a:endParaRPr lang="en-US" sz="1400" dirty="0"/>
-          </a:p>
-          <a:p>
-            <a:pPr marL="342900" indent="-342900">
-              <a:spcAft>
-                <a:spcPts val="600"/>
-              </a:spcAft>
-              <a:buSzPct val="100000"/>
-              <a:buChar char="•"/>
-            </a:pPr>
-            <a:r>
-              <a:rPr lang="en-US" sz="1400" dirty="0">
+              <a:t>Find IDOR endpoints; enumerate other users' objects</a:t>
+            </a:r>
+            <a:endParaRPr lang="en-US" sz="1350" dirty="0"/>
+          </a:p>
+        </p:txBody>
+      </p:sp>
+      <p:sp>
+        <p:nvSpPr>
+          <p:cNvPr id="10" name="Shape 7"/>
+          <p:cNvSpPr/>
+          <p:nvPr/>
+        </p:nvSpPr>
+        <p:spPr>
+          <a:xfrm>
+            <a:off x="502920" y="2788920"/>
+            <a:ext cx="384048" cy="384048"/>
+          </a:xfrm>
+          <a:prstGeom prst="ellipse">
+            <a:avLst/>
+          </a:prstGeom>
+          <a:solidFill>
+            <a:srgbClr val="E35205"/>
+          </a:solidFill>
+          <a:ln/>
+        </p:spPr>
+      </p:sp>
+      <p:sp>
+        <p:nvSpPr>
+          <p:cNvPr id="11" name="Text 8"/>
+          <p:cNvSpPr/>
+          <p:nvPr/>
+        </p:nvSpPr>
+        <p:spPr>
+          <a:xfrm>
+            <a:off x="502920" y="2788920"/>
+            <a:ext cx="384048" cy="384048"/>
+          </a:xfrm>
+          <a:prstGeom prst="rect">
+            <a:avLst/>
+          </a:prstGeom>
+          <a:noFill/>
+          <a:ln/>
+        </p:spPr>
+        <p:txBody>
+          <a:bodyPr wrap="square" lIns="0" tIns="0" rIns="0" bIns="0" rtlCol="0" anchor="ctr"/>
+          <a:lstStyle/>
+          <a:p>
+            <a:pPr algn="ctr" indent="0" marL="0">
+              <a:buNone/>
+            </a:pPr>
+            <a:r>
+              <a:rPr lang="en-US" sz="1500" b="1" dirty="0">
+                <a:solidFill>
+                  <a:srgbClr val="0E1726"/>
+                </a:solidFill>
+                <a:latin typeface="Arial" pitchFamily="34" charset="0"/>
+                <a:ea typeface="Arial" pitchFamily="34" charset="-122"/>
+                <a:cs typeface="Arial" pitchFamily="34" charset="-120"/>
+              </a:rPr>
+              <a:t>2</a:t>
+            </a:r>
+            <a:endParaRPr lang="en-US" sz="1500" dirty="0"/>
+          </a:p>
+        </p:txBody>
+      </p:sp>
+      <p:sp>
+        <p:nvSpPr>
+          <p:cNvPr id="12" name="Text 9"/>
+          <p:cNvSpPr/>
+          <p:nvPr/>
+        </p:nvSpPr>
+        <p:spPr>
+          <a:xfrm>
+            <a:off x="1051560" y="2788920"/>
+            <a:ext cx="7589520" cy="658368"/>
+          </a:xfrm>
+          <a:prstGeom prst="rect">
+            <a:avLst/>
+          </a:prstGeom>
+          <a:noFill/>
+          <a:ln/>
+        </p:spPr>
+        <p:txBody>
+          <a:bodyPr wrap="square" lIns="0" tIns="0" rIns="0" bIns="0" rtlCol="0" anchor="ctr">
+            <a:normAutofit/>
+          </a:bodyPr>
+          <a:lstStyle/>
+          <a:p>
+            <a:pPr indent="0" marL="0">
+              <a:buNone/>
+            </a:pPr>
+            <a:r>
+              <a:rPr lang="en-US" sz="1350" dirty="0">
                 <a:solidFill>
                   <a:srgbClr val="1F2937"/>
                 </a:solidFill>
@@ -7392,20 +7365,99 @@
                 <a:ea typeface="Calibri" pitchFamily="34" charset="-122"/>
                 <a:cs typeface="Calibri" pitchFamily="34" charset="-120"/>
               </a:rPr>
-              <a:t>Proof the forged token / cross-user access now fails</a:t>
-            </a:r>
-            <a:endParaRPr lang="en-US" sz="1400" dirty="0"/>
-          </a:p>
-          <a:p>
-            <a:pPr marL="342900" indent="-342900">
-              <a:spcAft>
-                <a:spcPts val="600"/>
-              </a:spcAft>
-              <a:buSzPct val="100000"/>
-              <a:buChar char="•"/>
-            </a:pPr>
-            <a:r>
-              <a:rPr lang="en-US" sz="1400" dirty="0">
+              <a:t>Crack/forge a weak JWT (alg:none AND the weak HMAC secret — two separate graded attacks)</a:t>
+            </a:r>
+            <a:endParaRPr lang="en-US" sz="1350" dirty="0"/>
+          </a:p>
+        </p:txBody>
+      </p:sp>
+      <p:sp>
+        <p:nvSpPr>
+          <p:cNvPr id="13" name="Shape 10"/>
+          <p:cNvSpPr/>
+          <p:nvPr/>
+        </p:nvSpPr>
+        <p:spPr>
+          <a:xfrm>
+            <a:off x="502920" y="3520440"/>
+            <a:ext cx="384048" cy="384048"/>
+          </a:xfrm>
+          <a:prstGeom prst="ellipse">
+            <a:avLst/>
+          </a:prstGeom>
+          <a:solidFill>
+            <a:srgbClr val="E35205"/>
+          </a:solidFill>
+          <a:ln/>
+        </p:spPr>
+      </p:sp>
+      <p:sp>
+        <p:nvSpPr>
+          <p:cNvPr id="14" name="Text 11"/>
+          <p:cNvSpPr/>
+          <p:nvPr/>
+        </p:nvSpPr>
+        <p:spPr>
+          <a:xfrm>
+            <a:off x="502920" y="3520440"/>
+            <a:ext cx="384048" cy="384048"/>
+          </a:xfrm>
+          <a:prstGeom prst="rect">
+            <a:avLst/>
+          </a:prstGeom>
+          <a:noFill/>
+          <a:ln/>
+        </p:spPr>
+        <p:txBody>
+          <a:bodyPr wrap="square" lIns="0" tIns="0" rIns="0" bIns="0" rtlCol="0" anchor="ctr"/>
+          <a:lstStyle/>
+          <a:p>
+            <a:pPr algn="ctr" indent="0" marL="0">
+              <a:buNone/>
+            </a:pPr>
+            <a:r>
+              <a:rPr lang="en-US" sz="1500" b="1" dirty="0">
+                <a:solidFill>
+                  <a:srgbClr val="0E1726"/>
+                </a:solidFill>
+                <a:latin typeface="Arial" pitchFamily="34" charset="0"/>
+                <a:ea typeface="Arial" pitchFamily="34" charset="-122"/>
+                <a:cs typeface="Arial" pitchFamily="34" charset="-120"/>
+              </a:rPr>
+              <a:t>3</a:t>
+            </a:r>
+            <a:endParaRPr lang="en-US" sz="1500" dirty="0"/>
+          </a:p>
+        </p:txBody>
+      </p:sp>
+      <p:sp>
+        <p:nvSpPr>
+          <p:cNvPr id="15" name="Text 12"/>
+          <p:cNvSpPr/>
+          <p:nvPr/>
+        </p:nvSpPr>
+        <p:spPr>
+          <a:xfrm>
+            <a:off x="1051560" y="3520440"/>
+            <a:ext cx="7589520" cy="402336"/>
+          </a:xfrm>
+          <a:prstGeom prst="rect">
+            <a:avLst/>
+          </a:prstGeom>
+          <a:noFill/>
+          <a:ln/>
+        </p:spPr>
+        <p:txBody>
+          <a:bodyPr wrap="square" lIns="0" tIns="0" rIns="0" bIns="0" rtlCol="0" anchor="ctr">
+            <a:normAutofit/>
+          </a:bodyPr>
+          <a:lstStyle/>
+          <a:p>
+            <a:pPr indent="0" marL="0">
+              <a:buNone/>
+            </a:pPr>
+            <a:r>
+              <a:rPr lang="en-US" sz="1350" dirty="0">
                 <a:solidFill>
                   <a:srgbClr val="1F2937"/>
                 </a:solidFill>
@@ -7413,22 +7465,42 @@
                 <a:ea typeface="Calibri" pitchFamily="34" charset="-122"/>
                 <a:cs typeface="Calibri" pitchFamily="34" charset="-120"/>
               </a:rPr>
-              <a:t>+ Audit the AI / EiPE / Prompt Problem (see worksheet)</a:t>
-            </a:r>
-            <a:endParaRPr lang="en-US" sz="1400" dirty="0"/>
-          </a:p>
-        </p:txBody>
-      </p:sp>
-      <p:sp>
-        <p:nvSpPr>
-          <p:cNvPr id="7" name="Text 4"/>
-          <p:cNvSpPr/>
-          <p:nvPr/>
-        </p:nvSpPr>
-        <p:spPr>
-          <a:xfrm>
-            <a:off x="457200" y="4800600"/>
-            <a:ext cx="6949440" cy="274320"/>
+              <a:t>Switch to solution_app.py; re-test: access denied</a:t>
+            </a:r>
+            <a:endParaRPr lang="en-US" sz="1350" dirty="0"/>
+          </a:p>
+        </p:txBody>
+      </p:sp>
+      <p:sp>
+        <p:nvSpPr>
+          <p:cNvPr id="16" name="Shape 13"/>
+          <p:cNvSpPr/>
+          <p:nvPr/>
+        </p:nvSpPr>
+        <p:spPr>
+          <a:xfrm>
+            <a:off x="502920" y="3995928"/>
+            <a:ext cx="384048" cy="384048"/>
+          </a:xfrm>
+          <a:prstGeom prst="ellipse">
+            <a:avLst/>
+          </a:prstGeom>
+          <a:solidFill>
+            <a:srgbClr val="E35205"/>
+          </a:solidFill>
+          <a:ln/>
+        </p:spPr>
+      </p:sp>
+      <p:sp>
+        <p:nvSpPr>
+          <p:cNvPr id="17" name="Text 14"/>
+          <p:cNvSpPr/>
+          <p:nvPr/>
+        </p:nvSpPr>
+        <p:spPr>
+          <a:xfrm>
+            <a:off x="502920" y="3995928"/>
+            <a:ext cx="384048" cy="384048"/>
           </a:xfrm>
           <a:prstGeom prst="rect">
             <a:avLst/>
@@ -7438,20 +7510,100 @@
         </p:spPr>
         <p:txBody>
           <a:bodyPr wrap="square" lIns="0" tIns="0" rIns="0" bIns="0" rtlCol="0" anchor="ctr"/>
+          <a:lstStyle/>
+          <a:p>
+            <a:pPr algn="ctr" indent="0" marL="0">
+              <a:buNone/>
+            </a:pPr>
+            <a:r>
+              <a:rPr lang="en-US" sz="1500" b="1" dirty="0">
+                <a:solidFill>
+                  <a:srgbClr val="0E1726"/>
+                </a:solidFill>
+                <a:latin typeface="Arial" pitchFamily="34" charset="0"/>
+                <a:ea typeface="Arial" pitchFamily="34" charset="-122"/>
+                <a:cs typeface="Arial" pitchFamily="34" charset="-120"/>
+              </a:rPr>
+              <a:t>4</a:t>
+            </a:r>
+            <a:endParaRPr lang="en-US" sz="1500" dirty="0"/>
+          </a:p>
+        </p:txBody>
+      </p:sp>
+      <p:sp>
+        <p:nvSpPr>
+          <p:cNvPr id="18" name="Text 15"/>
+          <p:cNvSpPr/>
+          <p:nvPr/>
+        </p:nvSpPr>
+        <p:spPr>
+          <a:xfrm>
+            <a:off x="1051560" y="3995928"/>
+            <a:ext cx="7589520" cy="402336"/>
+          </a:xfrm>
+          <a:prstGeom prst="rect">
+            <a:avLst/>
+          </a:prstGeom>
+          <a:noFill/>
+          <a:ln/>
+        </p:spPr>
+        <p:txBody>
+          <a:bodyPr wrap="square" lIns="0" tIns="0" rIns="0" bIns="0" rtlCol="0" anchor="ctr">
+            <a:normAutofit/>
+          </a:bodyPr>
           <a:lstStyle/>
           <a:p>
             <a:pPr indent="0" marL="0">
               <a:buNone/>
             </a:pPr>
             <a:r>
-              <a:rPr lang="en-US" sz="900" dirty="0">
-                <a:solidFill>
-                  <a:srgbClr val="64748B"/>
+              <a:rPr lang="en-US" sz="1350" dirty="0">
+                <a:solidFill>
+                  <a:srgbClr val="1F2937"/>
                 </a:solidFill>
                 <a:latin typeface="Calibri" pitchFamily="34" charset="0"/>
                 <a:ea typeface="Calibri" pitchFamily="34" charset="-122"/>
                 <a:cs typeface="Calibri" pitchFamily="34" charset="-120"/>
               </a:rPr>
+              <a:t>Cite the exact line that fixes each of the three attacks</a:t>
+            </a:r>
+            <a:endParaRPr lang="en-US" sz="1350" dirty="0"/>
+          </a:p>
+        </p:txBody>
+      </p:sp>
+      <p:sp>
+        <p:nvSpPr>
+          <p:cNvPr id="19" name="Text 16"/>
+          <p:cNvSpPr/>
+          <p:nvPr/>
+        </p:nvSpPr>
+        <p:spPr>
+          <a:xfrm>
+            <a:off x="457200" y="4800600"/>
+            <a:ext cx="6949440" cy="274320"/>
+          </a:xfrm>
+          <a:prstGeom prst="rect">
+            <a:avLst/>
+          </a:prstGeom>
+          <a:noFill/>
+          <a:ln/>
+        </p:spPr>
+        <p:txBody>
+          <a:bodyPr wrap="square" lIns="0" tIns="0" rIns="0" bIns="0" rtlCol="0" anchor="ctr"/>
+          <a:lstStyle/>
+          <a:p>
+            <a:pPr indent="0" marL="0">
+              <a:buNone/>
+            </a:pPr>
+            <a:r>
+              <a:rPr lang="en-US" sz="900" dirty="0">
+                <a:solidFill>
+                  <a:srgbClr val="64748B"/>
+                </a:solidFill>
+                <a:latin typeface="Calibri" pitchFamily="34" charset="0"/>
+                <a:ea typeface="Calibri" pitchFamily="34" charset="-122"/>
+                <a:cs typeface="Calibri" pitchFamily="34" charset="-120"/>
+              </a:rPr>
               <a:t>Software Security · Week 6</a:t>
             </a:r>
             <a:endParaRPr lang="en-US" sz="900" dirty="0"/>
@@ -7460,7 +7612,7 @@
       </p:sp>
       <p:pic>
         <p:nvPicPr>
-          <p:cNvPr id="8" name="Image 1" descr="/Users/pop7/Library/CloudStorage/OneDrive-MonsterConnectCo.,Ltd/Lecture/KOSEN69 - software-security/slides/pptx/assets/logo-small.png">    </p:cNvPr>
+          <p:cNvPr id="20" name="Image 1" descr="/Users/pop7/Library/CloudStorage/OneDrive-MonsterConnectCo.,Ltd/Lecture/KOSEN69 - software-security/slides/pptx/assets/logo-small.png">    </p:cNvPr>
           <p:cNvPicPr>
             <a:picLocks noChangeAspect="1"/>
           </p:cNvPicPr>
@@ -7598,7 +7750,7 @@
                 <a:ea typeface="Arial" pitchFamily="34" charset="-122"/>
                 <a:cs typeface="Arial" pitchFamily="34" charset="-120"/>
               </a:rPr>
-              <a:t>Key takeaways</a:t>
+              <a:t>Deliverable</a:t>
             </a:r>
             <a:endParaRPr lang="en-US" sz="2600" dirty="0"/>
           </a:p>
@@ -7613,11 +7765,11 @@
         <p:spPr>
           <a:xfrm>
             <a:off x="457200" y="1325880"/>
-            <a:ext cx="8229600" cy="1207008"/>
+            <a:ext cx="8229600" cy="1517904"/>
           </a:xfrm>
           <a:prstGeom prst="roundRect">
             <a:avLst>
-              <a:gd name="adj" fmla="val 6061"/>
+              <a:gd name="adj" fmla="val 4819"/>
             </a:avLst>
           </a:prstGeom>
           <a:solidFill>
@@ -7642,7 +7794,7 @@
         <p:spPr>
           <a:xfrm>
             <a:off x="731520" y="1435608"/>
-            <a:ext cx="7680960" cy="987552"/>
+            <a:ext cx="7680960" cy="1298448"/>
           </a:xfrm>
           <a:prstGeom prst="rect">
             <a:avLst/>
@@ -7672,7 +7824,7 @@
                 <a:ea typeface="Calibri" pitchFamily="34" charset="-122"/>
                 <a:cs typeface="Calibri" pitchFamily="34" charset="-120"/>
               </a:rPr>
-              <a:t>Authenticate once, authorize every request</a:t>
+              <a:t>IDOR + JWT findings with impact</a:t>
             </a:r>
             <a:endParaRPr lang="en-US" sz="1400" dirty="0"/>
           </a:p>
@@ -7693,7 +7845,7 @@
                 <a:ea typeface="Calibri" pitchFamily="34" charset="-122"/>
                 <a:cs typeface="Calibri" pitchFamily="34" charset="-120"/>
               </a:rPr>
-              <a:t>Never trust client-supplied IDs or tokens blindly</a:t>
+              <a:t>Citation of the fix lines in solution_app.py for all three attacks</a:t>
             </a:r>
             <a:endParaRPr lang="en-US" sz="1400" dirty="0"/>
           </a:p>
@@ -7714,7 +7866,28 @@
                 <a:ea typeface="Calibri" pitchFamily="34" charset="-122"/>
                 <a:cs typeface="Calibri" pitchFamily="34" charset="-120"/>
               </a:rPr>
-              <a:t>Deny by default</a:t>
+              <a:t>Proof the forged token / cross-user access now fails</a:t>
+            </a:r>
+            <a:endParaRPr lang="en-US" sz="1400" dirty="0"/>
+          </a:p>
+          <a:p>
+            <a:pPr marL="342900" indent="-342900">
+              <a:spcAft>
+                <a:spcPts val="600"/>
+              </a:spcAft>
+              <a:buSzPct val="100000"/>
+              <a:buChar char="•"/>
+            </a:pPr>
+            <a:r>
+              <a:rPr lang="en-US" sz="1400" dirty="0">
+                <a:solidFill>
+                  <a:srgbClr val="1F2937"/>
+                </a:solidFill>
+                <a:latin typeface="Calibri" pitchFamily="34" charset="0"/>
+                <a:ea typeface="Calibri" pitchFamily="34" charset="-122"/>
+                <a:cs typeface="Calibri" pitchFamily="34" charset="-120"/>
+              </a:rPr>
+              <a:t>+ Audit the AI / EiPE / Prompt Problem (see worksheet)</a:t>
             </a:r>
             <a:endParaRPr lang="en-US" sz="1400" dirty="0"/>
           </a:p>
@@ -8160,6 +8333,307 @@
       </p:grpSpPr>
       <p:sp>
         <p:nvSpPr>
+          <p:cNvPr id="2" name="Shape 0"/>
+          <p:cNvSpPr/>
+          <p:nvPr/>
+        </p:nvSpPr>
+        <p:spPr>
+          <a:xfrm>
+            <a:off x="457200" y="384048"/>
+            <a:ext cx="530352" cy="530352"/>
+          </a:xfrm>
+          <a:prstGeom prst="ellipse">
+            <a:avLst/>
+          </a:prstGeom>
+          <a:solidFill>
+            <a:srgbClr val="E35205"/>
+          </a:solidFill>
+          <a:ln/>
+          <a:effectLst>
+            <a:outerShdw sx="100000" sy="100000" kx="0" ky="0" algn="bl" rotWithShape="0" blurRad="76200" dist="25400" dir="5400000">
+              <a:srgbClr val="000000">
+                <a:alpha val="12000"/>
+              </a:srgbClr>
+            </a:outerShdw>
+          </a:effectLst>
+        </p:spPr>
+      </p:sp>
+      <p:pic>
+        <p:nvPicPr>
+          <p:cNvPr id="3" name="Image 0" descr="preencoded.png">    </p:cNvPr>
+          <p:cNvPicPr>
+            <a:picLocks noChangeAspect="1"/>
+          </p:cNvPicPr>
+          <p:nvPr/>
+        </p:nvPicPr>
+        <p:blipFill>
+          <a:blip r:embed="rId1"/>
+          <a:stretch>
+            <a:fillRect/>
+          </a:stretch>
+        </p:blipFill>
+        <p:spPr>
+          <a:xfrm>
+            <a:off x="594360" y="521208"/>
+            <a:ext cx="256032" cy="256032"/>
+          </a:xfrm>
+          <a:prstGeom prst="rect">
+            <a:avLst/>
+          </a:prstGeom>
+        </p:spPr>
+      </p:pic>
+      <p:sp>
+        <p:nvSpPr>
+          <p:cNvPr id="4" name="Text 1"/>
+          <p:cNvSpPr/>
+          <p:nvPr/>
+        </p:nvSpPr>
+        <p:spPr>
+          <a:xfrm>
+            <a:off x="1143000" y="329184"/>
+            <a:ext cx="7498080" cy="603504"/>
+          </a:xfrm>
+          <a:prstGeom prst="rect">
+            <a:avLst/>
+          </a:prstGeom>
+          <a:noFill/>
+          <a:ln/>
+        </p:spPr>
+        <p:txBody>
+          <a:bodyPr wrap="square" lIns="0" tIns="0" rIns="0" bIns="0" rtlCol="0" anchor="ctr"/>
+          <a:lstStyle/>
+          <a:p>
+            <a:pPr indent="0" marL="0">
+              <a:buNone/>
+            </a:pPr>
+            <a:r>
+              <a:rPr lang="en-US" sz="2600" b="1" dirty="0">
+                <a:solidFill>
+                  <a:srgbClr val="1F2937"/>
+                </a:solidFill>
+                <a:latin typeface="Arial" pitchFamily="34" charset="0"/>
+                <a:ea typeface="Arial" pitchFamily="34" charset="-122"/>
+                <a:cs typeface="Arial" pitchFamily="34" charset="-120"/>
+              </a:rPr>
+              <a:t>Key takeaways</a:t>
+            </a:r>
+            <a:endParaRPr lang="en-US" sz="2600" dirty="0"/>
+          </a:p>
+        </p:txBody>
+      </p:sp>
+      <p:sp>
+        <p:nvSpPr>
+          <p:cNvPr id="5" name="Shape 2"/>
+          <p:cNvSpPr/>
+          <p:nvPr/>
+        </p:nvSpPr>
+        <p:spPr>
+          <a:xfrm>
+            <a:off x="457200" y="1325880"/>
+            <a:ext cx="8229600" cy="1207008"/>
+          </a:xfrm>
+          <a:prstGeom prst="roundRect">
+            <a:avLst>
+              <a:gd name="adj" fmla="val 6061"/>
+            </a:avLst>
+          </a:prstGeom>
+          <a:solidFill>
+            <a:srgbClr val="F1F5F9"/>
+          </a:solidFill>
+          <a:ln/>
+          <a:effectLst>
+            <a:outerShdw sx="100000" sy="100000" kx="0" ky="0" algn="bl" rotWithShape="0" blurRad="76200" dist="25400" dir="5400000">
+              <a:srgbClr val="000000">
+                <a:alpha val="12000"/>
+              </a:srgbClr>
+            </a:outerShdw>
+          </a:effectLst>
+        </p:spPr>
+      </p:sp>
+      <p:sp>
+        <p:nvSpPr>
+          <p:cNvPr id="6" name="Text 3"/>
+          <p:cNvSpPr/>
+          <p:nvPr/>
+        </p:nvSpPr>
+        <p:spPr>
+          <a:xfrm>
+            <a:off x="731520" y="1435608"/>
+            <a:ext cx="7680960" cy="987552"/>
+          </a:xfrm>
+          <a:prstGeom prst="rect">
+            <a:avLst/>
+          </a:prstGeom>
+          <a:noFill/>
+          <a:ln/>
+        </p:spPr>
+        <p:txBody>
+          <a:bodyPr wrap="square" lIns="0" tIns="0" rIns="0" bIns="0" rtlCol="0" anchor="t">
+            <a:normAutofit/>
+          </a:bodyPr>
+          <a:lstStyle/>
+          <a:p>
+            <a:pPr marL="342900" indent="-342900">
+              <a:spcAft>
+                <a:spcPts val="600"/>
+              </a:spcAft>
+              <a:buSzPct val="100000"/>
+              <a:buChar char="•"/>
+            </a:pPr>
+            <a:r>
+              <a:rPr lang="en-US" sz="1400" dirty="0">
+                <a:solidFill>
+                  <a:srgbClr val="1F2937"/>
+                </a:solidFill>
+                <a:latin typeface="Calibri" pitchFamily="34" charset="0"/>
+                <a:ea typeface="Calibri" pitchFamily="34" charset="-122"/>
+                <a:cs typeface="Calibri" pitchFamily="34" charset="-120"/>
+              </a:rPr>
+              <a:t>Authenticate once, authorize every request</a:t>
+            </a:r>
+            <a:endParaRPr lang="en-US" sz="1400" dirty="0"/>
+          </a:p>
+          <a:p>
+            <a:pPr marL="342900" indent="-342900">
+              <a:spcAft>
+                <a:spcPts val="600"/>
+              </a:spcAft>
+              <a:buSzPct val="100000"/>
+              <a:buChar char="•"/>
+            </a:pPr>
+            <a:r>
+              <a:rPr lang="en-US" sz="1400" dirty="0">
+                <a:solidFill>
+                  <a:srgbClr val="1F2937"/>
+                </a:solidFill>
+                <a:latin typeface="Calibri" pitchFamily="34" charset="0"/>
+                <a:ea typeface="Calibri" pitchFamily="34" charset="-122"/>
+                <a:cs typeface="Calibri" pitchFamily="34" charset="-120"/>
+              </a:rPr>
+              <a:t>Never trust client-supplied IDs or tokens blindly</a:t>
+            </a:r>
+            <a:endParaRPr lang="en-US" sz="1400" dirty="0"/>
+          </a:p>
+          <a:p>
+            <a:pPr marL="342900" indent="-342900">
+              <a:spcAft>
+                <a:spcPts val="600"/>
+              </a:spcAft>
+              <a:buSzPct val="100000"/>
+              <a:buChar char="•"/>
+            </a:pPr>
+            <a:r>
+              <a:rPr lang="en-US" sz="1400" dirty="0">
+                <a:solidFill>
+                  <a:srgbClr val="1F2937"/>
+                </a:solidFill>
+                <a:latin typeface="Calibri" pitchFamily="34" charset="0"/>
+                <a:ea typeface="Calibri" pitchFamily="34" charset="-122"/>
+                <a:cs typeface="Calibri" pitchFamily="34" charset="-120"/>
+              </a:rPr>
+              <a:t>Deny by default</a:t>
+            </a:r>
+            <a:endParaRPr lang="en-US" sz="1400" dirty="0"/>
+          </a:p>
+        </p:txBody>
+      </p:sp>
+      <p:sp>
+        <p:nvSpPr>
+          <p:cNvPr id="7" name="Text 4"/>
+          <p:cNvSpPr/>
+          <p:nvPr/>
+        </p:nvSpPr>
+        <p:spPr>
+          <a:xfrm>
+            <a:off x="457200" y="4800600"/>
+            <a:ext cx="6949440" cy="274320"/>
+          </a:xfrm>
+          <a:prstGeom prst="rect">
+            <a:avLst/>
+          </a:prstGeom>
+          <a:noFill/>
+          <a:ln/>
+        </p:spPr>
+        <p:txBody>
+          <a:bodyPr wrap="square" lIns="0" tIns="0" rIns="0" bIns="0" rtlCol="0" anchor="ctr"/>
+          <a:lstStyle/>
+          <a:p>
+            <a:pPr indent="0" marL="0">
+              <a:buNone/>
+            </a:pPr>
+            <a:r>
+              <a:rPr lang="en-US" sz="900" dirty="0">
+                <a:solidFill>
+                  <a:srgbClr val="64748B"/>
+                </a:solidFill>
+                <a:latin typeface="Calibri" pitchFamily="34" charset="0"/>
+                <a:ea typeface="Calibri" pitchFamily="34" charset="-122"/>
+                <a:cs typeface="Calibri" pitchFamily="34" charset="-120"/>
+              </a:rPr>
+              <a:t>Software Security · Week 6</a:t>
+            </a:r>
+            <a:endParaRPr lang="en-US" sz="900" dirty="0"/>
+          </a:p>
+        </p:txBody>
+      </p:sp>
+      <p:pic>
+        <p:nvPicPr>
+          <p:cNvPr id="8" name="Image 1" descr="/Users/pop7/Library/CloudStorage/OneDrive-MonsterConnectCo.,Ltd/Lecture/KOSEN69 - software-security/slides/pptx/assets/logo-small.png">    </p:cNvPr>
+          <p:cNvPicPr>
+            <a:picLocks noChangeAspect="1"/>
+          </p:cNvPicPr>
+          <p:nvPr/>
+        </p:nvPicPr>
+        <p:blipFill>
+          <a:blip r:embed="rId2"/>
+          <a:stretch>
+            <a:fillRect/>
+          </a:stretch>
+        </p:blipFill>
+        <p:spPr>
+          <a:xfrm>
+            <a:off x="7882128" y="4700016"/>
+            <a:ext cx="768096" cy="356616"/>
+          </a:xfrm>
+          <a:prstGeom prst="rect">
+            <a:avLst/>
+          </a:prstGeom>
+        </p:spPr>
+      </p:pic>
+    </p:spTree>
+  </p:cSld>
+  <p:clrMapOvr>
+    <a:masterClrMapping/>
+  </p:clrMapOvr>
+</p:sld>
+</file>
+
+<file path=ppt/slides/slide21.xml><?xml version="1.0" encoding="utf-8"?>
+<p:sld xmlns:a="http://schemas.openxmlformats.org/drawingml/2006/main" xmlns:r="http://schemas.openxmlformats.org/officeDocument/2006/relationships" xmlns:p="http://schemas.openxmlformats.org/presentationml/2006/main">
+  <p:cSld name="Slide 21">
+    <p:bg>
+      <p:bgPr>
+        <a:solidFill>
+          <a:srgbClr val="FFFFFF"/>
+        </a:solidFill>
+      </p:bgPr>
+    </p:bg>
+    <p:spTree>
+      <p:nvGrpSpPr>
+        <p:cNvPr id="1" name=""/>
+        <p:cNvGrpSpPr/>
+        <p:nvPr/>
+      </p:nvGrpSpPr>
+      <p:grpSpPr>
+        <a:xfrm>
+          <a:off x="0" y="0"/>
+          <a:ext cx="0" cy="0"/>
+          <a:chOff x="0" y="0"/>
+          <a:chExt cx="0" cy="0"/>
+        </a:xfrm>
+      </p:grpSpPr>
+      <p:sp>
+        <p:nvSpPr>
           <p:cNvPr id="2" name="Text 0"/>
           <p:cNvSpPr/>
           <p:nvPr/>
@@ -9315,74 +9789,6 @@
         <p:spPr>
           <a:xfrm>
             <a:off x="457200" y="1325880"/>
-            <a:ext cx="8229600" cy="493776"/>
-          </a:xfrm>
-          <a:prstGeom prst="roundRect">
-            <a:avLst>
-              <a:gd name="adj" fmla="val 11111"/>
-            </a:avLst>
-          </a:prstGeom>
-          <a:solidFill>
-            <a:srgbClr val="0A1020"/>
-          </a:solidFill>
-          <a:ln w="12700">
-            <a:solidFill>
-              <a:srgbClr val="E8EDF3"/>
-            </a:solidFill>
-            <a:prstDash val="solid"/>
-          </a:ln>
-        </p:spPr>
-      </p:sp>
-      <p:sp>
-        <p:nvSpPr>
-          <p:cNvPr id="6" name="Text 3"/>
-          <p:cNvSpPr/>
-          <p:nvPr/>
-        </p:nvSpPr>
-        <p:spPr>
-          <a:xfrm>
-            <a:off x="640080" y="1399032"/>
-            <a:ext cx="7863840" cy="347472"/>
-          </a:xfrm>
-          <a:prstGeom prst="rect">
-            <a:avLst/>
-          </a:prstGeom>
-          <a:noFill/>
-          <a:ln/>
-        </p:spPr>
-        <p:txBody>
-          <a:bodyPr wrap="square" lIns="0" tIns="0" rIns="0" bIns="0" rtlCol="0" anchor="t">
-            <a:normAutofit/>
-          </a:bodyPr>
-          <a:lstStyle/>
-          <a:p>
-            <a:pPr indent="0" marL="0">
-              <a:buNone/>
-            </a:pPr>
-            <a:r>
-              <a:rPr lang="en-US" sz="1150" dirty="0">
-                <a:solidFill>
-                  <a:srgbClr val="9FE7D6"/>
-                </a:solidFill>
-                <a:latin typeface="Courier New" pitchFamily="34" charset="0"/>
-                <a:ea typeface="Courier New" pitchFamily="34" charset="-122"/>
-                <a:cs typeface="Courier New" pitchFamily="34" charset="-120"/>
-              </a:rPr>
-              <a:t>header.payload.signature</a:t>
-            </a:r>
-            <a:endParaRPr lang="en-US" sz="1150" dirty="0"/>
-          </a:p>
-        </p:txBody>
-      </p:sp>
-      <p:sp>
-        <p:nvSpPr>
-          <p:cNvPr id="7" name="Shape 4"/>
-          <p:cNvSpPr/>
-          <p:nvPr/>
-        </p:nvSpPr>
-        <p:spPr>
-          <a:xfrm>
-            <a:off x="457200" y="1984248"/>
             <a:ext cx="8229600" cy="1517904"/>
           </a:xfrm>
           <a:prstGeom prst="roundRect">
@@ -9405,13 +9811,13 @@
       </p:sp>
       <p:sp>
         <p:nvSpPr>
-          <p:cNvPr id="8" name="Text 5"/>
-          <p:cNvSpPr/>
-          <p:nvPr/>
-        </p:nvSpPr>
-        <p:spPr>
-          <a:xfrm>
-            <a:off x="731520" y="2093976"/>
+          <p:cNvPr id="6" name="Text 3"/>
+          <p:cNvSpPr/>
+          <p:nvPr/>
+        </p:nvSpPr>
+        <p:spPr>
+          <a:xfrm>
+            <a:off x="731520" y="1435608"/>
             <a:ext cx="7680960" cy="1298448"/>
           </a:xfrm>
           <a:prstGeom prst="rect">
@@ -9513,14 +9919,14 @@
       </p:sp>
       <p:sp>
         <p:nvSpPr>
-          <p:cNvPr id="9" name="Text 6"/>
-          <p:cNvSpPr/>
-          <p:nvPr/>
-        </p:nvSpPr>
-        <p:spPr>
-          <a:xfrm>
-            <a:off x="457200" y="4800600"/>
-            <a:ext cx="6949440" cy="274320"/>
+          <p:cNvPr id="7" name="Text 4"/>
+          <p:cNvSpPr/>
+          <p:nvPr/>
+        </p:nvSpPr>
+        <p:spPr>
+          <a:xfrm>
+            <a:off x="548640" y="3008376"/>
+            <a:ext cx="8046720" cy="548640"/>
           </a:xfrm>
           <a:prstGeom prst="rect">
             <a:avLst/>
@@ -9529,21 +9935,62 @@
           <a:ln/>
         </p:spPr>
         <p:txBody>
-          <a:bodyPr wrap="square" lIns="0" tIns="0" rIns="0" bIns="0" rtlCol="0" anchor="ctr"/>
+          <a:bodyPr wrap="square" lIns="0" tIns="0" rIns="0" bIns="0" rtlCol="0" anchor="t">
+            <a:normAutofit/>
+          </a:bodyPr>
           <a:lstStyle/>
           <a:p>
             <a:pPr indent="0" marL="0">
               <a:buNone/>
             </a:pPr>
             <a:r>
-              <a:rPr lang="en-US" sz="900" dirty="0">
-                <a:solidFill>
-                  <a:srgbClr val="64748B"/>
+              <a:rPr lang="en-US" sz="1400" dirty="0">
+                <a:solidFill>
+                  <a:srgbClr val="1F2937"/>
                 </a:solidFill>
                 <a:latin typeface="Calibri" pitchFamily="34" charset="0"/>
                 <a:ea typeface="Calibri" pitchFamily="34" charset="-122"/>
                 <a:cs typeface="Calibri" pitchFamily="34" charset="-120"/>
               </a:rPr>
+              <a:t>Try it live: /sim/jwt-forge (interactive simulation, web only)</a:t>
+            </a:r>
+            <a:endParaRPr lang="en-US" sz="1400" dirty="0"/>
+          </a:p>
+        </p:txBody>
+      </p:sp>
+      <p:sp>
+        <p:nvSpPr>
+          <p:cNvPr id="8" name="Text 5"/>
+          <p:cNvSpPr/>
+          <p:nvPr/>
+        </p:nvSpPr>
+        <p:spPr>
+          <a:xfrm>
+            <a:off x="457200" y="4800600"/>
+            <a:ext cx="6949440" cy="274320"/>
+          </a:xfrm>
+          <a:prstGeom prst="rect">
+            <a:avLst/>
+          </a:prstGeom>
+          <a:noFill/>
+          <a:ln/>
+        </p:spPr>
+        <p:txBody>
+          <a:bodyPr wrap="square" lIns="0" tIns="0" rIns="0" bIns="0" rtlCol="0" anchor="ctr"/>
+          <a:lstStyle/>
+          <a:p>
+            <a:pPr indent="0" marL="0">
+              <a:buNone/>
+            </a:pPr>
+            <a:r>
+              <a:rPr lang="en-US" sz="900" dirty="0">
+                <a:solidFill>
+                  <a:srgbClr val="64748B"/>
+                </a:solidFill>
+                <a:latin typeface="Calibri" pitchFamily="34" charset="0"/>
+                <a:ea typeface="Calibri" pitchFamily="34" charset="-122"/>
+                <a:cs typeface="Calibri" pitchFamily="34" charset="-120"/>
+              </a:rPr>
               <a:t>Software Security · Week 6</a:t>
             </a:r>
             <a:endParaRPr lang="en-US" sz="900" dirty="0"/>
@@ -9552,7 +9999,7 @@
       </p:sp>
       <p:pic>
         <p:nvPicPr>
-          <p:cNvPr id="10" name="Image 1" descr="/Users/pop7/Library/CloudStorage/OneDrive-MonsterConnectCo.,Ltd/Lecture/KOSEN69 - software-security/slides/pptx/assets/logo-small.png">    </p:cNvPr>
+          <p:cNvPr id="9" name="Image 1" descr="/Users/pop7/Library/CloudStorage/OneDrive-MonsterConnectCo.,Ltd/Lecture/KOSEN69 - software-security/slides/pptx/assets/logo-small.png">    </p:cNvPr>
           <p:cNvPicPr>
             <a:picLocks noChangeAspect="1"/>
           </p:cNvPicPr>
@@ -10356,7 +10803,7 @@
                 <a:ea typeface="Arial" pitchFamily="34" charset="-122"/>
                 <a:cs typeface="Arial" pitchFamily="34" charset="-120"/>
               </a:rPr>
-              <a:t>Access control models</a:t>
+              <a:t>One request, two gates</a:t>
             </a:r>
             <a:endParaRPr lang="en-US" sz="2600" dirty="0"/>
           </a:p>
@@ -10364,43 +10811,14 @@
       </p:sp>
       <p:sp>
         <p:nvSpPr>
-          <p:cNvPr id="5" name="Shape 2"/>
-          <p:cNvSpPr/>
-          <p:nvPr/>
-        </p:nvSpPr>
-        <p:spPr>
-          <a:xfrm>
-            <a:off x="457200" y="1325880"/>
-            <a:ext cx="8229600" cy="1517904"/>
-          </a:xfrm>
-          <a:prstGeom prst="roundRect">
-            <a:avLst>
-              <a:gd name="adj" fmla="val 4819"/>
-            </a:avLst>
-          </a:prstGeom>
-          <a:solidFill>
-            <a:srgbClr val="F1F5F9"/>
-          </a:solidFill>
-          <a:ln/>
-          <a:effectLst>
-            <a:outerShdw sx="100000" sy="100000" kx="0" ky="0" algn="bl" rotWithShape="0" blurRad="76200" dist="25400" dir="5400000">
-              <a:srgbClr val="000000">
-                <a:alpha val="12000"/>
-              </a:srgbClr>
-            </a:outerShdw>
-          </a:effectLst>
-        </p:spPr>
-      </p:sp>
-      <p:sp>
-        <p:nvSpPr>
-          <p:cNvPr id="6" name="Text 3"/>
-          <p:cNvSpPr/>
-          <p:nvPr/>
-        </p:nvSpPr>
-        <p:spPr>
-          <a:xfrm>
-            <a:off x="731520" y="1435608"/>
-            <a:ext cx="7680960" cy="1298448"/>
+          <p:cNvPr id="5" name="Text 2"/>
+          <p:cNvSpPr/>
+          <p:nvPr/>
+        </p:nvSpPr>
+        <p:spPr>
+          <a:xfrm>
+            <a:off x="548640" y="1325880"/>
+            <a:ext cx="8046720" cy="1920240"/>
           </a:xfrm>
           <a:prstGeom prst="rect">
             <a:avLst/>
@@ -10414,12 +10832,8 @@
           </a:bodyPr>
           <a:lstStyle/>
           <a:p>
-            <a:pPr marL="342900" indent="-342900">
-              <a:spcAft>
-                <a:spcPts val="600"/>
-              </a:spcAft>
-              <a:buSzPct val="100000"/>
-              <a:buChar char="•"/>
+            <a:pPr indent="0" marL="0">
+              <a:buNone/>
             </a:pPr>
             <a:r>
               <a:rPr lang="en-US" sz="1400" dirty="0">
@@ -10430,171 +10844,45 @@
                 <a:ea typeface="Calibri" pitchFamily="34" charset="-122"/>
                 <a:cs typeface="Calibri" pitchFamily="34" charset="-120"/>
               </a:rPr>
-              <a:t>MAC — Mandatory: system-enforced labels (military)</a:t>
+              <a:t>See diagram: One HTTP request must pass two gates. Gate 1, authentication: verify the token's signature and algorithm — broken by alg:none and a weak hardcoded secret, so a forged token passes. Gate 2, authorization: does the caller own THIS object — broken because the ownership check never runs. The key point: even a perfectly valid, genuine token clears Gate 1 but must not be enough to clear Gate 2 on its own — alice's own valid login token can still read bob's order if Gate 2 is missing. (web only)</a:t>
             </a:r>
             <a:endParaRPr lang="en-US" sz="1400" dirty="0"/>
           </a:p>
-          <a:p>
-            <a:pPr marL="342900" indent="-342900">
-              <a:spcAft>
-                <a:spcPts val="600"/>
-              </a:spcAft>
-              <a:buSzPct val="100000"/>
-              <a:buChar char="•"/>
-            </a:pPr>
-            <a:r>
-              <a:rPr lang="en-US" sz="1400" dirty="0">
-                <a:solidFill>
-                  <a:srgbClr val="1F2937"/>
+        </p:txBody>
+      </p:sp>
+      <p:sp>
+        <p:nvSpPr>
+          <p:cNvPr id="6" name="Text 3"/>
+          <p:cNvSpPr/>
+          <p:nvPr/>
+        </p:nvSpPr>
+        <p:spPr>
+          <a:xfrm>
+            <a:off x="457200" y="4800600"/>
+            <a:ext cx="6949440" cy="274320"/>
+          </a:xfrm>
+          <a:prstGeom prst="rect">
+            <a:avLst/>
+          </a:prstGeom>
+          <a:noFill/>
+          <a:ln/>
+        </p:spPr>
+        <p:txBody>
+          <a:bodyPr wrap="square" lIns="0" tIns="0" rIns="0" bIns="0" rtlCol="0" anchor="ctr"/>
+          <a:lstStyle/>
+          <a:p>
+            <a:pPr indent="0" marL="0">
+              <a:buNone/>
+            </a:pPr>
+            <a:r>
+              <a:rPr lang="en-US" sz="900" dirty="0">
+                <a:solidFill>
+                  <a:srgbClr val="64748B"/>
                 </a:solidFill>
                 <a:latin typeface="Calibri" pitchFamily="34" charset="0"/>
                 <a:ea typeface="Calibri" pitchFamily="34" charset="-122"/>
                 <a:cs typeface="Calibri" pitchFamily="34" charset="-120"/>
               </a:rPr>
-              <a:t>DAC — Discretionary: owner grants access (file perms)</a:t>
-            </a:r>
-            <a:endParaRPr lang="en-US" sz="1400" dirty="0"/>
-          </a:p>
-          <a:p>
-            <a:pPr marL="342900" indent="-342900">
-              <a:spcAft>
-                <a:spcPts val="600"/>
-              </a:spcAft>
-              <a:buSzPct val="100000"/>
-              <a:buChar char="•"/>
-            </a:pPr>
-            <a:r>
-              <a:rPr lang="en-US" sz="1400" dirty="0">
-                <a:solidFill>
-                  <a:srgbClr val="1F2937"/>
-                </a:solidFill>
-                <a:latin typeface="Calibri" pitchFamily="34" charset="0"/>
-                <a:ea typeface="Calibri" pitchFamily="34" charset="-122"/>
-                <a:cs typeface="Calibri" pitchFamily="34" charset="-120"/>
-              </a:rPr>
-              <a:t>RBAC — Role-Based: permissions via roles</a:t>
-            </a:r>
-            <a:endParaRPr lang="en-US" sz="1400" dirty="0"/>
-          </a:p>
-          <a:p>
-            <a:pPr marL="342900" indent="-342900">
-              <a:spcAft>
-                <a:spcPts val="600"/>
-              </a:spcAft>
-              <a:buSzPct val="100000"/>
-              <a:buChar char="•"/>
-            </a:pPr>
-            <a:r>
-              <a:rPr lang="en-US" sz="1400" dirty="0">
-                <a:solidFill>
-                  <a:srgbClr val="1F2937"/>
-                </a:solidFill>
-                <a:latin typeface="Calibri" pitchFamily="34" charset="0"/>
-                <a:ea typeface="Calibri" pitchFamily="34" charset="-122"/>
-                <a:cs typeface="Calibri" pitchFamily="34" charset="-120"/>
-              </a:rPr>
-              <a:t>RuBAC — Rule-Based: conditions (time of day, IP)</a:t>
-            </a:r>
-            <a:endParaRPr lang="en-US" sz="1400" dirty="0"/>
-          </a:p>
-        </p:txBody>
-      </p:sp>
-      <p:sp>
-        <p:nvSpPr>
-          <p:cNvPr id="7" name="Shape 4"/>
-          <p:cNvSpPr/>
-          <p:nvPr/>
-        </p:nvSpPr>
-        <p:spPr>
-          <a:xfrm>
-            <a:off x="457200" y="3008376"/>
-            <a:ext cx="8229600" cy="822960"/>
-          </a:xfrm>
-          <a:prstGeom prst="roundRect">
-            <a:avLst>
-              <a:gd name="adj" fmla="val 8889"/>
-            </a:avLst>
-          </a:prstGeom>
-          <a:solidFill>
-            <a:srgbClr val="E8EDF3"/>
-          </a:solidFill>
-          <a:ln/>
-        </p:spPr>
-      </p:sp>
-      <p:sp>
-        <p:nvSpPr>
-          <p:cNvPr id="8" name="Text 5"/>
-          <p:cNvSpPr/>
-          <p:nvPr/>
-        </p:nvSpPr>
-        <p:spPr>
-          <a:xfrm>
-            <a:off x="731520" y="3008376"/>
-            <a:ext cx="7680960" cy="822960"/>
-          </a:xfrm>
-          <a:prstGeom prst="rect">
-            <a:avLst/>
-          </a:prstGeom>
-          <a:noFill/>
-          <a:ln/>
-        </p:spPr>
-        <p:txBody>
-          <a:bodyPr wrap="square" lIns="0" tIns="0" rIns="0" bIns="0" rtlCol="0" anchor="ctr">
-            <a:normAutofit/>
-          </a:bodyPr>
-          <a:lstStyle/>
-          <a:p>
-            <a:pPr indent="0" marL="0">
-              <a:buNone/>
-            </a:pPr>
-            <a:r>
-              <a:rPr lang="en-US" sz="1400" i="1" dirty="0">
-                <a:solidFill>
-                  <a:srgbClr val="E35205"/>
-                </a:solidFill>
-                <a:latin typeface="Calibri" pitchFamily="34" charset="0"/>
-                <a:ea typeface="Calibri" pitchFamily="34" charset="-122"/>
-                <a:cs typeface="Calibri" pitchFamily="34" charset="-120"/>
-              </a:rPr>
-              <a:t>Best practices: separation of duties · least privilege · implicit deny</a:t>
-            </a:r>
-            <a:endParaRPr lang="en-US" sz="1400" dirty="0"/>
-          </a:p>
-        </p:txBody>
-      </p:sp>
-      <p:sp>
-        <p:nvSpPr>
-          <p:cNvPr id="9" name="Text 6"/>
-          <p:cNvSpPr/>
-          <p:nvPr/>
-        </p:nvSpPr>
-        <p:spPr>
-          <a:xfrm>
-            <a:off x="457200" y="4800600"/>
-            <a:ext cx="6949440" cy="274320"/>
-          </a:xfrm>
-          <a:prstGeom prst="rect">
-            <a:avLst/>
-          </a:prstGeom>
-          <a:noFill/>
-          <a:ln/>
-        </p:spPr>
-        <p:txBody>
-          <a:bodyPr wrap="square" lIns="0" tIns="0" rIns="0" bIns="0" rtlCol="0" anchor="ctr"/>
-          <a:lstStyle/>
-          <a:p>
-            <a:pPr indent="0" marL="0">
-              <a:buNone/>
-            </a:pPr>
-            <a:r>
-              <a:rPr lang="en-US" sz="900" dirty="0">
-                <a:solidFill>
-                  <a:srgbClr val="64748B"/>
-                </a:solidFill>
-                <a:latin typeface="Calibri" pitchFamily="34" charset="0"/>
-                <a:ea typeface="Calibri" pitchFamily="34" charset="-122"/>
-                <a:cs typeface="Calibri" pitchFamily="34" charset="-120"/>
-              </a:rPr>
               <a:t>Software Security · Week 6</a:t>
             </a:r>
             <a:endParaRPr lang="en-US" sz="900" dirty="0"/>
@@ -10603,7 +10891,7 @@
       </p:sp>
       <p:pic>
         <p:nvPicPr>
-          <p:cNvPr id="10" name="Image 1" descr="/Users/pop7/Library/CloudStorage/OneDrive-MonsterConnectCo.,Ltd/Lecture/KOSEN69 - software-security/slides/pptx/assets/logo-small.png">    </p:cNvPr>
+          <p:cNvPr id="7" name="Image 1" descr="/Users/pop7/Library/CloudStorage/OneDrive-MonsterConnectCo.,Ltd/Lecture/KOSEN69 - software-security/slides/pptx/assets/logo-small.png">    </p:cNvPr>
           <p:cNvPicPr>
             <a:picLocks noChangeAspect="1"/>
           </p:cNvPicPr>
